--- a/wp-content/themes/booming-venture/assets/booming-venture-template.pptx
+++ b/wp-content/themes/booming-venture/assets/booming-venture-template.pptx
@@ -13,6 +13,10 @@
     <p:sldId id="261" r:id="rId12"/>
     <p:sldId id="262" r:id="rId13"/>
     <p:sldId id="263" r:id="rId14"/>
+    <p:sldId id="264" r:id="rId15"/>
+    <p:sldId id="265" r:id="rId16"/>
+    <p:sldId id="266" r:id="rId17"/>
+    <p:sldId id="267" r:id="rId18"/>
   </p:sldIdLst>
   <p:sldSz cx="12191695" cy="6858000" type="screen4x3"/>
   <p:notesSz cx="6858000" cy="9144000"/>
@@ -3139,19 +3143,347 @@
           </a:p>
         </p:txBody>
       </p:sp>
-      <p:sp>
-        <p:nvSpPr>
-          <p:cNvPr id="3" name="Rectangle 2"/>
+      <p:cxnSp>
+        <p:nvCxnSpPr>
+          <p:cNvPr id="3" name="Connector 2"/>
+          <p:cNvCxnSpPr/>
+          <p:nvPr/>
+        </p:nvCxnSpPr>
+        <p:spPr>
+          <a:xfrm>
+            <a:off x="8686800" y="365760"/>
+            <a:ext cx="1097280" cy="2194560"/>
+          </a:xfrm>
+          <a:prstGeom prst="line">
+            <a:avLst/>
+          </a:prstGeom>
+          <a:ln w="7620">
+            <a:solidFill>
+              <a:srgbClr val="0284C7"/>
+            </a:solidFill>
+          </a:ln>
+        </p:spPr>
+        <p:style>
+          <a:lnRef idx="2">
+            <a:schemeClr val="accent1"/>
+          </a:lnRef>
+          <a:fillRef idx="0">
+            <a:schemeClr val="accent1"/>
+          </a:fillRef>
+          <a:effectRef idx="1">
+            <a:schemeClr val="accent1"/>
+          </a:effectRef>
+          <a:fontRef idx="minor">
+            <a:schemeClr val="tx1"/>
+          </a:fontRef>
+        </p:style>
+      </p:cxnSp>
+      <p:cxnSp>
+        <p:nvCxnSpPr>
+          <p:cNvPr id="4" name="Connector 3"/>
+          <p:cNvCxnSpPr/>
+          <p:nvPr/>
+        </p:nvCxnSpPr>
+        <p:spPr>
+          <a:xfrm>
+            <a:off x="9235440" y="365760"/>
+            <a:ext cx="1097279" cy="2194560"/>
+          </a:xfrm>
+          <a:prstGeom prst="line">
+            <a:avLst/>
+          </a:prstGeom>
+          <a:ln w="7620">
+            <a:solidFill>
+              <a:srgbClr val="0284C7"/>
+            </a:solidFill>
+          </a:ln>
+        </p:spPr>
+        <p:style>
+          <a:lnRef idx="2">
+            <a:schemeClr val="accent1"/>
+          </a:lnRef>
+          <a:fillRef idx="0">
+            <a:schemeClr val="accent1"/>
+          </a:fillRef>
+          <a:effectRef idx="1">
+            <a:schemeClr val="accent1"/>
+          </a:effectRef>
+          <a:fontRef idx="minor">
+            <a:schemeClr val="tx1"/>
+          </a:fontRef>
+        </p:style>
+      </p:cxnSp>
+      <p:cxnSp>
+        <p:nvCxnSpPr>
+          <p:cNvPr id="5" name="Connector 4"/>
+          <p:cNvCxnSpPr/>
+          <p:nvPr/>
+        </p:nvCxnSpPr>
+        <p:spPr>
+          <a:xfrm>
+            <a:off x="9784080" y="365760"/>
+            <a:ext cx="1097280" cy="2194560"/>
+          </a:xfrm>
+          <a:prstGeom prst="line">
+            <a:avLst/>
+          </a:prstGeom>
+          <a:ln w="7620">
+            <a:solidFill>
+              <a:srgbClr val="0284C7"/>
+            </a:solidFill>
+          </a:ln>
+        </p:spPr>
+        <p:style>
+          <a:lnRef idx="2">
+            <a:schemeClr val="accent1"/>
+          </a:lnRef>
+          <a:fillRef idx="0">
+            <a:schemeClr val="accent1"/>
+          </a:fillRef>
+          <a:effectRef idx="1">
+            <a:schemeClr val="accent1"/>
+          </a:effectRef>
+          <a:fontRef idx="minor">
+            <a:schemeClr val="tx1"/>
+          </a:fontRef>
+        </p:style>
+      </p:cxnSp>
+      <p:cxnSp>
+        <p:nvCxnSpPr>
+          <p:cNvPr id="6" name="Connector 5"/>
+          <p:cNvCxnSpPr/>
+          <p:nvPr/>
+        </p:nvCxnSpPr>
+        <p:spPr>
+          <a:xfrm>
+            <a:off x="10332719" y="365760"/>
+            <a:ext cx="1097281" cy="2194560"/>
+          </a:xfrm>
+          <a:prstGeom prst="line">
+            <a:avLst/>
+          </a:prstGeom>
+          <a:ln w="7620">
+            <a:solidFill>
+              <a:srgbClr val="0284C7"/>
+            </a:solidFill>
+          </a:ln>
+        </p:spPr>
+        <p:style>
+          <a:lnRef idx="2">
+            <a:schemeClr val="accent1"/>
+          </a:lnRef>
+          <a:fillRef idx="0">
+            <a:schemeClr val="accent1"/>
+          </a:fillRef>
+          <a:effectRef idx="1">
+            <a:schemeClr val="accent1"/>
+          </a:effectRef>
+          <a:fontRef idx="minor">
+            <a:schemeClr val="tx1"/>
+          </a:fontRef>
+        </p:style>
+      </p:cxnSp>
+      <p:cxnSp>
+        <p:nvCxnSpPr>
+          <p:cNvPr id="7" name="Connector 6"/>
+          <p:cNvCxnSpPr/>
+          <p:nvPr/>
+        </p:nvCxnSpPr>
+        <p:spPr>
+          <a:xfrm>
+            <a:off x="10881360" y="365760"/>
+            <a:ext cx="1097279" cy="2194560"/>
+          </a:xfrm>
+          <a:prstGeom prst="line">
+            <a:avLst/>
+          </a:prstGeom>
+          <a:ln w="7620">
+            <a:solidFill>
+              <a:srgbClr val="0284C7"/>
+            </a:solidFill>
+          </a:ln>
+        </p:spPr>
+        <p:style>
+          <a:lnRef idx="2">
+            <a:schemeClr val="accent1"/>
+          </a:lnRef>
+          <a:fillRef idx="0">
+            <a:schemeClr val="accent1"/>
+          </a:fillRef>
+          <a:effectRef idx="1">
+            <a:schemeClr val="accent1"/>
+          </a:effectRef>
+          <a:fontRef idx="minor">
+            <a:schemeClr val="tx1"/>
+          </a:fontRef>
+        </p:style>
+      </p:cxnSp>
+      <p:sp>
+        <p:nvSpPr>
+          <p:cNvPr id="8" name="Rectangle 7"/>
           <p:cNvSpPr/>
           <p:nvPr/>
         </p:nvSpPr>
         <p:spPr>
           <a:xfrm>
             <a:off x="0" y="0"/>
-            <a:ext cx="12191695" cy="109728"/>
-          </a:xfrm>
-          <a:prstGeom prst="rect">
-            <a:avLst/>
+            <a:ext cx="12191695" cy="73152"/>
+          </a:xfrm>
+          <a:prstGeom prst="rect">
+            <a:avLst/>
+          </a:prstGeom>
+          <a:solidFill>
+            <a:srgbClr val="14B8A6"/>
+          </a:solidFill>
+          <a:ln>
+            <a:noFill/>
+          </a:ln>
+          <a:effectLst/>
+        </p:spPr>
+        <p:style>
+          <a:lnRef idx="1">
+            <a:schemeClr val="accent1"/>
+          </a:lnRef>
+          <a:fillRef idx="3">
+            <a:schemeClr val="accent1"/>
+          </a:fillRef>
+          <a:effectRef idx="2">
+            <a:schemeClr val="accent1"/>
+          </a:effectRef>
+          <a:fontRef idx="minor">
+            <a:schemeClr val="lt1"/>
+          </a:fontRef>
+        </p:style>
+        <p:txBody>
+          <a:bodyPr rtlCol="0" anchor="ctr"/>
+          <a:lstStyle/>
+          <a:p>
+            <a:pPr algn="ctr"/>
+          </a:p>
+        </p:txBody>
+      </p:sp>
+      <p:sp>
+        <p:nvSpPr>
+          <p:cNvPr id="9" name="TextBox 8"/>
+          <p:cNvSpPr txBox="1"/>
+          <p:nvPr/>
+        </p:nvSpPr>
+        <p:spPr>
+          <a:xfrm>
+            <a:off x="822960" y="1828800"/>
+            <a:ext cx="7315200" cy="457200"/>
+          </a:xfrm>
+          <a:prstGeom prst="rect">
+            <a:avLst/>
+          </a:prstGeom>
+          <a:noFill/>
+        </p:spPr>
+        <p:txBody>
+          <a:bodyPr wrap="square" tIns="25400" bIns="25400" lIns="25400" rIns="25400" anchor="t">
+            <a:spAutoFit/>
+          </a:bodyPr>
+          <a:lstStyle/>
+          <a:p>
+            <a:pPr algn="l"/>
+            <a:r>
+              <a:rPr sz="1200" b="1" i="0">
+                <a:solidFill>
+                  <a:srgbClr val="38BDF8"/>
+                </a:solidFill>
+                <a:latin typeface="Space Grotesk"/>
+              </a:rPr>
+              <a:t>BOOMING VENTURE</a:t>
+            </a:r>
+          </a:p>
+        </p:txBody>
+      </p:sp>
+      <p:sp>
+        <p:nvSpPr>
+          <p:cNvPr id="10" name="TextBox 9"/>
+          <p:cNvSpPr txBox="1"/>
+          <p:nvPr/>
+        </p:nvSpPr>
+        <p:spPr>
+          <a:xfrm>
+            <a:off x="822960" y="2286000"/>
+            <a:ext cx="10515600" cy="1828800"/>
+          </a:xfrm>
+          <a:prstGeom prst="rect">
+            <a:avLst/>
+          </a:prstGeom>
+          <a:noFill/>
+        </p:spPr>
+        <p:txBody>
+          <a:bodyPr wrap="square" tIns="25400" bIns="25400" lIns="25400" rIns="25400" anchor="t">
+            <a:spAutoFit/>
+          </a:bodyPr>
+          <a:lstStyle/>
+          <a:p>
+            <a:pPr algn="l"/>
+            <a:r>
+              <a:rPr sz="4400" b="1" i="0">
+                <a:solidFill>
+                  <a:srgbClr val="FFFFFF"/>
+                </a:solidFill>
+                <a:latin typeface="Space Grotesk"/>
+              </a:rPr>
+              <a:t>Smarter growth.
+Clear strategy.
+Creative performance.</a:t>
+            </a:r>
+          </a:p>
+        </p:txBody>
+      </p:sp>
+      <p:sp>
+        <p:nvSpPr>
+          <p:cNvPr id="11" name="TextBox 10"/>
+          <p:cNvSpPr txBox="1"/>
+          <p:nvPr/>
+        </p:nvSpPr>
+        <p:spPr>
+          <a:xfrm>
+            <a:off x="822960" y="4572000"/>
+            <a:ext cx="10058400" cy="548640"/>
+          </a:xfrm>
+          <a:prstGeom prst="rect">
+            <a:avLst/>
+          </a:prstGeom>
+          <a:noFill/>
+        </p:spPr>
+        <p:txBody>
+          <a:bodyPr wrap="square" tIns="25400" bIns="25400" lIns="25400" rIns="25400" anchor="t">
+            <a:spAutoFit/>
+          </a:bodyPr>
+          <a:lstStyle/>
+          <a:p>
+            <a:pPr algn="l"/>
+            <a:r>
+              <a:rPr sz="1800" b="0" i="0">
+                <a:solidFill>
+                  <a:srgbClr val="E2E8F0"/>
+                </a:solidFill>
+                <a:latin typeface="Inter"/>
+              </a:rPr>
+              <a:t>AI-powered marketing that delivers results. Personality. Powered by AI.</a:t>
+            </a:r>
+          </a:p>
+        </p:txBody>
+      </p:sp>
+      <p:sp>
+        <p:nvSpPr>
+          <p:cNvPr id="12" name="Rounded Rectangle 11"/>
+          <p:cNvSpPr/>
+          <p:nvPr/>
+        </p:nvSpPr>
+        <p:spPr>
+          <a:xfrm>
+            <a:off x="822960" y="5486400"/>
+            <a:ext cx="2194560" cy="548640"/>
+          </a:xfrm>
+          <a:prstGeom prst="roundRect">
+            <a:avLst>
+              <a:gd name="adj" fmla="val 50000"/>
+            </a:avLst>
           </a:prstGeom>
           <a:solidFill>
             <a:srgbClr val="0284C7"/>
@@ -3185,14 +3517,2124 @@
       </p:sp>
       <p:sp>
         <p:nvSpPr>
-          <p:cNvPr id="4" name="Rectangle 3"/>
+          <p:cNvPr id="13" name="TextBox 12"/>
+          <p:cNvSpPr txBox="1"/>
+          <p:nvPr/>
+        </p:nvSpPr>
+        <p:spPr>
+          <a:xfrm>
+            <a:off x="822960" y="5486400"/>
+            <a:ext cx="2194560" cy="548640"/>
+          </a:xfrm>
+          <a:prstGeom prst="rect">
+            <a:avLst/>
+          </a:prstGeom>
+          <a:noFill/>
+        </p:spPr>
+        <p:txBody>
+          <a:bodyPr wrap="square" tIns="25400" bIns="25400" lIns="25400" rIns="25400" anchor="ctr">
+            <a:spAutoFit/>
+          </a:bodyPr>
+          <a:lstStyle/>
+          <a:p>
+            <a:pPr algn="ctr"/>
+            <a:r>
+              <a:rPr sz="1300" b="1" i="0">
+                <a:solidFill>
+                  <a:srgbClr val="FFFFFF"/>
+                </a:solidFill>
+                <a:latin typeface="Space Grotesk"/>
+              </a:rPr>
+              <a:t>Start the Journey</a:t>
+            </a:r>
+          </a:p>
+        </p:txBody>
+      </p:sp>
+      <p:sp>
+        <p:nvSpPr>
+          <p:cNvPr id="14" name="TextBox 13"/>
+          <p:cNvSpPr txBox="1"/>
+          <p:nvPr/>
+        </p:nvSpPr>
+        <p:spPr>
+          <a:xfrm>
+            <a:off x="3154680" y="5486400"/>
+            <a:ext cx="2377440" cy="548640"/>
+          </a:xfrm>
+          <a:prstGeom prst="rect">
+            <a:avLst/>
+          </a:prstGeom>
+          <a:noFill/>
+        </p:spPr>
+        <p:txBody>
+          <a:bodyPr wrap="square" tIns="25400" bIns="25400" lIns="25400" rIns="25400" anchor="ctr">
+            <a:spAutoFit/>
+          </a:bodyPr>
+          <a:lstStyle/>
+          <a:p>
+            <a:pPr algn="l"/>
+            <a:r>
+              <a:rPr sz="1300" b="0" i="0">
+                <a:solidFill>
+                  <a:srgbClr val="E2E8F0"/>
+                </a:solidFill>
+                <a:latin typeface="Inter"/>
+              </a:rPr>
+              <a:t>Email Us Directly</a:t>
+            </a:r>
+          </a:p>
+        </p:txBody>
+      </p:sp>
+      <p:sp>
+        <p:nvSpPr>
+          <p:cNvPr id="15" name="TextBox 14"/>
+          <p:cNvSpPr txBox="1"/>
+          <p:nvPr/>
+        </p:nvSpPr>
+        <p:spPr>
+          <a:xfrm>
+            <a:off x="822960" y="6355080"/>
+            <a:ext cx="7315200" cy="274320"/>
+          </a:xfrm>
+          <a:prstGeom prst="rect">
+            <a:avLst/>
+          </a:prstGeom>
+          <a:noFill/>
+        </p:spPr>
+        <p:txBody>
+          <a:bodyPr wrap="square" tIns="25400" bIns="25400" lIns="25400" rIns="25400" anchor="t">
+            <a:spAutoFit/>
+          </a:bodyPr>
+          <a:lstStyle/>
+          <a:p>
+            <a:pPr algn="l"/>
+            <a:r>
+              <a:rPr sz="1100" b="0" i="0">
+                <a:solidFill>
+                  <a:srgbClr val="64748B"/>
+                </a:solidFill>
+                <a:latin typeface="Inter"/>
+              </a:rPr>
+              <a:t>Presenter Name  |  Rotterdam, The Netherlands</a:t>
+            </a:r>
+          </a:p>
+        </p:txBody>
+      </p:sp>
+    </p:spTree>
+  </p:cSld>
+  <p:clrMapOvr>
+    <a:masterClrMapping/>
+  </p:clrMapOvr>
+</p:sld>
+</file>
+
+<file path=ppt/slides/slide10.xml><?xml version="1.0" encoding="utf-8"?>
+<p:sld xmlns:a="http://schemas.openxmlformats.org/drawingml/2006/main" xmlns:p="http://schemas.openxmlformats.org/presentationml/2006/main" xmlns:r="http://schemas.openxmlformats.org/officeDocument/2006/relationships">
+  <p:cSld>
+    <p:spTree>
+      <p:nvGrpSpPr>
+        <p:cNvPr id="1" name=""/>
+        <p:cNvGrpSpPr/>
+        <p:nvPr/>
+      </p:nvGrpSpPr>
+      <p:grpSpPr/>
+      <p:sp>
+        <p:nvSpPr>
+          <p:cNvPr id="2" name="Rectangle 1"/>
           <p:cNvSpPr/>
           <p:nvPr/>
         </p:nvSpPr>
         <p:spPr>
           <a:xfrm>
-            <a:off x="777240" y="4754880"/>
-            <a:ext cx="36576" cy="1280160"/>
+            <a:off x="0" y="0"/>
+            <a:ext cx="12191695" cy="6858000"/>
+          </a:xfrm>
+          <a:prstGeom prst="rect">
+            <a:avLst/>
+          </a:prstGeom>
+          <a:solidFill>
+            <a:srgbClr val="FFFFFF"/>
+          </a:solidFill>
+          <a:ln>
+            <a:noFill/>
+          </a:ln>
+          <a:effectLst/>
+        </p:spPr>
+        <p:style>
+          <a:lnRef idx="1">
+            <a:schemeClr val="accent1"/>
+          </a:lnRef>
+          <a:fillRef idx="3">
+            <a:schemeClr val="accent1"/>
+          </a:fillRef>
+          <a:effectRef idx="2">
+            <a:schemeClr val="accent1"/>
+          </a:effectRef>
+          <a:fontRef idx="minor">
+            <a:schemeClr val="lt1"/>
+          </a:fontRef>
+        </p:style>
+        <p:txBody>
+          <a:bodyPr rtlCol="0" anchor="ctr"/>
+          <a:lstStyle/>
+          <a:p>
+            <a:pPr algn="ctr"/>
+          </a:p>
+        </p:txBody>
+      </p:sp>
+      <p:sp>
+        <p:nvSpPr>
+          <p:cNvPr id="3" name="Rectangle 2"/>
+          <p:cNvSpPr/>
+          <p:nvPr/>
+        </p:nvSpPr>
+        <p:spPr>
+          <a:xfrm>
+            <a:off x="914400" y="914400"/>
+            <a:ext cx="548640" cy="44450"/>
+          </a:xfrm>
+          <a:prstGeom prst="rect">
+            <a:avLst/>
+          </a:prstGeom>
+          <a:solidFill>
+            <a:srgbClr val="14B8A6"/>
+          </a:solidFill>
+          <a:ln>
+            <a:noFill/>
+          </a:ln>
+        </p:spPr>
+        <p:style>
+          <a:lnRef idx="1">
+            <a:schemeClr val="accent1"/>
+          </a:lnRef>
+          <a:fillRef idx="3">
+            <a:schemeClr val="accent1"/>
+          </a:fillRef>
+          <a:effectRef idx="2">
+            <a:schemeClr val="accent1"/>
+          </a:effectRef>
+          <a:fontRef idx="minor">
+            <a:schemeClr val="lt1"/>
+          </a:fontRef>
+        </p:style>
+        <p:txBody>
+          <a:bodyPr rtlCol="0" anchor="ctr"/>
+          <a:lstStyle/>
+          <a:p>
+            <a:pPr algn="ctr"/>
+          </a:p>
+        </p:txBody>
+      </p:sp>
+      <p:sp>
+        <p:nvSpPr>
+          <p:cNvPr id="4" name="TextBox 3"/>
+          <p:cNvSpPr txBox="1"/>
+          <p:nvPr/>
+        </p:nvSpPr>
+        <p:spPr>
+          <a:xfrm>
+            <a:off x="914400" y="1051560"/>
+            <a:ext cx="10058400" cy="640080"/>
+          </a:xfrm>
+          <a:prstGeom prst="rect">
+            <a:avLst/>
+          </a:prstGeom>
+          <a:noFill/>
+        </p:spPr>
+        <p:txBody>
+          <a:bodyPr wrap="square" tIns="25400" bIns="25400" lIns="25400" rIns="25400" anchor="t">
+            <a:spAutoFit/>
+          </a:bodyPr>
+          <a:lstStyle/>
+          <a:p>
+            <a:pPr algn="l"/>
+            <a:r>
+              <a:rPr sz="3200" b="1" i="0">
+                <a:solidFill>
+                  <a:srgbClr val="0C1A2E"/>
+                </a:solidFill>
+                <a:latin typeface="Space Grotesk"/>
+              </a:rPr>
+              <a:t>Three numbers that frame the case</a:t>
+            </a:r>
+          </a:p>
+        </p:txBody>
+      </p:sp>
+      <p:sp>
+        <p:nvSpPr>
+          <p:cNvPr id="5" name="TextBox 4"/>
+          <p:cNvSpPr txBox="1"/>
+          <p:nvPr/>
+        </p:nvSpPr>
+        <p:spPr>
+          <a:xfrm>
+            <a:off x="914400" y="1737360"/>
+            <a:ext cx="10058400" cy="365760"/>
+          </a:xfrm>
+          <a:prstGeom prst="rect">
+            <a:avLst/>
+          </a:prstGeom>
+          <a:noFill/>
+        </p:spPr>
+        <p:txBody>
+          <a:bodyPr wrap="square" tIns="25400" bIns="25400" lIns="25400" rIns="25400" anchor="t">
+            <a:spAutoFit/>
+          </a:bodyPr>
+          <a:lstStyle/>
+          <a:p>
+            <a:pPr algn="l"/>
+            <a:r>
+              <a:rPr sz="1600" b="0" i="0">
+                <a:solidFill>
+                  <a:srgbClr val="64748B"/>
+                </a:solidFill>
+                <a:latin typeface="Inter"/>
+              </a:rPr>
+              <a:t>Each card is a self-contained passage. Quotable, citable, scannable.</a:t>
+            </a:r>
+          </a:p>
+        </p:txBody>
+      </p:sp>
+      <p:sp>
+        <p:nvSpPr>
+          <p:cNvPr id="6" name="Rounded Rectangle 5"/>
+          <p:cNvSpPr/>
+          <p:nvPr/>
+        </p:nvSpPr>
+        <p:spPr>
+          <a:xfrm>
+            <a:off x="914400" y="2651760"/>
+            <a:ext cx="3383280" cy="3291840"/>
+          </a:xfrm>
+          <a:prstGeom prst="roundRect">
+            <a:avLst>
+              <a:gd name="adj" fmla="val 4000"/>
+            </a:avLst>
+          </a:prstGeom>
+          <a:solidFill>
+            <a:srgbClr val="F0F9FF"/>
+          </a:solidFill>
+          <a:ln>
+            <a:noFill/>
+          </a:ln>
+          <a:effectLst/>
+        </p:spPr>
+        <p:style>
+          <a:lnRef idx="1">
+            <a:schemeClr val="accent1"/>
+          </a:lnRef>
+          <a:fillRef idx="3">
+            <a:schemeClr val="accent1"/>
+          </a:fillRef>
+          <a:effectRef idx="2">
+            <a:schemeClr val="accent1"/>
+          </a:effectRef>
+          <a:fontRef idx="minor">
+            <a:schemeClr val="lt1"/>
+          </a:fontRef>
+        </p:style>
+        <p:txBody>
+          <a:bodyPr rtlCol="0" anchor="ctr"/>
+          <a:lstStyle/>
+          <a:p>
+            <a:pPr algn="ctr"/>
+          </a:p>
+        </p:txBody>
+      </p:sp>
+      <p:sp>
+        <p:nvSpPr>
+          <p:cNvPr id="7" name="Rectangle 6"/>
+          <p:cNvSpPr/>
+          <p:nvPr/>
+        </p:nvSpPr>
+        <p:spPr>
+          <a:xfrm>
+            <a:off x="914400" y="2651760"/>
+            <a:ext cx="3383280" cy="73152"/>
+          </a:xfrm>
+          <a:prstGeom prst="rect">
+            <a:avLst/>
+          </a:prstGeom>
+          <a:solidFill>
+            <a:srgbClr val="0284C7"/>
+          </a:solidFill>
+          <a:ln>
+            <a:noFill/>
+          </a:ln>
+          <a:effectLst/>
+        </p:spPr>
+        <p:style>
+          <a:lnRef idx="1">
+            <a:schemeClr val="accent1"/>
+          </a:lnRef>
+          <a:fillRef idx="3">
+            <a:schemeClr val="accent1"/>
+          </a:fillRef>
+          <a:effectRef idx="2">
+            <a:schemeClr val="accent1"/>
+          </a:effectRef>
+          <a:fontRef idx="minor">
+            <a:schemeClr val="lt1"/>
+          </a:fontRef>
+        </p:style>
+        <p:txBody>
+          <a:bodyPr rtlCol="0" anchor="ctr"/>
+          <a:lstStyle/>
+          <a:p>
+            <a:pPr algn="ctr"/>
+          </a:p>
+        </p:txBody>
+      </p:sp>
+      <p:sp>
+        <p:nvSpPr>
+          <p:cNvPr id="8" name="TextBox 7"/>
+          <p:cNvSpPr txBox="1"/>
+          <p:nvPr/>
+        </p:nvSpPr>
+        <p:spPr>
+          <a:xfrm>
+            <a:off x="1188720" y="3017520"/>
+            <a:ext cx="2926080" cy="1280160"/>
+          </a:xfrm>
+          <a:prstGeom prst="rect">
+            <a:avLst/>
+          </a:prstGeom>
+          <a:noFill/>
+        </p:spPr>
+        <p:txBody>
+          <a:bodyPr wrap="square" tIns="25400" bIns="25400" lIns="25400" rIns="25400" anchor="t">
+            <a:spAutoFit/>
+          </a:bodyPr>
+          <a:lstStyle/>
+          <a:p>
+            <a:pPr algn="l"/>
+            <a:r>
+              <a:rPr sz="5600" b="1" i="0">
+                <a:solidFill>
+                  <a:srgbClr val="0369A1"/>
+                </a:solidFill>
+                <a:latin typeface="Space Grotesk"/>
+              </a:rPr>
+              <a:t>41%</a:t>
+            </a:r>
+          </a:p>
+        </p:txBody>
+      </p:sp>
+      <p:sp>
+        <p:nvSpPr>
+          <p:cNvPr id="9" name="TextBox 8"/>
+          <p:cNvSpPr txBox="1"/>
+          <p:nvPr/>
+        </p:nvSpPr>
+        <p:spPr>
+          <a:xfrm>
+            <a:off x="1188720" y="4389120"/>
+            <a:ext cx="2926080" cy="914400"/>
+          </a:xfrm>
+          <a:prstGeom prst="rect">
+            <a:avLst/>
+          </a:prstGeom>
+          <a:noFill/>
+        </p:spPr>
+        <p:txBody>
+          <a:bodyPr wrap="square" tIns="25400" bIns="25400" lIns="25400" rIns="25400" anchor="t">
+            <a:spAutoFit/>
+          </a:bodyPr>
+          <a:lstStyle/>
+          <a:p>
+            <a:pPr algn="l"/>
+            <a:r>
+              <a:rPr sz="1500" b="1" i="0">
+                <a:solidFill>
+                  <a:srgbClr val="0C1A2E"/>
+                </a:solidFill>
+                <a:latin typeface="Inter"/>
+              </a:rPr>
+              <a:t>AI visibility lift from statistics-addition</a:t>
+            </a:r>
+          </a:p>
+        </p:txBody>
+      </p:sp>
+      <p:sp>
+        <p:nvSpPr>
+          <p:cNvPr id="10" name="TextBox 9"/>
+          <p:cNvSpPr txBox="1"/>
+          <p:nvPr/>
+        </p:nvSpPr>
+        <p:spPr>
+          <a:xfrm>
+            <a:off x="1188720" y="5394960"/>
+            <a:ext cx="2926080" cy="365760"/>
+          </a:xfrm>
+          <a:prstGeom prst="rect">
+            <a:avLst/>
+          </a:prstGeom>
+          <a:noFill/>
+        </p:spPr>
+        <p:txBody>
+          <a:bodyPr wrap="square" tIns="25400" bIns="25400" lIns="25400" rIns="25400" anchor="t">
+            <a:spAutoFit/>
+          </a:bodyPr>
+          <a:lstStyle/>
+          <a:p>
+            <a:pPr algn="l"/>
+            <a:r>
+              <a:rPr sz="1100" b="0" i="0">
+                <a:solidFill>
+                  <a:srgbClr val="64748B"/>
+                </a:solidFill>
+                <a:latin typeface="Inter"/>
+              </a:rPr>
+              <a:t>Princeton GEO study, 10,000 queries</a:t>
+            </a:r>
+          </a:p>
+        </p:txBody>
+      </p:sp>
+      <p:sp>
+        <p:nvSpPr>
+          <p:cNvPr id="11" name="Rounded Rectangle 10"/>
+          <p:cNvSpPr/>
+          <p:nvPr/>
+        </p:nvSpPr>
+        <p:spPr>
+          <a:xfrm>
+            <a:off x="4526280" y="2651760"/>
+            <a:ext cx="3383280" cy="3291840"/>
+          </a:xfrm>
+          <a:prstGeom prst="roundRect">
+            <a:avLst>
+              <a:gd name="adj" fmla="val 4000"/>
+            </a:avLst>
+          </a:prstGeom>
+          <a:solidFill>
+            <a:srgbClr val="F0F9FF"/>
+          </a:solidFill>
+          <a:ln>
+            <a:noFill/>
+          </a:ln>
+          <a:effectLst/>
+        </p:spPr>
+        <p:style>
+          <a:lnRef idx="1">
+            <a:schemeClr val="accent1"/>
+          </a:lnRef>
+          <a:fillRef idx="3">
+            <a:schemeClr val="accent1"/>
+          </a:fillRef>
+          <a:effectRef idx="2">
+            <a:schemeClr val="accent1"/>
+          </a:effectRef>
+          <a:fontRef idx="minor">
+            <a:schemeClr val="lt1"/>
+          </a:fontRef>
+        </p:style>
+        <p:txBody>
+          <a:bodyPr rtlCol="0" anchor="ctr"/>
+          <a:lstStyle/>
+          <a:p>
+            <a:pPr algn="ctr"/>
+          </a:p>
+        </p:txBody>
+      </p:sp>
+      <p:sp>
+        <p:nvSpPr>
+          <p:cNvPr id="12" name="Rectangle 11"/>
+          <p:cNvSpPr/>
+          <p:nvPr/>
+        </p:nvSpPr>
+        <p:spPr>
+          <a:xfrm>
+            <a:off x="4526280" y="2651760"/>
+            <a:ext cx="3383280" cy="73152"/>
+          </a:xfrm>
+          <a:prstGeom prst="rect">
+            <a:avLst/>
+          </a:prstGeom>
+          <a:solidFill>
+            <a:srgbClr val="0284C7"/>
+          </a:solidFill>
+          <a:ln>
+            <a:noFill/>
+          </a:ln>
+          <a:effectLst/>
+        </p:spPr>
+        <p:style>
+          <a:lnRef idx="1">
+            <a:schemeClr val="accent1"/>
+          </a:lnRef>
+          <a:fillRef idx="3">
+            <a:schemeClr val="accent1"/>
+          </a:fillRef>
+          <a:effectRef idx="2">
+            <a:schemeClr val="accent1"/>
+          </a:effectRef>
+          <a:fontRef idx="minor">
+            <a:schemeClr val="lt1"/>
+          </a:fontRef>
+        </p:style>
+        <p:txBody>
+          <a:bodyPr rtlCol="0" anchor="ctr"/>
+          <a:lstStyle/>
+          <a:p>
+            <a:pPr algn="ctr"/>
+          </a:p>
+        </p:txBody>
+      </p:sp>
+      <p:sp>
+        <p:nvSpPr>
+          <p:cNvPr id="13" name="TextBox 12"/>
+          <p:cNvSpPr txBox="1"/>
+          <p:nvPr/>
+        </p:nvSpPr>
+        <p:spPr>
+          <a:xfrm>
+            <a:off x="4800600" y="3017520"/>
+            <a:ext cx="2926080" cy="1280160"/>
+          </a:xfrm>
+          <a:prstGeom prst="rect">
+            <a:avLst/>
+          </a:prstGeom>
+          <a:noFill/>
+        </p:spPr>
+        <p:txBody>
+          <a:bodyPr wrap="square" tIns="25400" bIns="25400" lIns="25400" rIns="25400" anchor="t">
+            <a:spAutoFit/>
+          </a:bodyPr>
+          <a:lstStyle/>
+          <a:p>
+            <a:pPr algn="l"/>
+            <a:r>
+              <a:rPr sz="5600" b="1" i="0">
+                <a:solidFill>
+                  <a:srgbClr val="0369A1"/>
+                </a:solidFill>
+                <a:latin typeface="Space Grotesk"/>
+              </a:rPr>
+              <a:t>44.2%</a:t>
+            </a:r>
+          </a:p>
+        </p:txBody>
+      </p:sp>
+      <p:sp>
+        <p:nvSpPr>
+          <p:cNvPr id="14" name="TextBox 13"/>
+          <p:cNvSpPr txBox="1"/>
+          <p:nvPr/>
+        </p:nvSpPr>
+        <p:spPr>
+          <a:xfrm>
+            <a:off x="4800600" y="4389120"/>
+            <a:ext cx="2926080" cy="914400"/>
+          </a:xfrm>
+          <a:prstGeom prst="rect">
+            <a:avLst/>
+          </a:prstGeom>
+          <a:noFill/>
+        </p:spPr>
+        <p:txBody>
+          <a:bodyPr wrap="square" tIns="25400" bIns="25400" lIns="25400" rIns="25400" anchor="t">
+            <a:spAutoFit/>
+          </a:bodyPr>
+          <a:lstStyle/>
+          <a:p>
+            <a:pPr algn="l"/>
+            <a:r>
+              <a:rPr sz="1500" b="1" i="0">
+                <a:solidFill>
+                  <a:srgbClr val="0C1A2E"/>
+                </a:solidFill>
+                <a:latin typeface="Inter"/>
+              </a:rPr>
+              <a:t>Of AI citations land in the first 30% of body</a:t>
+            </a:r>
+          </a:p>
+        </p:txBody>
+      </p:sp>
+      <p:sp>
+        <p:nvSpPr>
+          <p:cNvPr id="15" name="TextBox 14"/>
+          <p:cNvSpPr txBox="1"/>
+          <p:nvPr/>
+        </p:nvSpPr>
+        <p:spPr>
+          <a:xfrm>
+            <a:off x="4800600" y="5394960"/>
+            <a:ext cx="2926080" cy="365760"/>
+          </a:xfrm>
+          <a:prstGeom prst="rect">
+            <a:avLst/>
+          </a:prstGeom>
+          <a:noFill/>
+        </p:spPr>
+        <p:txBody>
+          <a:bodyPr wrap="square" tIns="25400" bIns="25400" lIns="25400" rIns="25400" anchor="t">
+            <a:spAutoFit/>
+          </a:bodyPr>
+          <a:lstStyle/>
+          <a:p>
+            <a:pPr algn="l"/>
+            <a:r>
+              <a:rPr sz="1100" b="0" i="0">
+                <a:solidFill>
+                  <a:srgbClr val="64748B"/>
+                </a:solidFill>
+                <a:latin typeface="Inter"/>
+              </a:rPr>
+              <a:t>Kevin Indig, 1.2M ChatGPT answers</a:t>
+            </a:r>
+          </a:p>
+        </p:txBody>
+      </p:sp>
+      <p:sp>
+        <p:nvSpPr>
+          <p:cNvPr id="16" name="Rounded Rectangle 15"/>
+          <p:cNvSpPr/>
+          <p:nvPr/>
+        </p:nvSpPr>
+        <p:spPr>
+          <a:xfrm>
+            <a:off x="8138160" y="2651760"/>
+            <a:ext cx="3383280" cy="3291840"/>
+          </a:xfrm>
+          <a:prstGeom prst="roundRect">
+            <a:avLst>
+              <a:gd name="adj" fmla="val 4000"/>
+            </a:avLst>
+          </a:prstGeom>
+          <a:solidFill>
+            <a:srgbClr val="F0F9FF"/>
+          </a:solidFill>
+          <a:ln>
+            <a:noFill/>
+          </a:ln>
+          <a:effectLst/>
+        </p:spPr>
+        <p:style>
+          <a:lnRef idx="1">
+            <a:schemeClr val="accent1"/>
+          </a:lnRef>
+          <a:fillRef idx="3">
+            <a:schemeClr val="accent1"/>
+          </a:fillRef>
+          <a:effectRef idx="2">
+            <a:schemeClr val="accent1"/>
+          </a:effectRef>
+          <a:fontRef idx="minor">
+            <a:schemeClr val="lt1"/>
+          </a:fontRef>
+        </p:style>
+        <p:txBody>
+          <a:bodyPr rtlCol="0" anchor="ctr"/>
+          <a:lstStyle/>
+          <a:p>
+            <a:pPr algn="ctr"/>
+          </a:p>
+        </p:txBody>
+      </p:sp>
+      <p:sp>
+        <p:nvSpPr>
+          <p:cNvPr id="17" name="Rectangle 16"/>
+          <p:cNvSpPr/>
+          <p:nvPr/>
+        </p:nvSpPr>
+        <p:spPr>
+          <a:xfrm>
+            <a:off x="8138160" y="2651760"/>
+            <a:ext cx="3383280" cy="73152"/>
+          </a:xfrm>
+          <a:prstGeom prst="rect">
+            <a:avLst/>
+          </a:prstGeom>
+          <a:solidFill>
+            <a:srgbClr val="0284C7"/>
+          </a:solidFill>
+          <a:ln>
+            <a:noFill/>
+          </a:ln>
+          <a:effectLst/>
+        </p:spPr>
+        <p:style>
+          <a:lnRef idx="1">
+            <a:schemeClr val="accent1"/>
+          </a:lnRef>
+          <a:fillRef idx="3">
+            <a:schemeClr val="accent1"/>
+          </a:fillRef>
+          <a:effectRef idx="2">
+            <a:schemeClr val="accent1"/>
+          </a:effectRef>
+          <a:fontRef idx="minor">
+            <a:schemeClr val="lt1"/>
+          </a:fontRef>
+        </p:style>
+        <p:txBody>
+          <a:bodyPr rtlCol="0" anchor="ctr"/>
+          <a:lstStyle/>
+          <a:p>
+            <a:pPr algn="ctr"/>
+          </a:p>
+        </p:txBody>
+      </p:sp>
+      <p:sp>
+        <p:nvSpPr>
+          <p:cNvPr id="18" name="TextBox 17"/>
+          <p:cNvSpPr txBox="1"/>
+          <p:nvPr/>
+        </p:nvSpPr>
+        <p:spPr>
+          <a:xfrm>
+            <a:off x="8412480" y="3017520"/>
+            <a:ext cx="2926080" cy="1280160"/>
+          </a:xfrm>
+          <a:prstGeom prst="rect">
+            <a:avLst/>
+          </a:prstGeom>
+          <a:noFill/>
+        </p:spPr>
+        <p:txBody>
+          <a:bodyPr wrap="square" tIns="25400" bIns="25400" lIns="25400" rIns="25400" anchor="t">
+            <a:spAutoFit/>
+          </a:bodyPr>
+          <a:lstStyle/>
+          <a:p>
+            <a:pPr algn="l"/>
+            <a:r>
+              <a:rPr sz="5600" b="1" i="0">
+                <a:solidFill>
+                  <a:srgbClr val="0369A1"/>
+                </a:solidFill>
+                <a:latin typeface="Space Grotesk"/>
+              </a:rPr>
+              <a:t>3.49%</a:t>
+            </a:r>
+          </a:p>
+        </p:txBody>
+      </p:sp>
+      <p:sp>
+        <p:nvSpPr>
+          <p:cNvPr id="19" name="TextBox 18"/>
+          <p:cNvSpPr txBox="1"/>
+          <p:nvPr/>
+        </p:nvSpPr>
+        <p:spPr>
+          <a:xfrm>
+            <a:off x="8412480" y="4389120"/>
+            <a:ext cx="2926080" cy="914400"/>
+          </a:xfrm>
+          <a:prstGeom prst="rect">
+            <a:avLst/>
+          </a:prstGeom>
+          <a:noFill/>
+        </p:spPr>
+        <p:txBody>
+          <a:bodyPr wrap="square" tIns="25400" bIns="25400" lIns="25400" rIns="25400" anchor="t">
+            <a:spAutoFit/>
+          </a:bodyPr>
+          <a:lstStyle/>
+          <a:p>
+            <a:pPr algn="l"/>
+            <a:r>
+              <a:rPr sz="1500" b="1" i="0">
+                <a:solidFill>
+                  <a:srgbClr val="0C1A2E"/>
+                </a:solidFill>
+                <a:latin typeface="Inter"/>
+              </a:rPr>
+              <a:t>Conversion rate from AI-search referrals (22% higher than organic)</a:t>
+            </a:r>
+          </a:p>
+        </p:txBody>
+      </p:sp>
+      <p:sp>
+        <p:nvSpPr>
+          <p:cNvPr id="20" name="TextBox 19"/>
+          <p:cNvSpPr txBox="1"/>
+          <p:nvPr/>
+        </p:nvSpPr>
+        <p:spPr>
+          <a:xfrm>
+            <a:off x="8412480" y="5394960"/>
+            <a:ext cx="2926080" cy="365760"/>
+          </a:xfrm>
+          <a:prstGeom prst="rect">
+            <a:avLst/>
+          </a:prstGeom>
+          <a:noFill/>
+        </p:spPr>
+        <p:txBody>
+          <a:bodyPr wrap="square" tIns="25400" bIns="25400" lIns="25400" rIns="25400" anchor="t">
+            <a:spAutoFit/>
+          </a:bodyPr>
+          <a:lstStyle/>
+          <a:p>
+            <a:pPr algn="l"/>
+            <a:r>
+              <a:rPr sz="1100" b="0" i="0">
+                <a:solidFill>
+                  <a:srgbClr val="64748B"/>
+                </a:solidFill>
+                <a:latin typeface="Inter"/>
+              </a:rPr>
+              <a:t>Martal 2026 benchmark</a:t>
+            </a:r>
+          </a:p>
+        </p:txBody>
+      </p:sp>
+      <p:sp>
+        <p:nvSpPr>
+          <p:cNvPr id="21" name="Rectangle 20"/>
+          <p:cNvSpPr/>
+          <p:nvPr/>
+        </p:nvSpPr>
+        <p:spPr>
+          <a:xfrm>
+            <a:off x="0" y="6720840"/>
+            <a:ext cx="12191695" cy="137160"/>
+          </a:xfrm>
+          <a:prstGeom prst="rect">
+            <a:avLst/>
+          </a:prstGeom>
+          <a:solidFill>
+            <a:srgbClr val="E2E8F0"/>
+          </a:solidFill>
+          <a:ln>
+            <a:noFill/>
+          </a:ln>
+          <a:effectLst/>
+        </p:spPr>
+        <p:style>
+          <a:lnRef idx="1">
+            <a:schemeClr val="accent1"/>
+          </a:lnRef>
+          <a:fillRef idx="3">
+            <a:schemeClr val="accent1"/>
+          </a:fillRef>
+          <a:effectRef idx="2">
+            <a:schemeClr val="accent1"/>
+          </a:effectRef>
+          <a:fontRef idx="minor">
+            <a:schemeClr val="lt1"/>
+          </a:fontRef>
+        </p:style>
+        <p:txBody>
+          <a:bodyPr rtlCol="0" anchor="ctr"/>
+          <a:lstStyle/>
+          <a:p>
+            <a:pPr algn="ctr"/>
+          </a:p>
+        </p:txBody>
+      </p:sp>
+      <p:sp>
+        <p:nvSpPr>
+          <p:cNvPr id="22" name="TextBox 21"/>
+          <p:cNvSpPr txBox="1"/>
+          <p:nvPr/>
+        </p:nvSpPr>
+        <p:spPr>
+          <a:xfrm>
+            <a:off x="457200" y="6565392"/>
+            <a:ext cx="3657600" cy="228600"/>
+          </a:xfrm>
+          <a:prstGeom prst="rect">
+            <a:avLst/>
+          </a:prstGeom>
+          <a:noFill/>
+        </p:spPr>
+        <p:txBody>
+          <a:bodyPr wrap="square" tIns="25400" bIns="25400" lIns="25400" rIns="25400" anchor="t">
+            <a:spAutoFit/>
+          </a:bodyPr>
+          <a:lstStyle/>
+          <a:p>
+            <a:pPr algn="l"/>
+            <a:r>
+              <a:rPr sz="900" b="1" i="0">
+                <a:solidFill>
+                  <a:srgbClr val="0284C7"/>
+                </a:solidFill>
+                <a:latin typeface="Space Grotesk"/>
+              </a:rPr>
+              <a:t>Booming Venture</a:t>
+            </a:r>
+          </a:p>
+        </p:txBody>
+      </p:sp>
+      <p:sp>
+        <p:nvSpPr>
+          <p:cNvPr id="23" name="TextBox 22"/>
+          <p:cNvSpPr txBox="1"/>
+          <p:nvPr/>
+        </p:nvSpPr>
+        <p:spPr>
+          <a:xfrm>
+            <a:off x="10058400" y="6565392"/>
+            <a:ext cx="1828800" cy="228600"/>
+          </a:xfrm>
+          <a:prstGeom prst="rect">
+            <a:avLst/>
+          </a:prstGeom>
+          <a:noFill/>
+        </p:spPr>
+        <p:txBody>
+          <a:bodyPr wrap="square" tIns="25400" bIns="25400" lIns="25400" rIns="25400" anchor="t">
+            <a:spAutoFit/>
+          </a:bodyPr>
+          <a:lstStyle/>
+          <a:p>
+            <a:pPr algn="r"/>
+            <a:r>
+              <a:rPr sz="900" b="0" i="0">
+                <a:solidFill>
+                  <a:srgbClr val="64748B"/>
+                </a:solidFill>
+                <a:latin typeface="Inter"/>
+              </a:rPr>
+              <a:t>10 / 12</a:t>
+            </a:r>
+          </a:p>
+        </p:txBody>
+      </p:sp>
+    </p:spTree>
+  </p:cSld>
+  <p:clrMapOvr>
+    <a:masterClrMapping/>
+  </p:clrMapOvr>
+</p:sld>
+</file>
+
+<file path=ppt/slides/slide11.xml><?xml version="1.0" encoding="utf-8"?>
+<p:sld xmlns:a="http://schemas.openxmlformats.org/drawingml/2006/main" xmlns:p="http://schemas.openxmlformats.org/presentationml/2006/main" xmlns:r="http://schemas.openxmlformats.org/officeDocument/2006/relationships">
+  <p:cSld>
+    <p:spTree>
+      <p:nvGrpSpPr>
+        <p:cNvPr id="1" name=""/>
+        <p:cNvGrpSpPr/>
+        <p:nvPr/>
+      </p:nvGrpSpPr>
+      <p:grpSpPr/>
+      <p:sp>
+        <p:nvSpPr>
+          <p:cNvPr id="2" name="Rectangle 1"/>
+          <p:cNvSpPr/>
+          <p:nvPr/>
+        </p:nvSpPr>
+        <p:spPr>
+          <a:xfrm>
+            <a:off x="0" y="0"/>
+            <a:ext cx="12191695" cy="6858000"/>
+          </a:xfrm>
+          <a:prstGeom prst="rect">
+            <a:avLst/>
+          </a:prstGeom>
+          <a:solidFill>
+            <a:srgbClr val="F8FAFC"/>
+          </a:solidFill>
+          <a:ln>
+            <a:noFill/>
+          </a:ln>
+          <a:effectLst/>
+        </p:spPr>
+        <p:style>
+          <a:lnRef idx="1">
+            <a:schemeClr val="accent1"/>
+          </a:lnRef>
+          <a:fillRef idx="3">
+            <a:schemeClr val="accent1"/>
+          </a:fillRef>
+          <a:effectRef idx="2">
+            <a:schemeClr val="accent1"/>
+          </a:effectRef>
+          <a:fontRef idx="minor">
+            <a:schemeClr val="lt1"/>
+          </a:fontRef>
+        </p:style>
+        <p:txBody>
+          <a:bodyPr rtlCol="0" anchor="ctr"/>
+          <a:lstStyle/>
+          <a:p>
+            <a:pPr algn="ctr"/>
+          </a:p>
+        </p:txBody>
+      </p:sp>
+      <p:sp>
+        <p:nvSpPr>
+          <p:cNvPr id="3" name="TextBox 2"/>
+          <p:cNvSpPr txBox="1"/>
+          <p:nvPr/>
+        </p:nvSpPr>
+        <p:spPr>
+          <a:xfrm>
+            <a:off x="914400" y="731520"/>
+            <a:ext cx="10332720" cy="640080"/>
+          </a:xfrm>
+          <a:prstGeom prst="rect">
+            <a:avLst/>
+          </a:prstGeom>
+          <a:noFill/>
+        </p:spPr>
+        <p:txBody>
+          <a:bodyPr wrap="square" tIns="25400" bIns="25400" lIns="25400" rIns="25400" anchor="t">
+            <a:spAutoFit/>
+          </a:bodyPr>
+          <a:lstStyle/>
+          <a:p>
+            <a:pPr algn="ctr"/>
+            <a:r>
+              <a:rPr sz="3200" b="1" i="0">
+                <a:solidFill>
+                  <a:srgbClr val="0C1A2E"/>
+                </a:solidFill>
+                <a:latin typeface="Space Grotesk"/>
+              </a:rPr>
+              <a:t>Get In Touch</a:t>
+            </a:r>
+          </a:p>
+        </p:txBody>
+      </p:sp>
+      <p:sp>
+        <p:nvSpPr>
+          <p:cNvPr id="4" name="TextBox 3"/>
+          <p:cNvSpPr txBox="1"/>
+          <p:nvPr/>
+        </p:nvSpPr>
+        <p:spPr>
+          <a:xfrm>
+            <a:off x="914400" y="1371600"/>
+            <a:ext cx="10332720" cy="457200"/>
+          </a:xfrm>
+          <a:prstGeom prst="rect">
+            <a:avLst/>
+          </a:prstGeom>
+          <a:noFill/>
+        </p:spPr>
+        <p:txBody>
+          <a:bodyPr wrap="square" tIns="25400" bIns="25400" lIns="25400" rIns="25400" anchor="t">
+            <a:spAutoFit/>
+          </a:bodyPr>
+          <a:lstStyle/>
+          <a:p>
+            <a:pPr algn="ctr"/>
+            <a:r>
+              <a:rPr sz="1500" b="0" i="0">
+                <a:solidFill>
+                  <a:srgbClr val="64748B"/>
+                </a:solidFill>
+                <a:latin typeface="Inter"/>
+              </a:rPr>
+              <a:t>Ready to accelerate your business growth? Contact us today for a free consultation.</a:t>
+            </a:r>
+          </a:p>
+        </p:txBody>
+      </p:sp>
+      <p:sp>
+        <p:nvSpPr>
+          <p:cNvPr id="5" name="Rounded Rectangle 4"/>
+          <p:cNvSpPr/>
+          <p:nvPr/>
+        </p:nvSpPr>
+        <p:spPr>
+          <a:xfrm>
+            <a:off x="914400" y="2286000"/>
+            <a:ext cx="5029200" cy="3657600"/>
+          </a:xfrm>
+          <a:prstGeom prst="roundRect">
+            <a:avLst>
+              <a:gd name="adj" fmla="val 3000"/>
+            </a:avLst>
+          </a:prstGeom>
+          <a:solidFill>
+            <a:srgbClr val="FFFFFF"/>
+          </a:solidFill>
+          <a:ln w="9525">
+            <a:solidFill>
+              <a:srgbClr val="E2E8F0"/>
+            </a:solidFill>
+          </a:ln>
+          <a:effectLst/>
+        </p:spPr>
+        <p:style>
+          <a:lnRef idx="1">
+            <a:schemeClr val="accent1"/>
+          </a:lnRef>
+          <a:fillRef idx="3">
+            <a:schemeClr val="accent1"/>
+          </a:fillRef>
+          <a:effectRef idx="2">
+            <a:schemeClr val="accent1"/>
+          </a:effectRef>
+          <a:fontRef idx="minor">
+            <a:schemeClr val="lt1"/>
+          </a:fontRef>
+        </p:style>
+        <p:txBody>
+          <a:bodyPr rtlCol="0" anchor="ctr"/>
+          <a:lstStyle/>
+          <a:p>
+            <a:pPr algn="ctr"/>
+          </a:p>
+        </p:txBody>
+      </p:sp>
+      <p:sp>
+        <p:nvSpPr>
+          <p:cNvPr id="6" name="TextBox 5"/>
+          <p:cNvSpPr txBox="1"/>
+          <p:nvPr/>
+        </p:nvSpPr>
+        <p:spPr>
+          <a:xfrm>
+            <a:off x="1188720" y="2468880"/>
+            <a:ext cx="4572000" cy="457200"/>
+          </a:xfrm>
+          <a:prstGeom prst="rect">
+            <a:avLst/>
+          </a:prstGeom>
+          <a:noFill/>
+        </p:spPr>
+        <p:txBody>
+          <a:bodyPr wrap="square" tIns="25400" bIns="25400" lIns="25400" rIns="25400" anchor="t">
+            <a:spAutoFit/>
+          </a:bodyPr>
+          <a:lstStyle/>
+          <a:p>
+            <a:pPr algn="l"/>
+            <a:r>
+              <a:rPr sz="1800" b="1" i="0">
+                <a:solidFill>
+                  <a:srgbClr val="0C1A2E"/>
+                </a:solidFill>
+                <a:latin typeface="Space Grotesk"/>
+              </a:rPr>
+              <a:t>Contact Information</a:t>
+            </a:r>
+          </a:p>
+        </p:txBody>
+      </p:sp>
+      <p:sp>
+        <p:nvSpPr>
+          <p:cNvPr id="7" name="TextBox 6"/>
+          <p:cNvSpPr txBox="1"/>
+          <p:nvPr/>
+        </p:nvSpPr>
+        <p:spPr>
+          <a:xfrm>
+            <a:off x="1188720" y="3017520"/>
+            <a:ext cx="4572000" cy="365760"/>
+          </a:xfrm>
+          <a:prstGeom prst="rect">
+            <a:avLst/>
+          </a:prstGeom>
+          <a:noFill/>
+        </p:spPr>
+        <p:txBody>
+          <a:bodyPr wrap="square" tIns="25400" bIns="25400" lIns="25400" rIns="25400" anchor="t">
+            <a:spAutoFit/>
+          </a:bodyPr>
+          <a:lstStyle/>
+          <a:p>
+            <a:pPr algn="l"/>
+            <a:r>
+              <a:rPr sz="1200" b="1" i="0">
+                <a:solidFill>
+                  <a:srgbClr val="0284C7"/>
+                </a:solidFill>
+                <a:latin typeface="Space Grotesk"/>
+              </a:rPr>
+              <a:t>Email Us</a:t>
+            </a:r>
+          </a:p>
+        </p:txBody>
+      </p:sp>
+      <p:sp>
+        <p:nvSpPr>
+          <p:cNvPr id="8" name="TextBox 7"/>
+          <p:cNvSpPr txBox="1"/>
+          <p:nvPr/>
+        </p:nvSpPr>
+        <p:spPr>
+          <a:xfrm>
+            <a:off x="1188720" y="3337560"/>
+            <a:ext cx="4572000" cy="365760"/>
+          </a:xfrm>
+          <a:prstGeom prst="rect">
+            <a:avLst/>
+          </a:prstGeom>
+          <a:noFill/>
+        </p:spPr>
+        <p:txBody>
+          <a:bodyPr wrap="square" tIns="25400" bIns="25400" lIns="25400" rIns="25400" anchor="t">
+            <a:spAutoFit/>
+          </a:bodyPr>
+          <a:lstStyle/>
+          <a:p>
+            <a:pPr algn="l"/>
+            <a:r>
+              <a:rPr sz="1300" b="0" i="0">
+                <a:solidFill>
+                  <a:srgbClr val="1F2937"/>
+                </a:solidFill>
+                <a:latin typeface="Inter"/>
+              </a:rPr>
+              <a:t>info@boomingventure.com</a:t>
+            </a:r>
+          </a:p>
+        </p:txBody>
+      </p:sp>
+      <p:sp>
+        <p:nvSpPr>
+          <p:cNvPr id="9" name="TextBox 8"/>
+          <p:cNvSpPr txBox="1"/>
+          <p:nvPr/>
+        </p:nvSpPr>
+        <p:spPr>
+          <a:xfrm>
+            <a:off x="1188720" y="3840480"/>
+            <a:ext cx="4572000" cy="365760"/>
+          </a:xfrm>
+          <a:prstGeom prst="rect">
+            <a:avLst/>
+          </a:prstGeom>
+          <a:noFill/>
+        </p:spPr>
+        <p:txBody>
+          <a:bodyPr wrap="square" tIns="25400" bIns="25400" lIns="25400" rIns="25400" anchor="t">
+            <a:spAutoFit/>
+          </a:bodyPr>
+          <a:lstStyle/>
+          <a:p>
+            <a:pPr algn="l"/>
+            <a:r>
+              <a:rPr sz="1200" b="1" i="0">
+                <a:solidFill>
+                  <a:srgbClr val="0284C7"/>
+                </a:solidFill>
+                <a:latin typeface="Space Grotesk"/>
+              </a:rPr>
+              <a:t>Visit Us</a:t>
+            </a:r>
+          </a:p>
+        </p:txBody>
+      </p:sp>
+      <p:sp>
+        <p:nvSpPr>
+          <p:cNvPr id="10" name="TextBox 9"/>
+          <p:cNvSpPr txBox="1"/>
+          <p:nvPr/>
+        </p:nvSpPr>
+        <p:spPr>
+          <a:xfrm>
+            <a:off x="1188720" y="4160520"/>
+            <a:ext cx="4572000" cy="548640"/>
+          </a:xfrm>
+          <a:prstGeom prst="rect">
+            <a:avLst/>
+          </a:prstGeom>
+          <a:noFill/>
+        </p:spPr>
+        <p:txBody>
+          <a:bodyPr wrap="square" tIns="25400" bIns="25400" lIns="25400" rIns="25400" anchor="t">
+            <a:spAutoFit/>
+          </a:bodyPr>
+          <a:lstStyle/>
+          <a:p>
+            <a:pPr algn="l"/>
+            <a:r>
+              <a:rPr sz="1300" b="0" i="0">
+                <a:solidFill>
+                  <a:srgbClr val="1F2937"/>
+                </a:solidFill>
+                <a:latin typeface="Inter"/>
+              </a:rPr>
+              <a:t>Westvlietweg 1
+3055 PG Rotterdam, The Netherlands</a:t>
+            </a:r>
+          </a:p>
+        </p:txBody>
+      </p:sp>
+      <p:sp>
+        <p:nvSpPr>
+          <p:cNvPr id="11" name="Rounded Rectangle 10"/>
+          <p:cNvSpPr/>
+          <p:nvPr/>
+        </p:nvSpPr>
+        <p:spPr>
+          <a:xfrm>
+            <a:off x="1188720" y="5212080"/>
+            <a:ext cx="1828800" cy="502920"/>
+          </a:xfrm>
+          <a:prstGeom prst="roundRect">
+            <a:avLst>
+              <a:gd name="adj" fmla="val 50000"/>
+            </a:avLst>
+          </a:prstGeom>
+          <a:solidFill>
+            <a:srgbClr val="0284C7"/>
+          </a:solidFill>
+          <a:ln>
+            <a:noFill/>
+          </a:ln>
+          <a:effectLst/>
+        </p:spPr>
+        <p:style>
+          <a:lnRef idx="1">
+            <a:schemeClr val="accent1"/>
+          </a:lnRef>
+          <a:fillRef idx="3">
+            <a:schemeClr val="accent1"/>
+          </a:fillRef>
+          <a:effectRef idx="2">
+            <a:schemeClr val="accent1"/>
+          </a:effectRef>
+          <a:fontRef idx="minor">
+            <a:schemeClr val="lt1"/>
+          </a:fontRef>
+        </p:style>
+        <p:txBody>
+          <a:bodyPr rtlCol="0" anchor="ctr"/>
+          <a:lstStyle/>
+          <a:p>
+            <a:pPr algn="ctr"/>
+          </a:p>
+        </p:txBody>
+      </p:sp>
+      <p:sp>
+        <p:nvSpPr>
+          <p:cNvPr id="12" name="TextBox 11"/>
+          <p:cNvSpPr txBox="1"/>
+          <p:nvPr/>
+        </p:nvSpPr>
+        <p:spPr>
+          <a:xfrm>
+            <a:off x="1188720" y="5212080"/>
+            <a:ext cx="1828800" cy="502920"/>
+          </a:xfrm>
+          <a:prstGeom prst="rect">
+            <a:avLst/>
+          </a:prstGeom>
+          <a:noFill/>
+        </p:spPr>
+        <p:txBody>
+          <a:bodyPr wrap="square" tIns="25400" bIns="25400" lIns="25400" rIns="25400" anchor="ctr">
+            <a:spAutoFit/>
+          </a:bodyPr>
+          <a:lstStyle/>
+          <a:p>
+            <a:pPr algn="ctr"/>
+            <a:r>
+              <a:rPr sz="1200" b="1" i="0">
+                <a:solidFill>
+                  <a:srgbClr val="FFFFFF"/>
+                </a:solidFill>
+                <a:latin typeface="Space Grotesk"/>
+              </a:rPr>
+              <a:t>Email Us Directly</a:t>
+            </a:r>
+          </a:p>
+        </p:txBody>
+      </p:sp>
+      <p:sp>
+        <p:nvSpPr>
+          <p:cNvPr id="13" name="Rounded Rectangle 12"/>
+          <p:cNvSpPr/>
+          <p:nvPr/>
+        </p:nvSpPr>
+        <p:spPr>
+          <a:xfrm>
+            <a:off x="6263640" y="2286000"/>
+            <a:ext cx="5029200" cy="3657600"/>
+          </a:xfrm>
+          <a:prstGeom prst="roundRect">
+            <a:avLst>
+              <a:gd name="adj" fmla="val 3000"/>
+            </a:avLst>
+          </a:prstGeom>
+          <a:solidFill>
+            <a:srgbClr val="FFFFFF"/>
+          </a:solidFill>
+          <a:ln w="9525">
+            <a:solidFill>
+              <a:srgbClr val="E2E8F0"/>
+            </a:solidFill>
+          </a:ln>
+          <a:effectLst/>
+        </p:spPr>
+        <p:style>
+          <a:lnRef idx="1">
+            <a:schemeClr val="accent1"/>
+          </a:lnRef>
+          <a:fillRef idx="3">
+            <a:schemeClr val="accent1"/>
+          </a:fillRef>
+          <a:effectRef idx="2">
+            <a:schemeClr val="accent1"/>
+          </a:effectRef>
+          <a:fontRef idx="minor">
+            <a:schemeClr val="lt1"/>
+          </a:fontRef>
+        </p:style>
+        <p:txBody>
+          <a:bodyPr rtlCol="0" anchor="ctr"/>
+          <a:lstStyle/>
+          <a:p>
+            <a:pPr algn="ctr"/>
+          </a:p>
+        </p:txBody>
+      </p:sp>
+      <p:sp>
+        <p:nvSpPr>
+          <p:cNvPr id="14" name="TextBox 13"/>
+          <p:cNvSpPr txBox="1"/>
+          <p:nvPr/>
+        </p:nvSpPr>
+        <p:spPr>
+          <a:xfrm>
+            <a:off x="6492240" y="2468880"/>
+            <a:ext cx="4572000" cy="457200"/>
+          </a:xfrm>
+          <a:prstGeom prst="rect">
+            <a:avLst/>
+          </a:prstGeom>
+          <a:noFill/>
+        </p:spPr>
+        <p:txBody>
+          <a:bodyPr wrap="square" tIns="25400" bIns="25400" lIns="25400" rIns="25400" anchor="t">
+            <a:spAutoFit/>
+          </a:bodyPr>
+          <a:lstStyle/>
+          <a:p>
+            <a:pPr algn="l"/>
+            <a:r>
+              <a:rPr sz="1800" b="1" i="0">
+                <a:solidFill>
+                  <a:srgbClr val="0C1A2E"/>
+                </a:solidFill>
+                <a:latin typeface="Space Grotesk"/>
+              </a:rPr>
+              <a:t>Send Us a Message</a:t>
+            </a:r>
+          </a:p>
+        </p:txBody>
+      </p:sp>
+      <p:sp>
+        <p:nvSpPr>
+          <p:cNvPr id="15" name="TextBox 14"/>
+          <p:cNvSpPr txBox="1"/>
+          <p:nvPr/>
+        </p:nvSpPr>
+        <p:spPr>
+          <a:xfrm>
+            <a:off x="6492240" y="3017520"/>
+            <a:ext cx="2286000" cy="274320"/>
+          </a:xfrm>
+          <a:prstGeom prst="rect">
+            <a:avLst/>
+          </a:prstGeom>
+          <a:noFill/>
+        </p:spPr>
+        <p:txBody>
+          <a:bodyPr wrap="square" tIns="25400" bIns="25400" lIns="25400" rIns="25400" anchor="t">
+            <a:spAutoFit/>
+          </a:bodyPr>
+          <a:lstStyle/>
+          <a:p>
+            <a:pPr algn="l"/>
+            <a:r>
+              <a:rPr sz="1000" b="1" i="0">
+                <a:solidFill>
+                  <a:srgbClr val="64748B"/>
+                </a:solidFill>
+                <a:latin typeface="Inter"/>
+              </a:rPr>
+              <a:t>Your Name *</a:t>
+            </a:r>
+          </a:p>
+        </p:txBody>
+      </p:sp>
+      <p:sp>
+        <p:nvSpPr>
+          <p:cNvPr id="16" name="Rounded Rectangle 15"/>
+          <p:cNvSpPr/>
+          <p:nvPr/>
+        </p:nvSpPr>
+        <p:spPr>
+          <a:xfrm>
+            <a:off x="6492240" y="3291840"/>
+            <a:ext cx="2286000" cy="365760"/>
+          </a:xfrm>
+          <a:prstGeom prst="roundRect">
+            <a:avLst>
+              <a:gd name="adj" fmla="val 20000"/>
+            </a:avLst>
+          </a:prstGeom>
+          <a:solidFill>
+            <a:srgbClr val="F0F9FF"/>
+          </a:solidFill>
+          <a:ln w="9525">
+            <a:solidFill>
+              <a:srgbClr val="E2E8F0"/>
+            </a:solidFill>
+          </a:ln>
+          <a:effectLst/>
+        </p:spPr>
+        <p:style>
+          <a:lnRef idx="1">
+            <a:schemeClr val="accent1"/>
+          </a:lnRef>
+          <a:fillRef idx="3">
+            <a:schemeClr val="accent1"/>
+          </a:fillRef>
+          <a:effectRef idx="2">
+            <a:schemeClr val="accent1"/>
+          </a:effectRef>
+          <a:fontRef idx="minor">
+            <a:schemeClr val="lt1"/>
+          </a:fontRef>
+        </p:style>
+        <p:txBody>
+          <a:bodyPr rtlCol="0" anchor="ctr"/>
+          <a:lstStyle/>
+          <a:p>
+            <a:pPr algn="ctr"/>
+          </a:p>
+        </p:txBody>
+      </p:sp>
+      <p:sp>
+        <p:nvSpPr>
+          <p:cNvPr id="17" name="TextBox 16"/>
+          <p:cNvSpPr txBox="1"/>
+          <p:nvPr/>
+        </p:nvSpPr>
+        <p:spPr>
+          <a:xfrm>
+            <a:off x="6629400" y="3291840"/>
+            <a:ext cx="2286000" cy="365760"/>
+          </a:xfrm>
+          <a:prstGeom prst="rect">
+            <a:avLst/>
+          </a:prstGeom>
+          <a:noFill/>
+        </p:spPr>
+        <p:txBody>
+          <a:bodyPr wrap="square" tIns="25400" bIns="25400" lIns="25400" rIns="25400" anchor="ctr">
+            <a:spAutoFit/>
+          </a:bodyPr>
+          <a:lstStyle/>
+          <a:p>
+            <a:pPr algn="l"/>
+            <a:r>
+              <a:rPr sz="1100" b="0" i="0">
+                <a:solidFill>
+                  <a:srgbClr val="64748B"/>
+                </a:solidFill>
+                <a:latin typeface="Inter"/>
+              </a:rPr>
+              <a:t>John Doe</a:t>
+            </a:r>
+          </a:p>
+        </p:txBody>
+      </p:sp>
+      <p:sp>
+        <p:nvSpPr>
+          <p:cNvPr id="18" name="TextBox 17"/>
+          <p:cNvSpPr txBox="1"/>
+          <p:nvPr/>
+        </p:nvSpPr>
+        <p:spPr>
+          <a:xfrm>
+            <a:off x="8915400" y="3017520"/>
+            <a:ext cx="2286000" cy="274320"/>
+          </a:xfrm>
+          <a:prstGeom prst="rect">
+            <a:avLst/>
+          </a:prstGeom>
+          <a:noFill/>
+        </p:spPr>
+        <p:txBody>
+          <a:bodyPr wrap="square" tIns="25400" bIns="25400" lIns="25400" rIns="25400" anchor="t">
+            <a:spAutoFit/>
+          </a:bodyPr>
+          <a:lstStyle/>
+          <a:p>
+            <a:pPr algn="l"/>
+            <a:r>
+              <a:rPr sz="1000" b="1" i="0">
+                <a:solidFill>
+                  <a:srgbClr val="64748B"/>
+                </a:solidFill>
+                <a:latin typeface="Inter"/>
+              </a:rPr>
+              <a:t>Email Address *</a:t>
+            </a:r>
+          </a:p>
+        </p:txBody>
+      </p:sp>
+      <p:sp>
+        <p:nvSpPr>
+          <p:cNvPr id="19" name="Rounded Rectangle 18"/>
+          <p:cNvSpPr/>
+          <p:nvPr/>
+        </p:nvSpPr>
+        <p:spPr>
+          <a:xfrm>
+            <a:off x="8915400" y="3291840"/>
+            <a:ext cx="2286000" cy="365760"/>
+          </a:xfrm>
+          <a:prstGeom prst="roundRect">
+            <a:avLst>
+              <a:gd name="adj" fmla="val 20000"/>
+            </a:avLst>
+          </a:prstGeom>
+          <a:solidFill>
+            <a:srgbClr val="F0F9FF"/>
+          </a:solidFill>
+          <a:ln w="9525">
+            <a:solidFill>
+              <a:srgbClr val="E2E8F0"/>
+            </a:solidFill>
+          </a:ln>
+          <a:effectLst/>
+        </p:spPr>
+        <p:style>
+          <a:lnRef idx="1">
+            <a:schemeClr val="accent1"/>
+          </a:lnRef>
+          <a:fillRef idx="3">
+            <a:schemeClr val="accent1"/>
+          </a:fillRef>
+          <a:effectRef idx="2">
+            <a:schemeClr val="accent1"/>
+          </a:effectRef>
+          <a:fontRef idx="minor">
+            <a:schemeClr val="lt1"/>
+          </a:fontRef>
+        </p:style>
+        <p:txBody>
+          <a:bodyPr rtlCol="0" anchor="ctr"/>
+          <a:lstStyle/>
+          <a:p>
+            <a:pPr algn="ctr"/>
+          </a:p>
+        </p:txBody>
+      </p:sp>
+      <p:sp>
+        <p:nvSpPr>
+          <p:cNvPr id="20" name="TextBox 19"/>
+          <p:cNvSpPr txBox="1"/>
+          <p:nvPr/>
+        </p:nvSpPr>
+        <p:spPr>
+          <a:xfrm>
+            <a:off x="9052560" y="3291840"/>
+            <a:ext cx="2286000" cy="365760"/>
+          </a:xfrm>
+          <a:prstGeom prst="rect">
+            <a:avLst/>
+          </a:prstGeom>
+          <a:noFill/>
+        </p:spPr>
+        <p:txBody>
+          <a:bodyPr wrap="square" tIns="25400" bIns="25400" lIns="25400" rIns="25400" anchor="ctr">
+            <a:spAutoFit/>
+          </a:bodyPr>
+          <a:lstStyle/>
+          <a:p>
+            <a:pPr algn="l"/>
+            <a:r>
+              <a:rPr sz="1100" b="0" i="0">
+                <a:solidFill>
+                  <a:srgbClr val="64748B"/>
+                </a:solidFill>
+                <a:latin typeface="Inter"/>
+              </a:rPr>
+              <a:t>john@example.com</a:t>
+            </a:r>
+          </a:p>
+        </p:txBody>
+      </p:sp>
+      <p:sp>
+        <p:nvSpPr>
+          <p:cNvPr id="21" name="TextBox 20"/>
+          <p:cNvSpPr txBox="1"/>
+          <p:nvPr/>
+        </p:nvSpPr>
+        <p:spPr>
+          <a:xfrm>
+            <a:off x="6492240" y="3840480"/>
+            <a:ext cx="4572000" cy="274320"/>
+          </a:xfrm>
+          <a:prstGeom prst="rect">
+            <a:avLst/>
+          </a:prstGeom>
+          <a:noFill/>
+        </p:spPr>
+        <p:txBody>
+          <a:bodyPr wrap="square" tIns="25400" bIns="25400" lIns="25400" rIns="25400" anchor="t">
+            <a:spAutoFit/>
+          </a:bodyPr>
+          <a:lstStyle/>
+          <a:p>
+            <a:pPr algn="l"/>
+            <a:r>
+              <a:rPr sz="1000" b="1" i="0">
+                <a:solidFill>
+                  <a:srgbClr val="64748B"/>
+                </a:solidFill>
+                <a:latin typeface="Inter"/>
+              </a:rPr>
+              <a:t>Your Message *</a:t>
+            </a:r>
+          </a:p>
+        </p:txBody>
+      </p:sp>
+      <p:sp>
+        <p:nvSpPr>
+          <p:cNvPr id="22" name="Rounded Rectangle 21"/>
+          <p:cNvSpPr/>
+          <p:nvPr/>
+        </p:nvSpPr>
+        <p:spPr>
+          <a:xfrm>
+            <a:off x="6492240" y="4114800"/>
+            <a:ext cx="4709160" cy="1097280"/>
+          </a:xfrm>
+          <a:prstGeom prst="roundRect">
+            <a:avLst>
+              <a:gd name="adj" fmla="val 5000"/>
+            </a:avLst>
+          </a:prstGeom>
+          <a:solidFill>
+            <a:srgbClr val="F0F9FF"/>
+          </a:solidFill>
+          <a:ln w="9525">
+            <a:solidFill>
+              <a:srgbClr val="E2E8F0"/>
+            </a:solidFill>
+          </a:ln>
+          <a:effectLst/>
+        </p:spPr>
+        <p:style>
+          <a:lnRef idx="1">
+            <a:schemeClr val="accent1"/>
+          </a:lnRef>
+          <a:fillRef idx="3">
+            <a:schemeClr val="accent1"/>
+          </a:fillRef>
+          <a:effectRef idx="2">
+            <a:schemeClr val="accent1"/>
+          </a:effectRef>
+          <a:fontRef idx="minor">
+            <a:schemeClr val="lt1"/>
+          </a:fontRef>
+        </p:style>
+        <p:txBody>
+          <a:bodyPr rtlCol="0" anchor="ctr"/>
+          <a:lstStyle/>
+          <a:p>
+            <a:pPr algn="ctr"/>
+          </a:p>
+        </p:txBody>
+      </p:sp>
+      <p:sp>
+        <p:nvSpPr>
+          <p:cNvPr id="23" name="TextBox 22"/>
+          <p:cNvSpPr txBox="1"/>
+          <p:nvPr/>
+        </p:nvSpPr>
+        <p:spPr>
+          <a:xfrm>
+            <a:off x="6629400" y="4160520"/>
+            <a:ext cx="4572000" cy="365760"/>
+          </a:xfrm>
+          <a:prstGeom prst="rect">
+            <a:avLst/>
+          </a:prstGeom>
+          <a:noFill/>
+        </p:spPr>
+        <p:txBody>
+          <a:bodyPr wrap="square" tIns="25400" bIns="25400" lIns="25400" rIns="25400" anchor="t">
+            <a:spAutoFit/>
+          </a:bodyPr>
+          <a:lstStyle/>
+          <a:p>
+            <a:pPr algn="l"/>
+            <a:r>
+              <a:rPr sz="1100" b="0" i="0">
+                <a:solidFill>
+                  <a:srgbClr val="64748B"/>
+                </a:solidFill>
+                <a:latin typeface="Inter"/>
+              </a:rPr>
+              <a:t>How can we help you?</a:t>
+            </a:r>
+          </a:p>
+        </p:txBody>
+      </p:sp>
+      <p:sp>
+        <p:nvSpPr>
+          <p:cNvPr id="24" name="Rounded Rectangle 23"/>
+          <p:cNvSpPr/>
+          <p:nvPr/>
+        </p:nvSpPr>
+        <p:spPr>
+          <a:xfrm>
+            <a:off x="6492240" y="5349240"/>
+            <a:ext cx="4709160" cy="502920"/>
+          </a:xfrm>
+          <a:prstGeom prst="roundRect">
+            <a:avLst>
+              <a:gd name="adj" fmla="val 50000"/>
+            </a:avLst>
+          </a:prstGeom>
+          <a:solidFill>
+            <a:srgbClr val="0284C7"/>
+          </a:solidFill>
+          <a:ln>
+            <a:noFill/>
+          </a:ln>
+          <a:effectLst/>
+        </p:spPr>
+        <p:style>
+          <a:lnRef idx="1">
+            <a:schemeClr val="accent1"/>
+          </a:lnRef>
+          <a:fillRef idx="3">
+            <a:schemeClr val="accent1"/>
+          </a:fillRef>
+          <a:effectRef idx="2">
+            <a:schemeClr val="accent1"/>
+          </a:effectRef>
+          <a:fontRef idx="minor">
+            <a:schemeClr val="lt1"/>
+          </a:fontRef>
+        </p:style>
+        <p:txBody>
+          <a:bodyPr rtlCol="0" anchor="ctr"/>
+          <a:lstStyle/>
+          <a:p>
+            <a:pPr algn="ctr"/>
+          </a:p>
+        </p:txBody>
+      </p:sp>
+      <p:sp>
+        <p:nvSpPr>
+          <p:cNvPr id="25" name="TextBox 24"/>
+          <p:cNvSpPr txBox="1"/>
+          <p:nvPr/>
+        </p:nvSpPr>
+        <p:spPr>
+          <a:xfrm>
+            <a:off x="6492240" y="5349240"/>
+            <a:ext cx="4709160" cy="502920"/>
+          </a:xfrm>
+          <a:prstGeom prst="rect">
+            <a:avLst/>
+          </a:prstGeom>
+          <a:noFill/>
+        </p:spPr>
+        <p:txBody>
+          <a:bodyPr wrap="square" tIns="25400" bIns="25400" lIns="25400" rIns="25400" anchor="ctr">
+            <a:spAutoFit/>
+          </a:bodyPr>
+          <a:lstStyle/>
+          <a:p>
+            <a:pPr algn="ctr"/>
+            <a:r>
+              <a:rPr sz="1300" b="1" i="0">
+                <a:solidFill>
+                  <a:srgbClr val="FFFFFF"/>
+                </a:solidFill>
+                <a:latin typeface="Space Grotesk"/>
+              </a:rPr>
+              <a:t>Send Message ▶</a:t>
+            </a:r>
+          </a:p>
+        </p:txBody>
+      </p:sp>
+      <p:sp>
+        <p:nvSpPr>
+          <p:cNvPr id="26" name="Rectangle 25"/>
+          <p:cNvSpPr/>
+          <p:nvPr/>
+        </p:nvSpPr>
+        <p:spPr>
+          <a:xfrm>
+            <a:off x="0" y="6720840"/>
+            <a:ext cx="12191695" cy="137160"/>
+          </a:xfrm>
+          <a:prstGeom prst="rect">
+            <a:avLst/>
+          </a:prstGeom>
+          <a:solidFill>
+            <a:srgbClr val="E2E8F0"/>
+          </a:solidFill>
+          <a:ln>
+            <a:noFill/>
+          </a:ln>
+          <a:effectLst/>
+        </p:spPr>
+        <p:style>
+          <a:lnRef idx="1">
+            <a:schemeClr val="accent1"/>
+          </a:lnRef>
+          <a:fillRef idx="3">
+            <a:schemeClr val="accent1"/>
+          </a:fillRef>
+          <a:effectRef idx="2">
+            <a:schemeClr val="accent1"/>
+          </a:effectRef>
+          <a:fontRef idx="minor">
+            <a:schemeClr val="lt1"/>
+          </a:fontRef>
+        </p:style>
+        <p:txBody>
+          <a:bodyPr rtlCol="0" anchor="ctr"/>
+          <a:lstStyle/>
+          <a:p>
+            <a:pPr algn="ctr"/>
+          </a:p>
+        </p:txBody>
+      </p:sp>
+      <p:sp>
+        <p:nvSpPr>
+          <p:cNvPr id="27" name="TextBox 26"/>
+          <p:cNvSpPr txBox="1"/>
+          <p:nvPr/>
+        </p:nvSpPr>
+        <p:spPr>
+          <a:xfrm>
+            <a:off x="457200" y="6565392"/>
+            <a:ext cx="3657600" cy="228600"/>
+          </a:xfrm>
+          <a:prstGeom prst="rect">
+            <a:avLst/>
+          </a:prstGeom>
+          <a:noFill/>
+        </p:spPr>
+        <p:txBody>
+          <a:bodyPr wrap="square" tIns="25400" bIns="25400" lIns="25400" rIns="25400" anchor="t">
+            <a:spAutoFit/>
+          </a:bodyPr>
+          <a:lstStyle/>
+          <a:p>
+            <a:pPr algn="l"/>
+            <a:r>
+              <a:rPr sz="900" b="1" i="0">
+                <a:solidFill>
+                  <a:srgbClr val="0284C7"/>
+                </a:solidFill>
+                <a:latin typeface="Space Grotesk"/>
+              </a:rPr>
+              <a:t>Booming Venture</a:t>
+            </a:r>
+          </a:p>
+        </p:txBody>
+      </p:sp>
+      <p:sp>
+        <p:nvSpPr>
+          <p:cNvPr id="28" name="TextBox 27"/>
+          <p:cNvSpPr txBox="1"/>
+          <p:nvPr/>
+        </p:nvSpPr>
+        <p:spPr>
+          <a:xfrm>
+            <a:off x="10058400" y="6565392"/>
+            <a:ext cx="1828800" cy="228600"/>
+          </a:xfrm>
+          <a:prstGeom prst="rect">
+            <a:avLst/>
+          </a:prstGeom>
+          <a:noFill/>
+        </p:spPr>
+        <p:txBody>
+          <a:bodyPr wrap="square" tIns="25400" bIns="25400" lIns="25400" rIns="25400" anchor="t">
+            <a:spAutoFit/>
+          </a:bodyPr>
+          <a:lstStyle/>
+          <a:p>
+            <a:pPr algn="r"/>
+            <a:r>
+              <a:rPr sz="900" b="0" i="0">
+                <a:solidFill>
+                  <a:srgbClr val="64748B"/>
+                </a:solidFill>
+                <a:latin typeface="Inter"/>
+              </a:rPr>
+              <a:t>11 / 12</a:t>
+            </a:r>
+          </a:p>
+        </p:txBody>
+      </p:sp>
+    </p:spTree>
+  </p:cSld>
+  <p:clrMapOvr>
+    <a:masterClrMapping/>
+  </p:clrMapOvr>
+</p:sld>
+</file>
+
+<file path=ppt/slides/slide12.xml><?xml version="1.0" encoding="utf-8"?>
+<p:sld xmlns:a="http://schemas.openxmlformats.org/drawingml/2006/main" xmlns:p="http://schemas.openxmlformats.org/presentationml/2006/main" xmlns:r="http://schemas.openxmlformats.org/officeDocument/2006/relationships">
+  <p:cSld>
+    <p:spTree>
+      <p:nvGrpSpPr>
+        <p:cNvPr id="1" name=""/>
+        <p:cNvGrpSpPr/>
+        <p:nvPr/>
+      </p:nvGrpSpPr>
+      <p:grpSpPr/>
+      <p:sp>
+        <p:nvSpPr>
+          <p:cNvPr id="2" name="Rectangle 1"/>
+          <p:cNvSpPr/>
+          <p:nvPr/>
+        </p:nvSpPr>
+        <p:spPr>
+          <a:xfrm>
+            <a:off x="0" y="0"/>
+            <a:ext cx="12191695" cy="6858000"/>
+          </a:xfrm>
+          <a:prstGeom prst="rect">
+            <a:avLst/>
+          </a:prstGeom>
+          <a:solidFill>
+            <a:srgbClr val="0C1A2E"/>
+          </a:solidFill>
+          <a:ln>
+            <a:noFill/>
+          </a:ln>
+          <a:effectLst/>
+        </p:spPr>
+        <p:style>
+          <a:lnRef idx="1">
+            <a:schemeClr val="accent1"/>
+          </a:lnRef>
+          <a:fillRef idx="3">
+            <a:schemeClr val="accent1"/>
+          </a:fillRef>
+          <a:effectRef idx="2">
+            <a:schemeClr val="accent1"/>
+          </a:effectRef>
+          <a:fontRef idx="minor">
+            <a:schemeClr val="lt1"/>
+          </a:fontRef>
+        </p:style>
+        <p:txBody>
+          <a:bodyPr rtlCol="0" anchor="ctr"/>
+          <a:lstStyle/>
+          <a:p>
+            <a:pPr algn="ctr"/>
+          </a:p>
+        </p:txBody>
+      </p:sp>
+      <p:sp>
+        <p:nvSpPr>
+          <p:cNvPr id="3" name="Rectangle 2"/>
+          <p:cNvSpPr/>
+          <p:nvPr/>
+        </p:nvSpPr>
+        <p:spPr>
+          <a:xfrm>
+            <a:off x="0" y="6748272"/>
+            <a:ext cx="12191695" cy="109728"/>
           </a:xfrm>
           <a:prstGeom prst="rect">
             <a:avLst/>
@@ -3227,16 +5669,191 @@
           </a:p>
         </p:txBody>
       </p:sp>
-      <p:sp>
-        <p:nvSpPr>
-          <p:cNvPr id="5" name="TextBox 4"/>
-          <p:cNvSpPr txBox="1"/>
-          <p:nvPr/>
-        </p:nvSpPr>
-        <p:spPr>
-          <a:xfrm>
-            <a:off x="914400" y="2103120"/>
-            <a:ext cx="7315200" cy="457200"/>
+      <p:cxnSp>
+        <p:nvCxnSpPr>
+          <p:cNvPr id="4" name="Connector 3"/>
+          <p:cNvCxnSpPr/>
+          <p:nvPr/>
+        </p:nvCxnSpPr>
+        <p:spPr>
+          <a:xfrm>
+            <a:off x="8686800" y="365760"/>
+            <a:ext cx="1097280" cy="2194560"/>
+          </a:xfrm>
+          <a:prstGeom prst="line">
+            <a:avLst/>
+          </a:prstGeom>
+          <a:ln w="7620">
+            <a:solidFill>
+              <a:srgbClr val="38BDF8"/>
+            </a:solidFill>
+          </a:ln>
+        </p:spPr>
+        <p:style>
+          <a:lnRef idx="2">
+            <a:schemeClr val="accent1"/>
+          </a:lnRef>
+          <a:fillRef idx="0">
+            <a:schemeClr val="accent1"/>
+          </a:fillRef>
+          <a:effectRef idx="1">
+            <a:schemeClr val="accent1"/>
+          </a:effectRef>
+          <a:fontRef idx="minor">
+            <a:schemeClr val="tx1"/>
+          </a:fontRef>
+        </p:style>
+      </p:cxnSp>
+      <p:cxnSp>
+        <p:nvCxnSpPr>
+          <p:cNvPr id="5" name="Connector 4"/>
+          <p:cNvCxnSpPr/>
+          <p:nvPr/>
+        </p:nvCxnSpPr>
+        <p:spPr>
+          <a:xfrm>
+            <a:off x="9235440" y="365760"/>
+            <a:ext cx="1097279" cy="2194560"/>
+          </a:xfrm>
+          <a:prstGeom prst="line">
+            <a:avLst/>
+          </a:prstGeom>
+          <a:ln w="7620">
+            <a:solidFill>
+              <a:srgbClr val="38BDF8"/>
+            </a:solidFill>
+          </a:ln>
+        </p:spPr>
+        <p:style>
+          <a:lnRef idx="2">
+            <a:schemeClr val="accent1"/>
+          </a:lnRef>
+          <a:fillRef idx="0">
+            <a:schemeClr val="accent1"/>
+          </a:fillRef>
+          <a:effectRef idx="1">
+            <a:schemeClr val="accent1"/>
+          </a:effectRef>
+          <a:fontRef idx="minor">
+            <a:schemeClr val="tx1"/>
+          </a:fontRef>
+        </p:style>
+      </p:cxnSp>
+      <p:cxnSp>
+        <p:nvCxnSpPr>
+          <p:cNvPr id="6" name="Connector 5"/>
+          <p:cNvCxnSpPr/>
+          <p:nvPr/>
+        </p:nvCxnSpPr>
+        <p:spPr>
+          <a:xfrm>
+            <a:off x="9784080" y="365760"/>
+            <a:ext cx="1097280" cy="2194560"/>
+          </a:xfrm>
+          <a:prstGeom prst="line">
+            <a:avLst/>
+          </a:prstGeom>
+          <a:ln w="7620">
+            <a:solidFill>
+              <a:srgbClr val="38BDF8"/>
+            </a:solidFill>
+          </a:ln>
+        </p:spPr>
+        <p:style>
+          <a:lnRef idx="2">
+            <a:schemeClr val="accent1"/>
+          </a:lnRef>
+          <a:fillRef idx="0">
+            <a:schemeClr val="accent1"/>
+          </a:fillRef>
+          <a:effectRef idx="1">
+            <a:schemeClr val="accent1"/>
+          </a:effectRef>
+          <a:fontRef idx="minor">
+            <a:schemeClr val="tx1"/>
+          </a:fontRef>
+        </p:style>
+      </p:cxnSp>
+      <p:cxnSp>
+        <p:nvCxnSpPr>
+          <p:cNvPr id="7" name="Connector 6"/>
+          <p:cNvCxnSpPr/>
+          <p:nvPr/>
+        </p:nvCxnSpPr>
+        <p:spPr>
+          <a:xfrm>
+            <a:off x="10332719" y="365760"/>
+            <a:ext cx="1097281" cy="2194560"/>
+          </a:xfrm>
+          <a:prstGeom prst="line">
+            <a:avLst/>
+          </a:prstGeom>
+          <a:ln w="7620">
+            <a:solidFill>
+              <a:srgbClr val="38BDF8"/>
+            </a:solidFill>
+          </a:ln>
+        </p:spPr>
+        <p:style>
+          <a:lnRef idx="2">
+            <a:schemeClr val="accent1"/>
+          </a:lnRef>
+          <a:fillRef idx="0">
+            <a:schemeClr val="accent1"/>
+          </a:fillRef>
+          <a:effectRef idx="1">
+            <a:schemeClr val="accent1"/>
+          </a:effectRef>
+          <a:fontRef idx="minor">
+            <a:schemeClr val="tx1"/>
+          </a:fontRef>
+        </p:style>
+      </p:cxnSp>
+      <p:cxnSp>
+        <p:nvCxnSpPr>
+          <p:cNvPr id="8" name="Connector 7"/>
+          <p:cNvCxnSpPr/>
+          <p:nvPr/>
+        </p:nvCxnSpPr>
+        <p:spPr>
+          <a:xfrm>
+            <a:off x="10881360" y="365760"/>
+            <a:ext cx="1097279" cy="2194560"/>
+          </a:xfrm>
+          <a:prstGeom prst="line">
+            <a:avLst/>
+          </a:prstGeom>
+          <a:ln w="7620">
+            <a:solidFill>
+              <a:srgbClr val="38BDF8"/>
+            </a:solidFill>
+          </a:ln>
+        </p:spPr>
+        <p:style>
+          <a:lnRef idx="2">
+            <a:schemeClr val="accent1"/>
+          </a:lnRef>
+          <a:fillRef idx="0">
+            <a:schemeClr val="accent1"/>
+          </a:fillRef>
+          <a:effectRef idx="1">
+            <a:schemeClr val="accent1"/>
+          </a:effectRef>
+          <a:fontRef idx="minor">
+            <a:schemeClr val="tx1"/>
+          </a:fontRef>
+        </p:style>
+      </p:cxnSp>
+      <p:sp>
+        <p:nvSpPr>
+          <p:cNvPr id="9" name="TextBox 8"/>
+          <p:cNvSpPr txBox="1"/>
+          <p:nvPr/>
+        </p:nvSpPr>
+        <p:spPr>
+          <a:xfrm>
+            <a:off x="914400" y="1828800"/>
+            <a:ext cx="10058400" cy="457200"/>
           </a:xfrm>
           <a:prstGeom prst="rect">
             <a:avLst/>
@@ -3251,27 +5868,27 @@
           <a:p>
             <a:pPr algn="l"/>
             <a:r>
-              <a:rPr sz="1400" b="1">
-                <a:solidFill>
-                  <a:srgbClr val="0284C7"/>
+              <a:rPr sz="1400" b="1" i="0">
+                <a:solidFill>
+                  <a:srgbClr val="38BDF8"/>
                 </a:solidFill>
                 <a:latin typeface="Space Grotesk"/>
               </a:rPr>
-              <a:t>BOOMING VENTURE</a:t>
-            </a:r>
-          </a:p>
-        </p:txBody>
-      </p:sp>
-      <p:sp>
-        <p:nvSpPr>
-          <p:cNvPr id="6" name="TextBox 5"/>
-          <p:cNvSpPr txBox="1"/>
-          <p:nvPr/>
-        </p:nvSpPr>
-        <p:spPr>
-          <a:xfrm>
-            <a:off x="914400" y="2560320"/>
-            <a:ext cx="10332720" cy="1828800"/>
+              <a:t>NEXT STEP</a:t>
+            </a:r>
+          </a:p>
+        </p:txBody>
+      </p:sp>
+      <p:sp>
+        <p:nvSpPr>
+          <p:cNvPr id="10" name="TextBox 9"/>
+          <p:cNvSpPr txBox="1"/>
+          <p:nvPr/>
+        </p:nvSpPr>
+        <p:spPr>
+          <a:xfrm>
+            <a:off x="914400" y="2286000"/>
+            <a:ext cx="10058400" cy="1828800"/>
           </a:xfrm>
           <a:prstGeom prst="rect">
             <a:avLst/>
@@ -3286,26 +5903,26 @@
           <a:p>
             <a:pPr algn="l"/>
             <a:r>
-              <a:rPr sz="5400" b="1">
+              <a:rPr sz="4400" b="1" i="0">
                 <a:solidFill>
                   <a:srgbClr val="FFFFFF"/>
                 </a:solidFill>
                 <a:latin typeface="Space Grotesk"/>
               </a:rPr>
-              <a:t>Presentation title goes here</a:t>
-            </a:r>
-          </a:p>
-        </p:txBody>
-      </p:sp>
-      <p:sp>
-        <p:nvSpPr>
-          <p:cNvPr id="7" name="TextBox 6"/>
-          <p:cNvSpPr txBox="1"/>
-          <p:nvPr/>
-        </p:nvSpPr>
-        <p:spPr>
-          <a:xfrm>
-            <a:off x="914400" y="4297680"/>
+              <a:t>Let's plug the leaks in your funnel.</a:t>
+            </a:r>
+          </a:p>
+        </p:txBody>
+      </p:sp>
+      <p:sp>
+        <p:nvSpPr>
+          <p:cNvPr id="11" name="TextBox 10"/>
+          <p:cNvSpPr txBox="1"/>
+          <p:nvPr/>
+        </p:nvSpPr>
+        <p:spPr>
+          <a:xfrm>
+            <a:off x="914400" y="4114800"/>
             <a:ext cx="10058400" cy="548640"/>
           </a:xfrm>
           <a:prstGeom prst="rect">
@@ -3321,27 +5938,108 @@
           <a:p>
             <a:pPr algn="l"/>
             <a:r>
-              <a:rPr sz="2000" b="0">
+              <a:rPr sz="2000" b="0" i="0">
                 <a:solidFill>
                   <a:srgbClr val="E2E8F0"/>
                 </a:solidFill>
                 <a:latin typeface="Inter"/>
               </a:rPr>
-              <a:t>Subtitle or value proposition in one sentence.</a:t>
-            </a:r>
-          </a:p>
-        </p:txBody>
-      </p:sp>
-      <p:sp>
-        <p:nvSpPr>
-          <p:cNvPr id="8" name="TextBox 7"/>
-          <p:cNvSpPr txBox="1"/>
-          <p:nvPr/>
-        </p:nvSpPr>
-        <p:spPr>
-          <a:xfrm>
-            <a:off x="914400" y="5943600"/>
-            <a:ext cx="5486400" cy="274320"/>
+              <a:t>Book a free UNIFY audit. 30 minutes. No slide deck on our side.</a:t>
+            </a:r>
+          </a:p>
+        </p:txBody>
+      </p:sp>
+      <p:sp>
+        <p:nvSpPr>
+          <p:cNvPr id="12" name="Rounded Rectangle 11"/>
+          <p:cNvSpPr/>
+          <p:nvPr/>
+        </p:nvSpPr>
+        <p:spPr>
+          <a:xfrm>
+            <a:off x="914400" y="5120640"/>
+            <a:ext cx="3200400" cy="640080"/>
+          </a:xfrm>
+          <a:prstGeom prst="roundRect">
+            <a:avLst>
+              <a:gd name="adj" fmla="val 50000"/>
+            </a:avLst>
+          </a:prstGeom>
+          <a:solidFill>
+            <a:srgbClr val="0284C7"/>
+          </a:solidFill>
+          <a:ln>
+            <a:noFill/>
+          </a:ln>
+          <a:effectLst/>
+        </p:spPr>
+        <p:style>
+          <a:lnRef idx="1">
+            <a:schemeClr val="accent1"/>
+          </a:lnRef>
+          <a:fillRef idx="3">
+            <a:schemeClr val="accent1"/>
+          </a:fillRef>
+          <a:effectRef idx="2">
+            <a:schemeClr val="accent1"/>
+          </a:effectRef>
+          <a:fontRef idx="minor">
+            <a:schemeClr val="lt1"/>
+          </a:fontRef>
+        </p:style>
+        <p:txBody>
+          <a:bodyPr rtlCol="0" anchor="ctr"/>
+          <a:lstStyle/>
+          <a:p>
+            <a:pPr algn="ctr"/>
+          </a:p>
+        </p:txBody>
+      </p:sp>
+      <p:sp>
+        <p:nvSpPr>
+          <p:cNvPr id="13" name="TextBox 12"/>
+          <p:cNvSpPr txBox="1"/>
+          <p:nvPr/>
+        </p:nvSpPr>
+        <p:spPr>
+          <a:xfrm>
+            <a:off x="914400" y="5120640"/>
+            <a:ext cx="3200400" cy="640080"/>
+          </a:xfrm>
+          <a:prstGeom prst="rect">
+            <a:avLst/>
+          </a:prstGeom>
+          <a:noFill/>
+        </p:spPr>
+        <p:txBody>
+          <a:bodyPr wrap="square" tIns="25400" bIns="25400" lIns="25400" rIns="25400" anchor="ctr">
+            <a:spAutoFit/>
+          </a:bodyPr>
+          <a:lstStyle/>
+          <a:p>
+            <a:pPr algn="ctr"/>
+            <a:r>
+              <a:rPr sz="1600" b="1" i="0">
+                <a:solidFill>
+                  <a:srgbClr val="FFFFFF"/>
+                </a:solidFill>
+                <a:latin typeface="Space Grotesk"/>
+              </a:rPr>
+              <a:t>boomingventure.com</a:t>
+            </a:r>
+          </a:p>
+        </p:txBody>
+      </p:sp>
+      <p:sp>
+        <p:nvSpPr>
+          <p:cNvPr id="14" name="TextBox 13"/>
+          <p:cNvSpPr txBox="1"/>
+          <p:nvPr/>
+        </p:nvSpPr>
+        <p:spPr>
+          <a:xfrm>
+            <a:off x="914400" y="5989320"/>
+            <a:ext cx="10058400" cy="365760"/>
           </a:xfrm>
           <a:prstGeom prst="rect">
             <a:avLst/>
@@ -3356,13 +6054,13 @@
           <a:p>
             <a:pPr algn="l"/>
             <a:r>
-              <a:rPr sz="1200" b="0">
+              <a:rPr sz="1300" b="0" i="0">
                 <a:solidFill>
                   <a:srgbClr val="64748B"/>
                 </a:solidFill>
                 <a:latin typeface="Inter"/>
               </a:rPr>
-              <a:t>Presenter Name  |  Date</a:t>
+              <a:t>info@boomingventure.com  |  Rotterdam, The Netherlands</a:t>
             </a:r>
           </a:p>
         </p:txBody>
@@ -3400,7 +6098,7 @@
             <a:avLst/>
           </a:prstGeom>
           <a:solidFill>
-            <a:srgbClr val="F0F9FF"/>
+            <a:srgbClr val="F8FAFC"/>
           </a:solidFill>
           <a:ln>
             <a:noFill/>
@@ -3437,8 +6135,248 @@
         </p:nvSpPr>
         <p:spPr>
           <a:xfrm>
-            <a:off x="0" y="3108960"/>
-            <a:ext cx="12191695" cy="36576"/>
+            <a:off x="914400" y="914400"/>
+            <a:ext cx="548640" cy="44450"/>
+          </a:xfrm>
+          <a:prstGeom prst="rect">
+            <a:avLst/>
+          </a:prstGeom>
+          <a:solidFill>
+            <a:srgbClr val="14B8A6"/>
+          </a:solidFill>
+          <a:ln>
+            <a:noFill/>
+          </a:ln>
+        </p:spPr>
+        <p:style>
+          <a:lnRef idx="1">
+            <a:schemeClr val="accent1"/>
+          </a:lnRef>
+          <a:fillRef idx="3">
+            <a:schemeClr val="accent1"/>
+          </a:fillRef>
+          <a:effectRef idx="2">
+            <a:schemeClr val="accent1"/>
+          </a:effectRef>
+          <a:fontRef idx="minor">
+            <a:schemeClr val="lt1"/>
+          </a:fontRef>
+        </p:style>
+        <p:txBody>
+          <a:bodyPr rtlCol="0" anchor="ctr"/>
+          <a:lstStyle/>
+          <a:p>
+            <a:pPr algn="ctr"/>
+          </a:p>
+        </p:txBody>
+      </p:sp>
+      <p:sp>
+        <p:nvSpPr>
+          <p:cNvPr id="4" name="TextBox 3"/>
+          <p:cNvSpPr txBox="1"/>
+          <p:nvPr/>
+        </p:nvSpPr>
+        <p:spPr>
+          <a:xfrm>
+            <a:off x="914400" y="1051560"/>
+            <a:ext cx="10058400" cy="640080"/>
+          </a:xfrm>
+          <a:prstGeom prst="rect">
+            <a:avLst/>
+          </a:prstGeom>
+          <a:noFill/>
+        </p:spPr>
+        <p:txBody>
+          <a:bodyPr wrap="square" tIns="25400" bIns="25400" lIns="25400" rIns="25400" anchor="t">
+            <a:spAutoFit/>
+          </a:bodyPr>
+          <a:lstStyle/>
+          <a:p>
+            <a:pPr algn="l"/>
+            <a:r>
+              <a:rPr sz="3200" b="1" i="0">
+                <a:solidFill>
+                  <a:srgbClr val="0C1A2E"/>
+                </a:solidFill>
+                <a:latin typeface="Space Grotesk"/>
+              </a:rPr>
+              <a:t>Numbers that frame the work</a:t>
+            </a:r>
+          </a:p>
+        </p:txBody>
+      </p:sp>
+      <p:sp>
+        <p:nvSpPr>
+          <p:cNvPr id="5" name="TextBox 4"/>
+          <p:cNvSpPr txBox="1"/>
+          <p:nvPr/>
+        </p:nvSpPr>
+        <p:spPr>
+          <a:xfrm>
+            <a:off x="914400" y="1691640"/>
+            <a:ext cx="10058400" cy="365760"/>
+          </a:xfrm>
+          <a:prstGeom prst="rect">
+            <a:avLst/>
+          </a:prstGeom>
+          <a:noFill/>
+        </p:spPr>
+        <p:txBody>
+          <a:bodyPr wrap="square" tIns="25400" bIns="25400" lIns="25400" rIns="25400" anchor="t">
+            <a:spAutoFit/>
+          </a:bodyPr>
+          <a:lstStyle/>
+          <a:p>
+            <a:pPr algn="l"/>
+            <a:r>
+              <a:rPr sz="1500" b="0" i="0">
+                <a:solidFill>
+                  <a:srgbClr val="64748B"/>
+                </a:solidFill>
+                <a:latin typeface="Inter"/>
+              </a:rPr>
+              <a:t>Replace with your own metrics. The layout mirrors the homepage hero stats card.</a:t>
+            </a:r>
+          </a:p>
+        </p:txBody>
+      </p:sp>
+      <p:sp>
+        <p:nvSpPr>
+          <p:cNvPr id="6" name="Rounded Rectangle 5"/>
+          <p:cNvSpPr/>
+          <p:nvPr/>
+        </p:nvSpPr>
+        <p:spPr>
+          <a:xfrm>
+            <a:off x="815187" y="2743200"/>
+            <a:ext cx="2468880" cy="3108960"/>
+          </a:xfrm>
+          <a:prstGeom prst="roundRect">
+            <a:avLst>
+              <a:gd name="adj" fmla="val 6000"/>
+            </a:avLst>
+          </a:prstGeom>
+          <a:solidFill>
+            <a:srgbClr val="FFFFFF"/>
+          </a:solidFill>
+          <a:ln w="9525">
+            <a:solidFill>
+              <a:srgbClr val="E2E8F0"/>
+            </a:solidFill>
+          </a:ln>
+          <a:effectLst/>
+        </p:spPr>
+        <p:style>
+          <a:lnRef idx="1">
+            <a:schemeClr val="accent1"/>
+          </a:lnRef>
+          <a:fillRef idx="3">
+            <a:schemeClr val="accent1"/>
+          </a:fillRef>
+          <a:effectRef idx="2">
+            <a:schemeClr val="accent1"/>
+          </a:effectRef>
+          <a:fontRef idx="minor">
+            <a:schemeClr val="lt1"/>
+          </a:fontRef>
+        </p:style>
+        <p:txBody>
+          <a:bodyPr rtlCol="0" anchor="ctr"/>
+          <a:lstStyle/>
+          <a:p>
+            <a:pPr algn="ctr"/>
+          </a:p>
+        </p:txBody>
+      </p:sp>
+      <p:sp>
+        <p:nvSpPr>
+          <p:cNvPr id="7" name="Rectangle 6"/>
+          <p:cNvSpPr/>
+          <p:nvPr/>
+        </p:nvSpPr>
+        <p:spPr>
+          <a:xfrm>
+            <a:off x="815187" y="2743200"/>
+            <a:ext cx="2468880" cy="54864"/>
+          </a:xfrm>
+          <a:prstGeom prst="rect">
+            <a:avLst/>
+          </a:prstGeom>
+          <a:solidFill>
+            <a:srgbClr val="0284C7"/>
+          </a:solidFill>
+          <a:ln>
+            <a:noFill/>
+          </a:ln>
+          <a:effectLst/>
+        </p:spPr>
+        <p:style>
+          <a:lnRef idx="1">
+            <a:schemeClr val="accent1"/>
+          </a:lnRef>
+          <a:fillRef idx="3">
+            <a:schemeClr val="accent1"/>
+          </a:fillRef>
+          <a:effectRef idx="2">
+            <a:schemeClr val="accent1"/>
+          </a:effectRef>
+          <a:fontRef idx="minor">
+            <a:schemeClr val="lt1"/>
+          </a:fontRef>
+        </p:style>
+        <p:txBody>
+          <a:bodyPr rtlCol="0" anchor="ctr"/>
+          <a:lstStyle/>
+          <a:p>
+            <a:pPr algn="ctr"/>
+          </a:p>
+        </p:txBody>
+      </p:sp>
+      <p:sp>
+        <p:nvSpPr>
+          <p:cNvPr id="8" name="TextBox 7"/>
+          <p:cNvSpPr txBox="1"/>
+          <p:nvPr/>
+        </p:nvSpPr>
+        <p:spPr>
+          <a:xfrm>
+            <a:off x="815187" y="3291840"/>
+            <a:ext cx="2468880" cy="1280160"/>
+          </a:xfrm>
+          <a:prstGeom prst="rect">
+            <a:avLst/>
+          </a:prstGeom>
+          <a:noFill/>
+        </p:spPr>
+        <p:txBody>
+          <a:bodyPr wrap="square" tIns="25400" bIns="25400" lIns="25400" rIns="25400" anchor="ctr">
+            <a:spAutoFit/>
+          </a:bodyPr>
+          <a:lstStyle/>
+          <a:p>
+            <a:pPr algn="ctr"/>
+            <a:r>
+              <a:rPr sz="4800" b="1" i="0">
+                <a:solidFill>
+                  <a:srgbClr val="0284C7"/>
+                </a:solidFill>
+                <a:latin typeface="Space Grotesk"/>
+              </a:rPr>
+              <a:t>97%</a:t>
+            </a:r>
+          </a:p>
+        </p:txBody>
+      </p:sp>
+      <p:sp>
+        <p:nvSpPr>
+          <p:cNvPr id="9" name="Rectangle 8"/>
+          <p:cNvSpPr/>
+          <p:nvPr/>
+        </p:nvSpPr>
+        <p:spPr>
+          <a:xfrm>
+            <a:off x="1775307" y="4572000"/>
+            <a:ext cx="548640" cy="25400"/>
           </a:xfrm>
           <a:prstGeom prst="rect">
             <a:avLst/>
@@ -3475,14 +6413,14 @@
       </p:sp>
       <p:sp>
         <p:nvSpPr>
-          <p:cNvPr id="4" name="TextBox 3"/>
-          <p:cNvSpPr txBox="1"/>
-          <p:nvPr/>
-        </p:nvSpPr>
-        <p:spPr>
-          <a:xfrm>
-            <a:off x="914400" y="2377440"/>
-            <a:ext cx="10058400" cy="365760"/>
+          <p:cNvPr id="10" name="TextBox 9"/>
+          <p:cNvSpPr txBox="1"/>
+          <p:nvPr/>
+        </p:nvSpPr>
+        <p:spPr>
+          <a:xfrm>
+            <a:off x="815187" y="4754880"/>
+            <a:ext cx="2468880" cy="914400"/>
           </a:xfrm>
           <a:prstGeom prst="rect">
             <a:avLst/>
@@ -3495,29 +6433,200 @@
           </a:bodyPr>
           <a:lstStyle/>
           <a:p>
-            <a:pPr algn="l"/>
-            <a:r>
-              <a:rPr sz="1400" b="1">
-                <a:solidFill>
-                  <a:srgbClr val="14B8A6"/>
+            <a:pPr algn="ctr"/>
+            <a:r>
+              <a:rPr sz="1400" b="0" i="0">
+                <a:solidFill>
+                  <a:srgbClr val="1F2937"/>
+                </a:solidFill>
+                <a:latin typeface="Inter"/>
+              </a:rPr>
+              <a:t>Client satisfaction</a:t>
+            </a:r>
+          </a:p>
+        </p:txBody>
+      </p:sp>
+      <p:sp>
+        <p:nvSpPr>
+          <p:cNvPr id="11" name="Rounded Rectangle 10"/>
+          <p:cNvSpPr/>
+          <p:nvPr/>
+        </p:nvSpPr>
+        <p:spPr>
+          <a:xfrm>
+            <a:off x="3512667" y="2743200"/>
+            <a:ext cx="2468880" cy="3108960"/>
+          </a:xfrm>
+          <a:prstGeom prst="roundRect">
+            <a:avLst>
+              <a:gd name="adj" fmla="val 6000"/>
+            </a:avLst>
+          </a:prstGeom>
+          <a:solidFill>
+            <a:srgbClr val="FFFFFF"/>
+          </a:solidFill>
+          <a:ln w="9525">
+            <a:solidFill>
+              <a:srgbClr val="E2E8F0"/>
+            </a:solidFill>
+          </a:ln>
+          <a:effectLst/>
+        </p:spPr>
+        <p:style>
+          <a:lnRef idx="1">
+            <a:schemeClr val="accent1"/>
+          </a:lnRef>
+          <a:fillRef idx="3">
+            <a:schemeClr val="accent1"/>
+          </a:fillRef>
+          <a:effectRef idx="2">
+            <a:schemeClr val="accent1"/>
+          </a:effectRef>
+          <a:fontRef idx="minor">
+            <a:schemeClr val="lt1"/>
+          </a:fontRef>
+        </p:style>
+        <p:txBody>
+          <a:bodyPr rtlCol="0" anchor="ctr"/>
+          <a:lstStyle/>
+          <a:p>
+            <a:pPr algn="ctr"/>
+          </a:p>
+        </p:txBody>
+      </p:sp>
+      <p:sp>
+        <p:nvSpPr>
+          <p:cNvPr id="12" name="Rectangle 11"/>
+          <p:cNvSpPr/>
+          <p:nvPr/>
+        </p:nvSpPr>
+        <p:spPr>
+          <a:xfrm>
+            <a:off x="3512667" y="2743200"/>
+            <a:ext cx="2468880" cy="54864"/>
+          </a:xfrm>
+          <a:prstGeom prst="rect">
+            <a:avLst/>
+          </a:prstGeom>
+          <a:solidFill>
+            <a:srgbClr val="0284C7"/>
+          </a:solidFill>
+          <a:ln>
+            <a:noFill/>
+          </a:ln>
+          <a:effectLst/>
+        </p:spPr>
+        <p:style>
+          <a:lnRef idx="1">
+            <a:schemeClr val="accent1"/>
+          </a:lnRef>
+          <a:fillRef idx="3">
+            <a:schemeClr val="accent1"/>
+          </a:fillRef>
+          <a:effectRef idx="2">
+            <a:schemeClr val="accent1"/>
+          </a:effectRef>
+          <a:fontRef idx="minor">
+            <a:schemeClr val="lt1"/>
+          </a:fontRef>
+        </p:style>
+        <p:txBody>
+          <a:bodyPr rtlCol="0" anchor="ctr"/>
+          <a:lstStyle/>
+          <a:p>
+            <a:pPr algn="ctr"/>
+          </a:p>
+        </p:txBody>
+      </p:sp>
+      <p:sp>
+        <p:nvSpPr>
+          <p:cNvPr id="13" name="TextBox 12"/>
+          <p:cNvSpPr txBox="1"/>
+          <p:nvPr/>
+        </p:nvSpPr>
+        <p:spPr>
+          <a:xfrm>
+            <a:off x="3512667" y="3291840"/>
+            <a:ext cx="2468880" cy="1280160"/>
+          </a:xfrm>
+          <a:prstGeom prst="rect">
+            <a:avLst/>
+          </a:prstGeom>
+          <a:noFill/>
+        </p:spPr>
+        <p:txBody>
+          <a:bodyPr wrap="square" tIns="25400" bIns="25400" lIns="25400" rIns="25400" anchor="ctr">
+            <a:spAutoFit/>
+          </a:bodyPr>
+          <a:lstStyle/>
+          <a:p>
+            <a:pPr algn="ctr"/>
+            <a:r>
+              <a:rPr sz="4800" b="1" i="0">
+                <a:solidFill>
+                  <a:srgbClr val="0284C7"/>
                 </a:solidFill>
                 <a:latin typeface="Space Grotesk"/>
               </a:rPr>
-              <a:t>SECTION 01</a:t>
-            </a:r>
-          </a:p>
-        </p:txBody>
-      </p:sp>
-      <p:sp>
-        <p:nvSpPr>
-          <p:cNvPr id="5" name="TextBox 4"/>
-          <p:cNvSpPr txBox="1"/>
-          <p:nvPr/>
-        </p:nvSpPr>
-        <p:spPr>
-          <a:xfrm>
-            <a:off x="914400" y="3291840"/>
-            <a:ext cx="10058400" cy="1371600"/>
+              <a:t>+48%</a:t>
+            </a:r>
+          </a:p>
+        </p:txBody>
+      </p:sp>
+      <p:sp>
+        <p:nvSpPr>
+          <p:cNvPr id="14" name="Rectangle 13"/>
+          <p:cNvSpPr/>
+          <p:nvPr/>
+        </p:nvSpPr>
+        <p:spPr>
+          <a:xfrm>
+            <a:off x="4472787" y="4572000"/>
+            <a:ext cx="548640" cy="25400"/>
+          </a:xfrm>
+          <a:prstGeom prst="rect">
+            <a:avLst/>
+          </a:prstGeom>
+          <a:solidFill>
+            <a:srgbClr val="14B8A6"/>
+          </a:solidFill>
+          <a:ln>
+            <a:noFill/>
+          </a:ln>
+          <a:effectLst/>
+        </p:spPr>
+        <p:style>
+          <a:lnRef idx="1">
+            <a:schemeClr val="accent1"/>
+          </a:lnRef>
+          <a:fillRef idx="3">
+            <a:schemeClr val="accent1"/>
+          </a:fillRef>
+          <a:effectRef idx="2">
+            <a:schemeClr val="accent1"/>
+          </a:effectRef>
+          <a:fontRef idx="minor">
+            <a:schemeClr val="lt1"/>
+          </a:fontRef>
+        </p:style>
+        <p:txBody>
+          <a:bodyPr rtlCol="0" anchor="ctr"/>
+          <a:lstStyle/>
+          <a:p>
+            <a:pPr algn="ctr"/>
+          </a:p>
+        </p:txBody>
+      </p:sp>
+      <p:sp>
+        <p:nvSpPr>
+          <p:cNvPr id="15" name="TextBox 14"/>
+          <p:cNvSpPr txBox="1"/>
+          <p:nvPr/>
+        </p:nvSpPr>
+        <p:spPr>
+          <a:xfrm>
+            <a:off x="3512667" y="4754880"/>
+            <a:ext cx="2468880" cy="914400"/>
           </a:xfrm>
           <a:prstGeom prst="rect">
             <a:avLst/>
@@ -3530,29 +6639,200 @@
           </a:bodyPr>
           <a:lstStyle/>
           <a:p>
-            <a:pPr algn="l"/>
-            <a:r>
-              <a:rPr sz="4400" b="1">
-                <a:solidFill>
-                  <a:srgbClr val="0C1A2E"/>
+            <a:pPr algn="ctr"/>
+            <a:r>
+              <a:rPr sz="1400" b="0" i="0">
+                <a:solidFill>
+                  <a:srgbClr val="1F2937"/>
+                </a:solidFill>
+                <a:latin typeface="Inter"/>
+              </a:rPr>
+              <a:t>Average growth</a:t>
+            </a:r>
+          </a:p>
+        </p:txBody>
+      </p:sp>
+      <p:sp>
+        <p:nvSpPr>
+          <p:cNvPr id="16" name="Rounded Rectangle 15"/>
+          <p:cNvSpPr/>
+          <p:nvPr/>
+        </p:nvSpPr>
+        <p:spPr>
+          <a:xfrm>
+            <a:off x="6210147" y="2743200"/>
+            <a:ext cx="2468880" cy="3108960"/>
+          </a:xfrm>
+          <a:prstGeom prst="roundRect">
+            <a:avLst>
+              <a:gd name="adj" fmla="val 6000"/>
+            </a:avLst>
+          </a:prstGeom>
+          <a:solidFill>
+            <a:srgbClr val="FFFFFF"/>
+          </a:solidFill>
+          <a:ln w="9525">
+            <a:solidFill>
+              <a:srgbClr val="E2E8F0"/>
+            </a:solidFill>
+          </a:ln>
+          <a:effectLst/>
+        </p:spPr>
+        <p:style>
+          <a:lnRef idx="1">
+            <a:schemeClr val="accent1"/>
+          </a:lnRef>
+          <a:fillRef idx="3">
+            <a:schemeClr val="accent1"/>
+          </a:fillRef>
+          <a:effectRef idx="2">
+            <a:schemeClr val="accent1"/>
+          </a:effectRef>
+          <a:fontRef idx="minor">
+            <a:schemeClr val="lt1"/>
+          </a:fontRef>
+        </p:style>
+        <p:txBody>
+          <a:bodyPr rtlCol="0" anchor="ctr"/>
+          <a:lstStyle/>
+          <a:p>
+            <a:pPr algn="ctr"/>
+          </a:p>
+        </p:txBody>
+      </p:sp>
+      <p:sp>
+        <p:nvSpPr>
+          <p:cNvPr id="17" name="Rectangle 16"/>
+          <p:cNvSpPr/>
+          <p:nvPr/>
+        </p:nvSpPr>
+        <p:spPr>
+          <a:xfrm>
+            <a:off x="6210147" y="2743200"/>
+            <a:ext cx="2468880" cy="54864"/>
+          </a:xfrm>
+          <a:prstGeom prst="rect">
+            <a:avLst/>
+          </a:prstGeom>
+          <a:solidFill>
+            <a:srgbClr val="0284C7"/>
+          </a:solidFill>
+          <a:ln>
+            <a:noFill/>
+          </a:ln>
+          <a:effectLst/>
+        </p:spPr>
+        <p:style>
+          <a:lnRef idx="1">
+            <a:schemeClr val="accent1"/>
+          </a:lnRef>
+          <a:fillRef idx="3">
+            <a:schemeClr val="accent1"/>
+          </a:fillRef>
+          <a:effectRef idx="2">
+            <a:schemeClr val="accent1"/>
+          </a:effectRef>
+          <a:fontRef idx="minor">
+            <a:schemeClr val="lt1"/>
+          </a:fontRef>
+        </p:style>
+        <p:txBody>
+          <a:bodyPr rtlCol="0" anchor="ctr"/>
+          <a:lstStyle/>
+          <a:p>
+            <a:pPr algn="ctr"/>
+          </a:p>
+        </p:txBody>
+      </p:sp>
+      <p:sp>
+        <p:nvSpPr>
+          <p:cNvPr id="18" name="TextBox 17"/>
+          <p:cNvSpPr txBox="1"/>
+          <p:nvPr/>
+        </p:nvSpPr>
+        <p:spPr>
+          <a:xfrm>
+            <a:off x="6210147" y="3291840"/>
+            <a:ext cx="2468880" cy="1280160"/>
+          </a:xfrm>
+          <a:prstGeom prst="rect">
+            <a:avLst/>
+          </a:prstGeom>
+          <a:noFill/>
+        </p:spPr>
+        <p:txBody>
+          <a:bodyPr wrap="square" tIns="25400" bIns="25400" lIns="25400" rIns="25400" anchor="ctr">
+            <a:spAutoFit/>
+          </a:bodyPr>
+          <a:lstStyle/>
+          <a:p>
+            <a:pPr algn="ctr"/>
+            <a:r>
+              <a:rPr sz="4800" b="1" i="0">
+                <a:solidFill>
+                  <a:srgbClr val="0284C7"/>
                 </a:solidFill>
                 <a:latin typeface="Space Grotesk"/>
               </a:rPr>
-              <a:t>Section title</a:t>
-            </a:r>
-          </a:p>
-        </p:txBody>
-      </p:sp>
-      <p:sp>
-        <p:nvSpPr>
-          <p:cNvPr id="6" name="TextBox 5"/>
-          <p:cNvSpPr txBox="1"/>
-          <p:nvPr/>
-        </p:nvSpPr>
-        <p:spPr>
-          <a:xfrm>
-            <a:off x="914400" y="4389120"/>
-            <a:ext cx="10058400" cy="457200"/>
+              <a:t>15+</a:t>
+            </a:r>
+          </a:p>
+        </p:txBody>
+      </p:sp>
+      <p:sp>
+        <p:nvSpPr>
+          <p:cNvPr id="19" name="Rectangle 18"/>
+          <p:cNvSpPr/>
+          <p:nvPr/>
+        </p:nvSpPr>
+        <p:spPr>
+          <a:xfrm>
+            <a:off x="7170267" y="4572000"/>
+            <a:ext cx="548640" cy="25400"/>
+          </a:xfrm>
+          <a:prstGeom prst="rect">
+            <a:avLst/>
+          </a:prstGeom>
+          <a:solidFill>
+            <a:srgbClr val="14B8A6"/>
+          </a:solidFill>
+          <a:ln>
+            <a:noFill/>
+          </a:ln>
+          <a:effectLst/>
+        </p:spPr>
+        <p:style>
+          <a:lnRef idx="1">
+            <a:schemeClr val="accent1"/>
+          </a:lnRef>
+          <a:fillRef idx="3">
+            <a:schemeClr val="accent1"/>
+          </a:fillRef>
+          <a:effectRef idx="2">
+            <a:schemeClr val="accent1"/>
+          </a:effectRef>
+          <a:fontRef idx="minor">
+            <a:schemeClr val="lt1"/>
+          </a:fontRef>
+        </p:style>
+        <p:txBody>
+          <a:bodyPr rtlCol="0" anchor="ctr"/>
+          <a:lstStyle/>
+          <a:p>
+            <a:pPr algn="ctr"/>
+          </a:p>
+        </p:txBody>
+      </p:sp>
+      <p:sp>
+        <p:nvSpPr>
+          <p:cNvPr id="20" name="TextBox 19"/>
+          <p:cNvSpPr txBox="1"/>
+          <p:nvPr/>
+        </p:nvSpPr>
+        <p:spPr>
+          <a:xfrm>
+            <a:off x="6210147" y="4754880"/>
+            <a:ext cx="2468880" cy="914400"/>
           </a:xfrm>
           <a:prstGeom prst="rect">
             <a:avLst/>
@@ -3565,22 +6845,228 @@
           </a:bodyPr>
           <a:lstStyle/>
           <a:p>
-            <a:pPr algn="l"/>
-            <a:r>
-              <a:rPr sz="1800" b="0">
+            <a:pPr algn="ctr"/>
+            <a:r>
+              <a:rPr sz="1400" b="0" i="0">
                 <a:solidFill>
                   <a:srgbClr val="1F2937"/>
                 </a:solidFill>
                 <a:latin typeface="Inter"/>
               </a:rPr>
-              <a:t>Short framing sentence that primes the audience for what follows.</a:t>
-            </a:r>
-          </a:p>
-        </p:txBody>
-      </p:sp>
-      <p:sp>
-        <p:nvSpPr>
-          <p:cNvPr id="7" name="Rectangle 6"/>
+              <a:t>Businesses helped</a:t>
+            </a:r>
+          </a:p>
+        </p:txBody>
+      </p:sp>
+      <p:sp>
+        <p:nvSpPr>
+          <p:cNvPr id="21" name="Rounded Rectangle 20"/>
+          <p:cNvSpPr/>
+          <p:nvPr/>
+        </p:nvSpPr>
+        <p:spPr>
+          <a:xfrm>
+            <a:off x="8907627" y="2743200"/>
+            <a:ext cx="2468880" cy="3108960"/>
+          </a:xfrm>
+          <a:prstGeom prst="roundRect">
+            <a:avLst>
+              <a:gd name="adj" fmla="val 6000"/>
+            </a:avLst>
+          </a:prstGeom>
+          <a:solidFill>
+            <a:srgbClr val="FFFFFF"/>
+          </a:solidFill>
+          <a:ln w="9525">
+            <a:solidFill>
+              <a:srgbClr val="E2E8F0"/>
+            </a:solidFill>
+          </a:ln>
+          <a:effectLst/>
+        </p:spPr>
+        <p:style>
+          <a:lnRef idx="1">
+            <a:schemeClr val="accent1"/>
+          </a:lnRef>
+          <a:fillRef idx="3">
+            <a:schemeClr val="accent1"/>
+          </a:fillRef>
+          <a:effectRef idx="2">
+            <a:schemeClr val="accent1"/>
+          </a:effectRef>
+          <a:fontRef idx="minor">
+            <a:schemeClr val="lt1"/>
+          </a:fontRef>
+        </p:style>
+        <p:txBody>
+          <a:bodyPr rtlCol="0" anchor="ctr"/>
+          <a:lstStyle/>
+          <a:p>
+            <a:pPr algn="ctr"/>
+          </a:p>
+        </p:txBody>
+      </p:sp>
+      <p:sp>
+        <p:nvSpPr>
+          <p:cNvPr id="22" name="Rectangle 21"/>
+          <p:cNvSpPr/>
+          <p:nvPr/>
+        </p:nvSpPr>
+        <p:spPr>
+          <a:xfrm>
+            <a:off x="8907627" y="2743200"/>
+            <a:ext cx="2468880" cy="54864"/>
+          </a:xfrm>
+          <a:prstGeom prst="rect">
+            <a:avLst/>
+          </a:prstGeom>
+          <a:solidFill>
+            <a:srgbClr val="0284C7"/>
+          </a:solidFill>
+          <a:ln>
+            <a:noFill/>
+          </a:ln>
+          <a:effectLst/>
+        </p:spPr>
+        <p:style>
+          <a:lnRef idx="1">
+            <a:schemeClr val="accent1"/>
+          </a:lnRef>
+          <a:fillRef idx="3">
+            <a:schemeClr val="accent1"/>
+          </a:fillRef>
+          <a:effectRef idx="2">
+            <a:schemeClr val="accent1"/>
+          </a:effectRef>
+          <a:fontRef idx="minor">
+            <a:schemeClr val="lt1"/>
+          </a:fontRef>
+        </p:style>
+        <p:txBody>
+          <a:bodyPr rtlCol="0" anchor="ctr"/>
+          <a:lstStyle/>
+          <a:p>
+            <a:pPr algn="ctr"/>
+          </a:p>
+        </p:txBody>
+      </p:sp>
+      <p:sp>
+        <p:nvSpPr>
+          <p:cNvPr id="23" name="TextBox 22"/>
+          <p:cNvSpPr txBox="1"/>
+          <p:nvPr/>
+        </p:nvSpPr>
+        <p:spPr>
+          <a:xfrm>
+            <a:off x="8907627" y="3291840"/>
+            <a:ext cx="2468880" cy="1280160"/>
+          </a:xfrm>
+          <a:prstGeom prst="rect">
+            <a:avLst/>
+          </a:prstGeom>
+          <a:noFill/>
+        </p:spPr>
+        <p:txBody>
+          <a:bodyPr wrap="square" tIns="25400" bIns="25400" lIns="25400" rIns="25400" anchor="ctr">
+            <a:spAutoFit/>
+          </a:bodyPr>
+          <a:lstStyle/>
+          <a:p>
+            <a:pPr algn="ctr"/>
+            <a:r>
+              <a:rPr sz="4800" b="1" i="0">
+                <a:solidFill>
+                  <a:srgbClr val="0284C7"/>
+                </a:solidFill>
+                <a:latin typeface="Space Grotesk"/>
+              </a:rPr>
+              <a:t>24/7</a:t>
+            </a:r>
+          </a:p>
+        </p:txBody>
+      </p:sp>
+      <p:sp>
+        <p:nvSpPr>
+          <p:cNvPr id="24" name="Rectangle 23"/>
+          <p:cNvSpPr/>
+          <p:nvPr/>
+        </p:nvSpPr>
+        <p:spPr>
+          <a:xfrm>
+            <a:off x="9867747" y="4572000"/>
+            <a:ext cx="548640" cy="25400"/>
+          </a:xfrm>
+          <a:prstGeom prst="rect">
+            <a:avLst/>
+          </a:prstGeom>
+          <a:solidFill>
+            <a:srgbClr val="14B8A6"/>
+          </a:solidFill>
+          <a:ln>
+            <a:noFill/>
+          </a:ln>
+          <a:effectLst/>
+        </p:spPr>
+        <p:style>
+          <a:lnRef idx="1">
+            <a:schemeClr val="accent1"/>
+          </a:lnRef>
+          <a:fillRef idx="3">
+            <a:schemeClr val="accent1"/>
+          </a:fillRef>
+          <a:effectRef idx="2">
+            <a:schemeClr val="accent1"/>
+          </a:effectRef>
+          <a:fontRef idx="minor">
+            <a:schemeClr val="lt1"/>
+          </a:fontRef>
+        </p:style>
+        <p:txBody>
+          <a:bodyPr rtlCol="0" anchor="ctr"/>
+          <a:lstStyle/>
+          <a:p>
+            <a:pPr algn="ctr"/>
+          </a:p>
+        </p:txBody>
+      </p:sp>
+      <p:sp>
+        <p:nvSpPr>
+          <p:cNvPr id="25" name="TextBox 24"/>
+          <p:cNvSpPr txBox="1"/>
+          <p:nvPr/>
+        </p:nvSpPr>
+        <p:spPr>
+          <a:xfrm>
+            <a:off x="8907627" y="4754880"/>
+            <a:ext cx="2468880" cy="914400"/>
+          </a:xfrm>
+          <a:prstGeom prst="rect">
+            <a:avLst/>
+          </a:prstGeom>
+          <a:noFill/>
+        </p:spPr>
+        <p:txBody>
+          <a:bodyPr wrap="square" tIns="25400" bIns="25400" lIns="25400" rIns="25400" anchor="t">
+            <a:spAutoFit/>
+          </a:bodyPr>
+          <a:lstStyle/>
+          <a:p>
+            <a:pPr algn="ctr"/>
+            <a:r>
+              <a:rPr sz="1400" b="0" i="0">
+                <a:solidFill>
+                  <a:srgbClr val="1F2937"/>
+                </a:solidFill>
+                <a:latin typeface="Inter"/>
+              </a:rPr>
+              <a:t>Support when it's needed</a:t>
+            </a:r>
+          </a:p>
+        </p:txBody>
+      </p:sp>
+      <p:sp>
+        <p:nvSpPr>
+          <p:cNvPr id="26" name="Rectangle 25"/>
           <p:cNvSpPr/>
           <p:nvPr/>
         </p:nvSpPr>
@@ -3624,7 +7110,7 @@
       </p:sp>
       <p:sp>
         <p:nvSpPr>
-          <p:cNvPr id="8" name="TextBox 7"/>
+          <p:cNvPr id="27" name="TextBox 26"/>
           <p:cNvSpPr txBox="1"/>
           <p:nvPr/>
         </p:nvSpPr>
@@ -3646,7 +7132,7 @@
           <a:p>
             <a:pPr algn="l"/>
             <a:r>
-              <a:rPr sz="900" b="1">
+              <a:rPr sz="900" b="1" i="0">
                 <a:solidFill>
                   <a:srgbClr val="0284C7"/>
                 </a:solidFill>
@@ -3659,7 +7145,7 @@
       </p:sp>
       <p:sp>
         <p:nvSpPr>
-          <p:cNvPr id="9" name="TextBox 8"/>
+          <p:cNvPr id="28" name="TextBox 27"/>
           <p:cNvSpPr txBox="1"/>
           <p:nvPr/>
         </p:nvSpPr>
@@ -3681,13 +7167,13 @@
           <a:p>
             <a:pPr algn="r"/>
             <a:r>
-              <a:rPr sz="900" b="0">
+              <a:rPr sz="900" b="0" i="0">
                 <a:solidFill>
                   <a:srgbClr val="64748B"/>
                 </a:solidFill>
                 <a:latin typeface="Inter"/>
               </a:rPr>
-              <a:t>2 / 8</a:t>
+              <a:t>2 / 12</a:t>
             </a:r>
           </a:p>
         </p:txBody>
@@ -3725,7 +7211,7 @@
             <a:avLst/>
           </a:prstGeom>
           <a:solidFill>
-            <a:srgbClr val="FFFFFF"/>
+            <a:srgbClr val="F0F9FF"/>
           </a:solidFill>
           <a:ln>
             <a:noFill/>
@@ -3762,8 +7248,8 @@
         </p:nvSpPr>
         <p:spPr>
           <a:xfrm>
-            <a:off x="914400" y="914400"/>
-            <a:ext cx="548640" cy="44450"/>
+            <a:off x="0" y="3108960"/>
+            <a:ext cx="12191695" cy="36576"/>
           </a:xfrm>
           <a:prstGeom prst="rect">
             <a:avLst/>
@@ -3774,6 +7260,7 @@
           <a:ln>
             <a:noFill/>
           </a:ln>
+          <a:effectLst/>
         </p:spPr>
         <p:style>
           <a:lnRef idx="1">
@@ -3805,8 +7292,8 @@
         </p:nvSpPr>
         <p:spPr>
           <a:xfrm>
-            <a:off x="914400" y="1051560"/>
-            <a:ext cx="9144000" cy="731520"/>
+            <a:off x="914400" y="2377440"/>
+            <a:ext cx="10058400" cy="365760"/>
           </a:xfrm>
           <a:prstGeom prst="rect">
             <a:avLst/>
@@ -3821,27 +7308,62 @@
           <a:p>
             <a:pPr algn="l"/>
             <a:r>
-              <a:rPr sz="3200" b="1">
+              <a:rPr sz="1400" b="1" i="0">
+                <a:solidFill>
+                  <a:srgbClr val="14B8A6"/>
+                </a:solidFill>
+                <a:latin typeface="Space Grotesk"/>
+              </a:rPr>
+              <a:t>SECTION 01</a:t>
+            </a:r>
+          </a:p>
+        </p:txBody>
+      </p:sp>
+      <p:sp>
+        <p:nvSpPr>
+          <p:cNvPr id="5" name="TextBox 4"/>
+          <p:cNvSpPr txBox="1"/>
+          <p:nvPr/>
+        </p:nvSpPr>
+        <p:spPr>
+          <a:xfrm>
+            <a:off x="914400" y="3291840"/>
+            <a:ext cx="10058400" cy="1371600"/>
+          </a:xfrm>
+          <a:prstGeom prst="rect">
+            <a:avLst/>
+          </a:prstGeom>
+          <a:noFill/>
+        </p:spPr>
+        <p:txBody>
+          <a:bodyPr wrap="square" tIns="25400" bIns="25400" lIns="25400" rIns="25400" anchor="t">
+            <a:spAutoFit/>
+          </a:bodyPr>
+          <a:lstStyle/>
+          <a:p>
+            <a:pPr algn="l"/>
+            <a:r>
+              <a:rPr sz="4400" b="1" i="0">
                 <a:solidFill>
                   <a:srgbClr val="0C1A2E"/>
                 </a:solidFill>
                 <a:latin typeface="Space Grotesk"/>
               </a:rPr>
-              <a:t>Slide title</a:t>
-            </a:r>
-          </a:p>
-        </p:txBody>
-      </p:sp>
-      <p:sp>
-        <p:nvSpPr>
-          <p:cNvPr id="5" name="TextBox 4"/>
-          <p:cNvSpPr txBox="1"/>
-          <p:nvPr/>
-        </p:nvSpPr>
-        <p:spPr>
-          <a:xfrm>
-            <a:off x="914400" y="1783080"/>
-            <a:ext cx="10058400" cy="365760"/>
+              <a:t>Section title</a:t>
+            </a:r>
+          </a:p>
+        </p:txBody>
+      </p:sp>
+      <p:sp>
+        <p:nvSpPr>
+          <p:cNvPr id="6" name="TextBox 5"/>
+          <p:cNvSpPr txBox="1"/>
+          <p:nvPr/>
+        </p:nvSpPr>
+        <p:spPr>
+          <a:xfrm>
+            <a:off x="914400" y="4389120"/>
+            <a:ext cx="10058400" cy="457200"/>
           </a:xfrm>
           <a:prstGeom prst="rect">
             <a:avLst/>
@@ -3856,116 +7378,13 @@
           <a:p>
             <a:pPr algn="l"/>
             <a:r>
-              <a:rPr sz="1600" b="0">
-                <a:solidFill>
-                  <a:srgbClr val="64748B"/>
+              <a:rPr sz="1800" b="0" i="0">
+                <a:solidFill>
+                  <a:srgbClr val="1F2937"/>
                 </a:solidFill>
                 <a:latin typeface="Inter"/>
               </a:rPr>
-              <a:t>Short supporting sentence under the title.</a:t>
-            </a:r>
-          </a:p>
-        </p:txBody>
-      </p:sp>
-      <p:sp>
-        <p:nvSpPr>
-          <p:cNvPr id="6" name="TextBox 5"/>
-          <p:cNvSpPr txBox="1"/>
-          <p:nvPr/>
-        </p:nvSpPr>
-        <p:spPr>
-          <a:xfrm>
-            <a:off x="914400" y="2560320"/>
-            <a:ext cx="10332720" cy="3657600"/>
-          </a:xfrm>
-          <a:prstGeom prst="rect">
-            <a:avLst/>
-          </a:prstGeom>
-          <a:noFill/>
-        </p:spPr>
-        <p:txBody>
-          <a:bodyPr wrap="square">
-            <a:spAutoFit/>
-          </a:bodyPr>
-          <a:lstStyle/>
-          <a:p>
-            <a:pPr algn="l" marL="342900" indent="-342900">
-              <a:buChar char="•"/>
-              <a:spcAft>
-                <a:spcPts val="1400"/>
-              </a:spcAft>
-              <a:buClr>
-                <a:srgbClr val="0284C7"/>
-              </a:buClr>
-            </a:pPr>
-            <a:r>
-              <a:rPr sz="2000">
-                <a:solidFill>
-                  <a:srgbClr val="0C1A2E"/>
-                </a:solidFill>
-                <a:latin typeface="Inter"/>
-              </a:rPr>
-              <a:t>Headline statement that owns the point</a:t>
-            </a:r>
-          </a:p>
-          <a:p>
-            <a:pPr algn="l" marL="342900" indent="-342900">
-              <a:buChar char="•"/>
-              <a:spcAft>
-                <a:spcPts val="1400"/>
-              </a:spcAft>
-              <a:buClr>
-                <a:srgbClr val="0284C7"/>
-              </a:buClr>
-            </a:pPr>
-            <a:r>
-              <a:rPr sz="2000">
-                <a:solidFill>
-                  <a:srgbClr val="0C1A2E"/>
-                </a:solidFill>
-                <a:latin typeface="Inter"/>
-              </a:rPr>
-              <a:t>Secondary supporting evidence with a number</a:t>
-            </a:r>
-          </a:p>
-          <a:p>
-            <a:pPr algn="l" marL="342900" indent="-342900">
-              <a:buChar char="•"/>
-              <a:spcAft>
-                <a:spcPts val="1400"/>
-              </a:spcAft>
-              <a:buClr>
-                <a:srgbClr val="0284C7"/>
-              </a:buClr>
-            </a:pPr>
-            <a:r>
-              <a:rPr sz="2000">
-                <a:solidFill>
-                  <a:srgbClr val="0C1A2E"/>
-                </a:solidFill>
-                <a:latin typeface="Inter"/>
-              </a:rPr>
-              <a:t>Third point that earns its space</a:t>
-            </a:r>
-          </a:p>
-          <a:p>
-            <a:pPr algn="l" marL="342900" indent="-342900">
-              <a:buChar char="•"/>
-              <a:spcAft>
-                <a:spcPts val="1400"/>
-              </a:spcAft>
-              <a:buClr>
-                <a:srgbClr val="0284C7"/>
-              </a:buClr>
-            </a:pPr>
-            <a:r>
-              <a:rPr sz="2000">
-                <a:solidFill>
-                  <a:srgbClr val="0C1A2E"/>
-                </a:solidFill>
-                <a:latin typeface="Inter"/>
-              </a:rPr>
-              <a:t>Fourth point only if it survives the cut</a:t>
+              <a:t>Short framing sentence that primes the audience for what follows.</a:t>
             </a:r>
           </a:p>
         </p:txBody>
@@ -4038,7 +7457,7 @@
           <a:p>
             <a:pPr algn="l"/>
             <a:r>
-              <a:rPr sz="900" b="1">
+              <a:rPr sz="900" b="1" i="0">
                 <a:solidFill>
                   <a:srgbClr val="0284C7"/>
                 </a:solidFill>
@@ -4073,13 +7492,13 @@
           <a:p>
             <a:pPr algn="r"/>
             <a:r>
-              <a:rPr sz="900" b="0">
+              <a:rPr sz="900" b="0" i="0">
                 <a:solidFill>
                   <a:srgbClr val="64748B"/>
                 </a:solidFill>
                 <a:latin typeface="Inter"/>
               </a:rPr>
-              <a:t>3 / 8</a:t>
+              <a:t>3 / 12</a:t>
             </a:r>
           </a:p>
         </p:txBody>
@@ -4198,7 +7617,7 @@
         <p:spPr>
           <a:xfrm>
             <a:off x="914400" y="1051560"/>
-            <a:ext cx="10058400" cy="640080"/>
+            <a:ext cx="9144000" cy="731520"/>
           </a:xfrm>
           <a:prstGeom prst="rect">
             <a:avLst/>
@@ -4213,13 +7632,13 @@
           <a:p>
             <a:pPr algn="l"/>
             <a:r>
-              <a:rPr sz="3200" b="1">
+              <a:rPr sz="3200" b="1" i="0">
                 <a:solidFill>
                   <a:srgbClr val="0C1A2E"/>
                 </a:solidFill>
                 <a:latin typeface="Space Grotesk"/>
               </a:rPr>
-              <a:t>Two-column comparison</a:t>
+              <a:t>Slide title</a:t>
             </a:r>
           </a:p>
         </p:txBody>
@@ -4232,7 +7651,7 @@
         </p:nvSpPr>
         <p:spPr>
           <a:xfrm>
-            <a:off x="914400" y="1691640"/>
+            <a:off x="914400" y="1783080"/>
             <a:ext cx="10058400" cy="365760"/>
           </a:xfrm>
           <a:prstGeom prst="rect">
@@ -4248,406 +7667,124 @@
           <a:p>
             <a:pPr algn="l"/>
             <a:r>
-              <a:rPr sz="1600" b="0">
+              <a:rPr sz="1600" b="0" i="0">
                 <a:solidFill>
                   <a:srgbClr val="64748B"/>
                 </a:solidFill>
                 <a:latin typeface="Inter"/>
               </a:rPr>
-              <a:t>Use this slide when the choice is binary.</a:t>
-            </a:r>
-          </a:p>
-        </p:txBody>
-      </p:sp>
-      <p:sp>
-        <p:nvSpPr>
-          <p:cNvPr id="6" name="Rectangle 5"/>
-          <p:cNvSpPr/>
-          <p:nvPr/>
-        </p:nvSpPr>
-        <p:spPr>
-          <a:xfrm>
-            <a:off x="914400" y="2468880"/>
-            <a:ext cx="5120640" cy="3840480"/>
-          </a:xfrm>
-          <a:prstGeom prst="rect">
-            <a:avLst/>
-          </a:prstGeom>
-          <a:solidFill>
-            <a:srgbClr val="F0F9FF"/>
-          </a:solidFill>
-          <a:ln>
-            <a:noFill/>
-          </a:ln>
-          <a:effectLst/>
-        </p:spPr>
-        <p:style>
-          <a:lnRef idx="1">
-            <a:schemeClr val="accent1"/>
-          </a:lnRef>
-          <a:fillRef idx="3">
-            <a:schemeClr val="accent1"/>
-          </a:fillRef>
-          <a:effectRef idx="2">
-            <a:schemeClr val="accent1"/>
-          </a:effectRef>
-          <a:fontRef idx="minor">
-            <a:schemeClr val="lt1"/>
-          </a:fontRef>
-        </p:style>
-        <p:txBody>
-          <a:bodyPr rtlCol="0" anchor="ctr"/>
-          <a:lstStyle/>
-          <a:p>
-            <a:pPr algn="ctr"/>
+              <a:t>Short supporting sentence under the title.</a:t>
+            </a:r>
+          </a:p>
+        </p:txBody>
+      </p:sp>
+      <p:sp>
+        <p:nvSpPr>
+          <p:cNvPr id="6" name="TextBox 5"/>
+          <p:cNvSpPr txBox="1"/>
+          <p:nvPr/>
+        </p:nvSpPr>
+        <p:spPr>
+          <a:xfrm>
+            <a:off x="914400" y="2560320"/>
+            <a:ext cx="10332720" cy="3657600"/>
+          </a:xfrm>
+          <a:prstGeom prst="rect">
+            <a:avLst/>
+          </a:prstGeom>
+          <a:noFill/>
+        </p:spPr>
+        <p:txBody>
+          <a:bodyPr wrap="square">
+            <a:spAutoFit/>
+          </a:bodyPr>
+          <a:lstStyle/>
+          <a:p/>
+          <a:p>
+            <a:pPr algn="l" marL="342900" indent="-342900">
+              <a:buChar char="✓"/>
+              <a:spcAft>
+                <a:spcPts val="800"/>
+              </a:spcAft>
+              <a:buClr>
+                <a:srgbClr val="0284C7"/>
+              </a:buClr>
+            </a:pPr>
+            <a:r>
+              <a:rPr sz="1800">
+                <a:solidFill>
+                  <a:srgbClr val="1F2937"/>
+                </a:solidFill>
+                <a:latin typeface="Inter"/>
+              </a:rPr>
+              <a:t>Headline statement that owns the point</a:t>
+            </a:r>
+          </a:p>
+          <a:p>
+            <a:pPr algn="l" marL="342900" indent="-342900">
+              <a:buChar char="✓"/>
+              <a:spcAft>
+                <a:spcPts val="800"/>
+              </a:spcAft>
+              <a:buClr>
+                <a:srgbClr val="0284C7"/>
+              </a:buClr>
+            </a:pPr>
+            <a:r>
+              <a:rPr sz="1800">
+                <a:solidFill>
+                  <a:srgbClr val="1F2937"/>
+                </a:solidFill>
+                <a:latin typeface="Inter"/>
+              </a:rPr>
+              <a:t>Secondary supporting evidence with a number</a:t>
+            </a:r>
+          </a:p>
+          <a:p>
+            <a:pPr algn="l" marL="342900" indent="-342900">
+              <a:buChar char="✓"/>
+              <a:spcAft>
+                <a:spcPts val="800"/>
+              </a:spcAft>
+              <a:buClr>
+                <a:srgbClr val="0284C7"/>
+              </a:buClr>
+            </a:pPr>
+            <a:r>
+              <a:rPr sz="1800">
+                <a:solidFill>
+                  <a:srgbClr val="1F2937"/>
+                </a:solidFill>
+                <a:latin typeface="Inter"/>
+              </a:rPr>
+              <a:t>Third point that earns its space</a:t>
+            </a:r>
+          </a:p>
+          <a:p>
+            <a:pPr algn="l" marL="342900" indent="-342900">
+              <a:buChar char="✓"/>
+              <a:spcAft>
+                <a:spcPts val="800"/>
+              </a:spcAft>
+              <a:buClr>
+                <a:srgbClr val="0284C7"/>
+              </a:buClr>
+            </a:pPr>
+            <a:r>
+              <a:rPr sz="1800">
+                <a:solidFill>
+                  <a:srgbClr val="1F2937"/>
+                </a:solidFill>
+                <a:latin typeface="Inter"/>
+              </a:rPr>
+              <a:t>Fourth point only if it survives the cut</a:t>
+            </a:r>
           </a:p>
         </p:txBody>
       </p:sp>
       <p:sp>
         <p:nvSpPr>
           <p:cNvPr id="7" name="Rectangle 6"/>
-          <p:cNvSpPr/>
-          <p:nvPr/>
-        </p:nvSpPr>
-        <p:spPr>
-          <a:xfrm>
-            <a:off x="914400" y="2468880"/>
-            <a:ext cx="73152" cy="3840480"/>
-          </a:xfrm>
-          <a:prstGeom prst="rect">
-            <a:avLst/>
-          </a:prstGeom>
-          <a:solidFill>
-            <a:srgbClr val="0284C7"/>
-          </a:solidFill>
-          <a:ln>
-            <a:noFill/>
-          </a:ln>
-          <a:effectLst/>
-        </p:spPr>
-        <p:style>
-          <a:lnRef idx="1">
-            <a:schemeClr val="accent1"/>
-          </a:lnRef>
-          <a:fillRef idx="3">
-            <a:schemeClr val="accent1"/>
-          </a:fillRef>
-          <a:effectRef idx="2">
-            <a:schemeClr val="accent1"/>
-          </a:effectRef>
-          <a:fontRef idx="minor">
-            <a:schemeClr val="lt1"/>
-          </a:fontRef>
-        </p:style>
-        <p:txBody>
-          <a:bodyPr rtlCol="0" anchor="ctr"/>
-          <a:lstStyle/>
-          <a:p>
-            <a:pPr algn="ctr"/>
-          </a:p>
-        </p:txBody>
-      </p:sp>
-      <p:sp>
-        <p:nvSpPr>
-          <p:cNvPr id="8" name="TextBox 7"/>
-          <p:cNvSpPr txBox="1"/>
-          <p:nvPr/>
-        </p:nvSpPr>
-        <p:spPr>
-          <a:xfrm>
-            <a:off x="1188720" y="2743200"/>
-            <a:ext cx="4663440" cy="457200"/>
-          </a:xfrm>
-          <a:prstGeom prst="rect">
-            <a:avLst/>
-          </a:prstGeom>
-          <a:noFill/>
-        </p:spPr>
-        <p:txBody>
-          <a:bodyPr wrap="square" tIns="25400" bIns="25400" lIns="25400" rIns="25400" anchor="t">
-            <a:spAutoFit/>
-          </a:bodyPr>
-          <a:lstStyle/>
-          <a:p>
-            <a:pPr algn="l"/>
-            <a:r>
-              <a:rPr sz="1200" b="1">
-                <a:solidFill>
-                  <a:srgbClr val="0284C7"/>
-                </a:solidFill>
-                <a:latin typeface="Space Grotesk"/>
-              </a:rPr>
-              <a:t>OPTION A</a:t>
-            </a:r>
-          </a:p>
-        </p:txBody>
-      </p:sp>
-      <p:sp>
-        <p:nvSpPr>
-          <p:cNvPr id="9" name="TextBox 8"/>
-          <p:cNvSpPr txBox="1"/>
-          <p:nvPr/>
-        </p:nvSpPr>
-        <p:spPr>
-          <a:xfrm>
-            <a:off x="1188720" y="3154680"/>
-            <a:ext cx="4663440" cy="640080"/>
-          </a:xfrm>
-          <a:prstGeom prst="rect">
-            <a:avLst/>
-          </a:prstGeom>
-          <a:noFill/>
-        </p:spPr>
-        <p:txBody>
-          <a:bodyPr wrap="square" tIns="25400" bIns="25400" lIns="25400" rIns="25400" anchor="t">
-            <a:spAutoFit/>
-          </a:bodyPr>
-          <a:lstStyle/>
-          <a:p>
-            <a:pPr algn="l"/>
-            <a:r>
-              <a:rPr sz="2200" b="1">
-                <a:solidFill>
-                  <a:srgbClr val="0C1A2E"/>
-                </a:solidFill>
-                <a:latin typeface="Space Grotesk"/>
-              </a:rPr>
-              <a:t>Headline takeaway</a:t>
-            </a:r>
-          </a:p>
-        </p:txBody>
-      </p:sp>
-      <p:sp>
-        <p:nvSpPr>
-          <p:cNvPr id="10" name="TextBox 9"/>
-          <p:cNvSpPr txBox="1"/>
-          <p:nvPr/>
-        </p:nvSpPr>
-        <p:spPr>
-          <a:xfrm>
-            <a:off x="1188720" y="4023360"/>
-            <a:ext cx="4663440" cy="2011680"/>
-          </a:xfrm>
-          <a:prstGeom prst="rect">
-            <a:avLst/>
-          </a:prstGeom>
-          <a:noFill/>
-        </p:spPr>
-        <p:txBody>
-          <a:bodyPr wrap="square" tIns="25400" bIns="25400" lIns="25400" rIns="25400" anchor="t">
-            <a:spAutoFit/>
-          </a:bodyPr>
-          <a:lstStyle/>
-          <a:p>
-            <a:pPr algn="l"/>
-            <a:r>
-              <a:rPr sz="1400" b="0">
-                <a:solidFill>
-                  <a:srgbClr val="1F2937"/>
-                </a:solidFill>
-                <a:latin typeface="Inter"/>
-              </a:rPr>
-              <a:t>Three to five short lines describing this option, its strengths, its trade-offs, and the named tool or framework you would use to deliver it.</a:t>
-            </a:r>
-          </a:p>
-        </p:txBody>
-      </p:sp>
-      <p:sp>
-        <p:nvSpPr>
-          <p:cNvPr id="11" name="Rectangle 10"/>
-          <p:cNvSpPr/>
-          <p:nvPr/>
-        </p:nvSpPr>
-        <p:spPr>
-          <a:xfrm>
-            <a:off x="6126480" y="2468880"/>
-            <a:ext cx="5120640" cy="3840480"/>
-          </a:xfrm>
-          <a:prstGeom prst="rect">
-            <a:avLst/>
-          </a:prstGeom>
-          <a:solidFill>
-            <a:srgbClr val="F8FAFC"/>
-          </a:solidFill>
-          <a:ln>
-            <a:noFill/>
-          </a:ln>
-          <a:effectLst/>
-        </p:spPr>
-        <p:style>
-          <a:lnRef idx="1">
-            <a:schemeClr val="accent1"/>
-          </a:lnRef>
-          <a:fillRef idx="3">
-            <a:schemeClr val="accent1"/>
-          </a:fillRef>
-          <a:effectRef idx="2">
-            <a:schemeClr val="accent1"/>
-          </a:effectRef>
-          <a:fontRef idx="minor">
-            <a:schemeClr val="lt1"/>
-          </a:fontRef>
-        </p:style>
-        <p:txBody>
-          <a:bodyPr rtlCol="0" anchor="ctr"/>
-          <a:lstStyle/>
-          <a:p>
-            <a:pPr algn="ctr"/>
-          </a:p>
-        </p:txBody>
-      </p:sp>
-      <p:sp>
-        <p:nvSpPr>
-          <p:cNvPr id="12" name="Rectangle 11"/>
-          <p:cNvSpPr/>
-          <p:nvPr/>
-        </p:nvSpPr>
-        <p:spPr>
-          <a:xfrm>
-            <a:off x="6126480" y="2468880"/>
-            <a:ext cx="73152" cy="3840480"/>
-          </a:xfrm>
-          <a:prstGeom prst="rect">
-            <a:avLst/>
-          </a:prstGeom>
-          <a:solidFill>
-            <a:srgbClr val="14B8A6"/>
-          </a:solidFill>
-          <a:ln>
-            <a:noFill/>
-          </a:ln>
-          <a:effectLst/>
-        </p:spPr>
-        <p:style>
-          <a:lnRef idx="1">
-            <a:schemeClr val="accent1"/>
-          </a:lnRef>
-          <a:fillRef idx="3">
-            <a:schemeClr val="accent1"/>
-          </a:fillRef>
-          <a:effectRef idx="2">
-            <a:schemeClr val="accent1"/>
-          </a:effectRef>
-          <a:fontRef idx="minor">
-            <a:schemeClr val="lt1"/>
-          </a:fontRef>
-        </p:style>
-        <p:txBody>
-          <a:bodyPr rtlCol="0" anchor="ctr"/>
-          <a:lstStyle/>
-          <a:p>
-            <a:pPr algn="ctr"/>
-          </a:p>
-        </p:txBody>
-      </p:sp>
-      <p:sp>
-        <p:nvSpPr>
-          <p:cNvPr id="13" name="TextBox 12"/>
-          <p:cNvSpPr txBox="1"/>
-          <p:nvPr/>
-        </p:nvSpPr>
-        <p:spPr>
-          <a:xfrm>
-            <a:off x="6400800" y="2743200"/>
-            <a:ext cx="4663440" cy="457200"/>
-          </a:xfrm>
-          <a:prstGeom prst="rect">
-            <a:avLst/>
-          </a:prstGeom>
-          <a:noFill/>
-        </p:spPr>
-        <p:txBody>
-          <a:bodyPr wrap="square" tIns="25400" bIns="25400" lIns="25400" rIns="25400" anchor="t">
-            <a:spAutoFit/>
-          </a:bodyPr>
-          <a:lstStyle/>
-          <a:p>
-            <a:pPr algn="l"/>
-            <a:r>
-              <a:rPr sz="1200" b="1">
-                <a:solidFill>
-                  <a:srgbClr val="14B8A6"/>
-                </a:solidFill>
-                <a:latin typeface="Space Grotesk"/>
-              </a:rPr>
-              <a:t>OPTION B</a:t>
-            </a:r>
-          </a:p>
-        </p:txBody>
-      </p:sp>
-      <p:sp>
-        <p:nvSpPr>
-          <p:cNvPr id="14" name="TextBox 13"/>
-          <p:cNvSpPr txBox="1"/>
-          <p:nvPr/>
-        </p:nvSpPr>
-        <p:spPr>
-          <a:xfrm>
-            <a:off x="6400800" y="3154680"/>
-            <a:ext cx="4663440" cy="640080"/>
-          </a:xfrm>
-          <a:prstGeom prst="rect">
-            <a:avLst/>
-          </a:prstGeom>
-          <a:noFill/>
-        </p:spPr>
-        <p:txBody>
-          <a:bodyPr wrap="square" tIns="25400" bIns="25400" lIns="25400" rIns="25400" anchor="t">
-            <a:spAutoFit/>
-          </a:bodyPr>
-          <a:lstStyle/>
-          <a:p>
-            <a:pPr algn="l"/>
-            <a:r>
-              <a:rPr sz="2200" b="1">
-                <a:solidFill>
-                  <a:srgbClr val="0C1A2E"/>
-                </a:solidFill>
-                <a:latin typeface="Space Grotesk"/>
-              </a:rPr>
-              <a:t>Headline takeaway</a:t>
-            </a:r>
-          </a:p>
-        </p:txBody>
-      </p:sp>
-      <p:sp>
-        <p:nvSpPr>
-          <p:cNvPr id="15" name="TextBox 14"/>
-          <p:cNvSpPr txBox="1"/>
-          <p:nvPr/>
-        </p:nvSpPr>
-        <p:spPr>
-          <a:xfrm>
-            <a:off x="6400800" y="4023360"/>
-            <a:ext cx="4663440" cy="2011680"/>
-          </a:xfrm>
-          <a:prstGeom prst="rect">
-            <a:avLst/>
-          </a:prstGeom>
-          <a:noFill/>
-        </p:spPr>
-        <p:txBody>
-          <a:bodyPr wrap="square" tIns="25400" bIns="25400" lIns="25400" rIns="25400" anchor="t">
-            <a:spAutoFit/>
-          </a:bodyPr>
-          <a:lstStyle/>
-          <a:p>
-            <a:pPr algn="l"/>
-            <a:r>
-              <a:rPr sz="1400" b="0">
-                <a:solidFill>
-                  <a:srgbClr val="1F2937"/>
-                </a:solidFill>
-                <a:latin typeface="Inter"/>
-              </a:rPr>
-              <a:t>Three to five short lines describing this option, its strengths, its trade-offs, and the named tool or framework you would use to deliver it.</a:t>
-            </a:r>
-          </a:p>
-        </p:txBody>
-      </p:sp>
-      <p:sp>
-        <p:nvSpPr>
-          <p:cNvPr id="16" name="Rectangle 15"/>
           <p:cNvSpPr/>
           <p:nvPr/>
         </p:nvSpPr>
@@ -4691,7 +7828,7 @@
       </p:sp>
       <p:sp>
         <p:nvSpPr>
-          <p:cNvPr id="17" name="TextBox 16"/>
+          <p:cNvPr id="8" name="TextBox 7"/>
           <p:cNvSpPr txBox="1"/>
           <p:nvPr/>
         </p:nvSpPr>
@@ -4713,7 +7850,7 @@
           <a:p>
             <a:pPr algn="l"/>
             <a:r>
-              <a:rPr sz="900" b="1">
+              <a:rPr sz="900" b="1" i="0">
                 <a:solidFill>
                   <a:srgbClr val="0284C7"/>
                 </a:solidFill>
@@ -4726,7 +7863,7 @@
       </p:sp>
       <p:sp>
         <p:nvSpPr>
-          <p:cNvPr id="18" name="TextBox 17"/>
+          <p:cNvPr id="9" name="TextBox 8"/>
           <p:cNvSpPr txBox="1"/>
           <p:nvPr/>
         </p:nvSpPr>
@@ -4748,13 +7885,13 @@
           <a:p>
             <a:pPr algn="r"/>
             <a:r>
-              <a:rPr sz="900" b="0">
+              <a:rPr sz="900" b="0" i="0">
                 <a:solidFill>
                   <a:srgbClr val="64748B"/>
                 </a:solidFill>
                 <a:latin typeface="Inter"/>
               </a:rPr>
-              <a:t>4 / 8</a:t>
+              <a:t>4 / 12</a:t>
             </a:r>
           </a:p>
         </p:txBody>
@@ -4792,7 +7929,7 @@
             <a:avLst/>
           </a:prstGeom>
           <a:solidFill>
-            <a:srgbClr val="0C1A2E"/>
+            <a:srgbClr val="FFFFFF"/>
           </a:solidFill>
           <a:ln>
             <a:noFill/>
@@ -4829,8 +7966,8 @@
         </p:nvSpPr>
         <p:spPr>
           <a:xfrm>
-            <a:off x="914400" y="914400"/>
-            <a:ext cx="10058400" cy="457200"/>
+            <a:off x="914400" y="640080"/>
+            <a:ext cx="10332720" cy="640080"/>
           </a:xfrm>
           <a:prstGeom prst="rect">
             <a:avLst/>
@@ -4843,15 +7980,15 @@
           </a:bodyPr>
           <a:lstStyle/>
           <a:p>
-            <a:pPr algn="l"/>
-            <a:r>
-              <a:rPr sz="1400" b="1">
-                <a:solidFill>
-                  <a:srgbClr val="0284C7"/>
+            <a:pPr algn="ctr"/>
+            <a:r>
+              <a:rPr sz="3200" b="1" i="0">
+                <a:solidFill>
+                  <a:srgbClr val="0C1A2E"/>
                 </a:solidFill>
                 <a:latin typeface="Space Grotesk"/>
               </a:rPr>
-              <a:t>THE NUMBER THAT MATTERS</a:t>
+              <a:t>Our Services</a:t>
             </a:r>
           </a:p>
         </p:txBody>
@@ -4864,8 +8001,8 @@
         </p:nvSpPr>
         <p:spPr>
           <a:xfrm>
-            <a:off x="914400" y="1645920"/>
-            <a:ext cx="10058400" cy="2560320"/>
+            <a:off x="914400" y="1280160"/>
+            <a:ext cx="10332720" cy="457200"/>
           </a:xfrm>
           <a:prstGeom prst="rect">
             <a:avLst/>
@@ -4878,35 +8015,85 @@
           </a:bodyPr>
           <a:lstStyle/>
           <a:p>
-            <a:pPr algn="l"/>
-            <a:r>
-              <a:rPr sz="17000" b="1">
-                <a:solidFill>
-                  <a:srgbClr val="FFFFFF"/>
-                </a:solidFill>
-                <a:latin typeface="Space Grotesk"/>
-              </a:rPr>
-              <a:t>527%</a:t>
-            </a:r>
-          </a:p>
-        </p:txBody>
-      </p:sp>
-      <p:sp>
-        <p:nvSpPr>
-          <p:cNvPr id="5" name="Rectangle 4"/>
+            <a:pPr algn="ctr"/>
+            <a:r>
+              <a:rPr sz="1400" b="0" i="0">
+                <a:solidFill>
+                  <a:srgbClr val="64748B"/>
+                </a:solidFill>
+                <a:latin typeface="Inter"/>
+              </a:rPr>
+              <a:t>Comprehensive solutions designed to help your business thrive in today's competitive landscape.</a:t>
+            </a:r>
+          </a:p>
+        </p:txBody>
+      </p:sp>
+      <p:sp>
+        <p:nvSpPr>
+          <p:cNvPr id="5" name="Rounded Rectangle 4"/>
           <p:cNvSpPr/>
           <p:nvPr/>
         </p:nvSpPr>
         <p:spPr>
           <a:xfrm>
-            <a:off x="914400" y="4297680"/>
-            <a:ext cx="548640" cy="50800"/>
-          </a:xfrm>
-          <a:prstGeom prst="rect">
-            <a:avLst/>
+            <a:off x="609447" y="2194560"/>
+            <a:ext cx="2606040" cy="4114800"/>
+          </a:xfrm>
+          <a:prstGeom prst="roundRect">
+            <a:avLst>
+              <a:gd name="adj" fmla="val 5000"/>
+            </a:avLst>
           </a:prstGeom>
           <a:solidFill>
-            <a:srgbClr val="14B8A6"/>
+            <a:srgbClr val="FFFFFF"/>
+          </a:solidFill>
+          <a:ln w="9525">
+            <a:solidFill>
+              <a:srgbClr val="E2E8F0"/>
+            </a:solidFill>
+          </a:ln>
+          <a:effectLst/>
+        </p:spPr>
+        <p:style>
+          <a:lnRef idx="1">
+            <a:schemeClr val="accent1"/>
+          </a:lnRef>
+          <a:fillRef idx="3">
+            <a:schemeClr val="accent1"/>
+          </a:fillRef>
+          <a:effectRef idx="2">
+            <a:schemeClr val="accent1"/>
+          </a:effectRef>
+          <a:fontRef idx="minor">
+            <a:schemeClr val="lt1"/>
+          </a:fontRef>
+        </p:style>
+        <p:txBody>
+          <a:bodyPr rtlCol="0" anchor="ctr"/>
+          <a:lstStyle/>
+          <a:p>
+            <a:pPr algn="ctr"/>
+          </a:p>
+        </p:txBody>
+      </p:sp>
+      <p:sp>
+        <p:nvSpPr>
+          <p:cNvPr id="6" name="Rounded Rectangle 5"/>
+          <p:cNvSpPr/>
+          <p:nvPr/>
+        </p:nvSpPr>
+        <p:spPr>
+          <a:xfrm>
+            <a:off x="883767" y="2468880"/>
+            <a:ext cx="502920" cy="502920"/>
+          </a:xfrm>
+          <a:prstGeom prst="roundRect">
+            <a:avLst>
+              <a:gd name="adj" fmla="val 50000"/>
+            </a:avLst>
+          </a:prstGeom>
+          <a:solidFill>
+            <a:srgbClr val="E0F2FE"/>
           </a:solidFill>
           <a:ln>
             <a:noFill/>
@@ -4937,14 +8124,49 @@
       </p:sp>
       <p:sp>
         <p:nvSpPr>
-          <p:cNvPr id="6" name="TextBox 5"/>
-          <p:cNvSpPr txBox="1"/>
-          <p:nvPr/>
-        </p:nvSpPr>
-        <p:spPr>
-          <a:xfrm>
-            <a:off x="914400" y="4434840"/>
-            <a:ext cx="10058400" cy="640080"/>
+          <p:cNvPr id="7" name="TextBox 6"/>
+          <p:cNvSpPr txBox="1"/>
+          <p:nvPr/>
+        </p:nvSpPr>
+        <p:spPr>
+          <a:xfrm>
+            <a:off x="883767" y="2468880"/>
+            <a:ext cx="502920" cy="502920"/>
+          </a:xfrm>
+          <a:prstGeom prst="rect">
+            <a:avLst/>
+          </a:prstGeom>
+          <a:noFill/>
+        </p:spPr>
+        <p:txBody>
+          <a:bodyPr wrap="square" tIns="25400" bIns="25400" lIns="25400" rIns="25400" anchor="ctr">
+            <a:spAutoFit/>
+          </a:bodyPr>
+          <a:lstStyle/>
+          <a:p>
+            <a:pPr algn="ctr"/>
+            <a:r>
+              <a:rPr sz="1400" b="1" i="0">
+                <a:solidFill>
+                  <a:srgbClr val="0284C7"/>
+                </a:solidFill>
+                <a:latin typeface="Space Grotesk"/>
+              </a:rPr>
+              <a:t>▶</a:t>
+            </a:r>
+          </a:p>
+        </p:txBody>
+      </p:sp>
+      <p:sp>
+        <p:nvSpPr>
+          <p:cNvPr id="8" name="TextBox 7"/>
+          <p:cNvSpPr txBox="1"/>
+          <p:nvPr/>
+        </p:nvSpPr>
+        <p:spPr>
+          <a:xfrm>
+            <a:off x="838047" y="3154680"/>
+            <a:ext cx="2148840" cy="640080"/>
           </a:xfrm>
           <a:prstGeom prst="rect">
             <a:avLst/>
@@ -4959,27 +8181,27 @@
           <a:p>
             <a:pPr algn="l"/>
             <a:r>
-              <a:rPr sz="2600" b="0">
-                <a:solidFill>
-                  <a:srgbClr val="FFFFFF"/>
+              <a:rPr sz="1500" b="1" i="0">
+                <a:solidFill>
+                  <a:srgbClr val="0C1A2E"/>
                 </a:solidFill>
                 <a:latin typeface="Space Grotesk"/>
               </a:rPr>
-              <a:t>Year-over-year growth in AI-referred sessions</a:t>
-            </a:r>
-          </a:p>
-        </p:txBody>
-      </p:sp>
-      <p:sp>
-        <p:nvSpPr>
-          <p:cNvPr id="7" name="TextBox 6"/>
-          <p:cNvSpPr txBox="1"/>
-          <p:nvPr/>
-        </p:nvSpPr>
-        <p:spPr>
-          <a:xfrm>
-            <a:off x="914400" y="5212080"/>
-            <a:ext cx="10058400" cy="457200"/>
+              <a:t>Strategic Consulting</a:t>
+            </a:r>
+          </a:p>
+        </p:txBody>
+      </p:sp>
+      <p:sp>
+        <p:nvSpPr>
+          <p:cNvPr id="9" name="TextBox 8"/>
+          <p:cNvSpPr txBox="1"/>
+          <p:nvPr/>
+        </p:nvSpPr>
+        <p:spPr>
+          <a:xfrm>
+            <a:off x="838047" y="3703320"/>
+            <a:ext cx="2148840" cy="1280160"/>
           </a:xfrm>
           <a:prstGeom prst="rect">
             <a:avLst/>
@@ -4994,20 +8216,953 @@
           <a:p>
             <a:pPr algn="l"/>
             <a:r>
-              <a:rPr sz="1400" b="0">
+              <a:rPr sz="1100" b="0" i="0">
                 <a:solidFill>
                   <a:srgbClr val="64748B"/>
                 </a:solidFill>
                 <a:latin typeface="Inter"/>
               </a:rPr>
-              <a:t>Source: Frase, January 2026</a:t>
-            </a:r>
-          </a:p>
-        </p:txBody>
-      </p:sp>
-      <p:sp>
-        <p:nvSpPr>
-          <p:cNvPr id="8" name="Rectangle 7"/>
+              <a:t>Tailored growth strategies to help your business reach its full potential.</a:t>
+            </a:r>
+          </a:p>
+        </p:txBody>
+      </p:sp>
+      <p:sp>
+        <p:nvSpPr>
+          <p:cNvPr id="10" name="TextBox 9"/>
+          <p:cNvSpPr txBox="1"/>
+          <p:nvPr/>
+        </p:nvSpPr>
+        <p:spPr>
+          <a:xfrm>
+            <a:off x="838047" y="4937760"/>
+            <a:ext cx="2148840" cy="1280160"/>
+          </a:xfrm>
+          <a:prstGeom prst="rect">
+            <a:avLst/>
+          </a:prstGeom>
+          <a:noFill/>
+        </p:spPr>
+        <p:txBody>
+          <a:bodyPr wrap="square">
+            <a:spAutoFit/>
+          </a:bodyPr>
+          <a:lstStyle/>
+          <a:p/>
+          <a:p>
+            <a:pPr algn="l" marL="342900" indent="-342900">
+              <a:buChar char="✓"/>
+              <a:spcAft>
+                <a:spcPts val="800"/>
+              </a:spcAft>
+              <a:buClr>
+                <a:srgbClr val="14B8A6"/>
+              </a:buClr>
+            </a:pPr>
+            <a:r>
+              <a:rPr sz="1000">
+                <a:solidFill>
+                  <a:srgbClr val="1F2937"/>
+                </a:solidFill>
+                <a:latin typeface="Inter"/>
+              </a:rPr>
+              <a:t>Custom growth plan</a:t>
+            </a:r>
+          </a:p>
+          <a:p>
+            <a:pPr algn="l" marL="342900" indent="-342900">
+              <a:buChar char="✓"/>
+              <a:spcAft>
+                <a:spcPts val="800"/>
+              </a:spcAft>
+              <a:buClr>
+                <a:srgbClr val="14B8A6"/>
+              </a:buClr>
+            </a:pPr>
+            <a:r>
+              <a:rPr sz="1000">
+                <a:solidFill>
+                  <a:srgbClr val="1F2937"/>
+                </a:solidFill>
+                <a:latin typeface="Inter"/>
+              </a:rPr>
+              <a:t>Market analysis</a:t>
+            </a:r>
+          </a:p>
+          <a:p>
+            <a:pPr algn="l" marL="342900" indent="-342900">
+              <a:buChar char="✓"/>
+              <a:spcAft>
+                <a:spcPts val="800"/>
+              </a:spcAft>
+              <a:buClr>
+                <a:srgbClr val="14B8A6"/>
+              </a:buClr>
+            </a:pPr>
+            <a:r>
+              <a:rPr sz="1000">
+                <a:solidFill>
+                  <a:srgbClr val="1F2937"/>
+                </a:solidFill>
+                <a:latin typeface="Inter"/>
+              </a:rPr>
+              <a:t>Revenue strategy</a:t>
+            </a:r>
+          </a:p>
+        </p:txBody>
+      </p:sp>
+      <p:sp>
+        <p:nvSpPr>
+          <p:cNvPr id="11" name="Rounded Rectangle 10"/>
+          <p:cNvSpPr/>
+          <p:nvPr/>
+        </p:nvSpPr>
+        <p:spPr>
+          <a:xfrm>
+            <a:off x="3398367" y="2194560"/>
+            <a:ext cx="2606040" cy="4114800"/>
+          </a:xfrm>
+          <a:prstGeom prst="roundRect">
+            <a:avLst>
+              <a:gd name="adj" fmla="val 5000"/>
+            </a:avLst>
+          </a:prstGeom>
+          <a:solidFill>
+            <a:srgbClr val="FFFFFF"/>
+          </a:solidFill>
+          <a:ln w="9525">
+            <a:solidFill>
+              <a:srgbClr val="E2E8F0"/>
+            </a:solidFill>
+          </a:ln>
+          <a:effectLst/>
+        </p:spPr>
+        <p:style>
+          <a:lnRef idx="1">
+            <a:schemeClr val="accent1"/>
+          </a:lnRef>
+          <a:fillRef idx="3">
+            <a:schemeClr val="accent1"/>
+          </a:fillRef>
+          <a:effectRef idx="2">
+            <a:schemeClr val="accent1"/>
+          </a:effectRef>
+          <a:fontRef idx="minor">
+            <a:schemeClr val="lt1"/>
+          </a:fontRef>
+        </p:style>
+        <p:txBody>
+          <a:bodyPr rtlCol="0" anchor="ctr"/>
+          <a:lstStyle/>
+          <a:p>
+            <a:pPr algn="ctr"/>
+          </a:p>
+        </p:txBody>
+      </p:sp>
+      <p:sp>
+        <p:nvSpPr>
+          <p:cNvPr id="12" name="Rounded Rectangle 11"/>
+          <p:cNvSpPr/>
+          <p:nvPr/>
+        </p:nvSpPr>
+        <p:spPr>
+          <a:xfrm>
+            <a:off x="3672687" y="2468880"/>
+            <a:ext cx="502920" cy="502920"/>
+          </a:xfrm>
+          <a:prstGeom prst="roundRect">
+            <a:avLst>
+              <a:gd name="adj" fmla="val 50000"/>
+            </a:avLst>
+          </a:prstGeom>
+          <a:solidFill>
+            <a:srgbClr val="E0F2FE"/>
+          </a:solidFill>
+          <a:ln>
+            <a:noFill/>
+          </a:ln>
+          <a:effectLst/>
+        </p:spPr>
+        <p:style>
+          <a:lnRef idx="1">
+            <a:schemeClr val="accent1"/>
+          </a:lnRef>
+          <a:fillRef idx="3">
+            <a:schemeClr val="accent1"/>
+          </a:fillRef>
+          <a:effectRef idx="2">
+            <a:schemeClr val="accent1"/>
+          </a:effectRef>
+          <a:fontRef idx="minor">
+            <a:schemeClr val="lt1"/>
+          </a:fontRef>
+        </p:style>
+        <p:txBody>
+          <a:bodyPr rtlCol="0" anchor="ctr"/>
+          <a:lstStyle/>
+          <a:p>
+            <a:pPr algn="ctr"/>
+          </a:p>
+        </p:txBody>
+      </p:sp>
+      <p:sp>
+        <p:nvSpPr>
+          <p:cNvPr id="13" name="TextBox 12"/>
+          <p:cNvSpPr txBox="1"/>
+          <p:nvPr/>
+        </p:nvSpPr>
+        <p:spPr>
+          <a:xfrm>
+            <a:off x="3672687" y="2468880"/>
+            <a:ext cx="502920" cy="502920"/>
+          </a:xfrm>
+          <a:prstGeom prst="rect">
+            <a:avLst/>
+          </a:prstGeom>
+          <a:noFill/>
+        </p:spPr>
+        <p:txBody>
+          <a:bodyPr wrap="square" tIns="25400" bIns="25400" lIns="25400" rIns="25400" anchor="ctr">
+            <a:spAutoFit/>
+          </a:bodyPr>
+          <a:lstStyle/>
+          <a:p>
+            <a:pPr algn="ctr"/>
+            <a:r>
+              <a:rPr sz="1400" b="1" i="0">
+                <a:solidFill>
+                  <a:srgbClr val="0284C7"/>
+                </a:solidFill>
+                <a:latin typeface="Space Grotesk"/>
+              </a:rPr>
+              <a:t>▶</a:t>
+            </a:r>
+          </a:p>
+        </p:txBody>
+      </p:sp>
+      <p:sp>
+        <p:nvSpPr>
+          <p:cNvPr id="14" name="TextBox 13"/>
+          <p:cNvSpPr txBox="1"/>
+          <p:nvPr/>
+        </p:nvSpPr>
+        <p:spPr>
+          <a:xfrm>
+            <a:off x="3626967" y="3154680"/>
+            <a:ext cx="2148840" cy="640080"/>
+          </a:xfrm>
+          <a:prstGeom prst="rect">
+            <a:avLst/>
+          </a:prstGeom>
+          <a:noFill/>
+        </p:spPr>
+        <p:txBody>
+          <a:bodyPr wrap="square" tIns="25400" bIns="25400" lIns="25400" rIns="25400" anchor="t">
+            <a:spAutoFit/>
+          </a:bodyPr>
+          <a:lstStyle/>
+          <a:p>
+            <a:pPr algn="l"/>
+            <a:r>
+              <a:rPr sz="1500" b="1" i="0">
+                <a:solidFill>
+                  <a:srgbClr val="0C1A2E"/>
+                </a:solidFill>
+                <a:latin typeface="Space Grotesk"/>
+              </a:rPr>
+              <a:t>Performance Marketing</a:t>
+            </a:r>
+          </a:p>
+        </p:txBody>
+      </p:sp>
+      <p:sp>
+        <p:nvSpPr>
+          <p:cNvPr id="15" name="TextBox 14"/>
+          <p:cNvSpPr txBox="1"/>
+          <p:nvPr/>
+        </p:nvSpPr>
+        <p:spPr>
+          <a:xfrm>
+            <a:off x="3626967" y="3703320"/>
+            <a:ext cx="2148840" cy="1280160"/>
+          </a:xfrm>
+          <a:prstGeom prst="rect">
+            <a:avLst/>
+          </a:prstGeom>
+          <a:noFill/>
+        </p:spPr>
+        <p:txBody>
+          <a:bodyPr wrap="square" tIns="25400" bIns="25400" lIns="25400" rIns="25400" anchor="t">
+            <a:spAutoFit/>
+          </a:bodyPr>
+          <a:lstStyle/>
+          <a:p>
+            <a:pPr algn="l"/>
+            <a:r>
+              <a:rPr sz="1100" b="0" i="0">
+                <a:solidFill>
+                  <a:srgbClr val="64748B"/>
+                </a:solidFill>
+                <a:latin typeface="Inter"/>
+              </a:rPr>
+              <a:t>Data-driven marketing campaigns that deliver measurable results.</a:t>
+            </a:r>
+          </a:p>
+        </p:txBody>
+      </p:sp>
+      <p:sp>
+        <p:nvSpPr>
+          <p:cNvPr id="16" name="TextBox 15"/>
+          <p:cNvSpPr txBox="1"/>
+          <p:nvPr/>
+        </p:nvSpPr>
+        <p:spPr>
+          <a:xfrm>
+            <a:off x="3626967" y="4937760"/>
+            <a:ext cx="2148840" cy="1280160"/>
+          </a:xfrm>
+          <a:prstGeom prst="rect">
+            <a:avLst/>
+          </a:prstGeom>
+          <a:noFill/>
+        </p:spPr>
+        <p:txBody>
+          <a:bodyPr wrap="square">
+            <a:spAutoFit/>
+          </a:bodyPr>
+          <a:lstStyle/>
+          <a:p/>
+          <a:p>
+            <a:pPr algn="l" marL="342900" indent="-342900">
+              <a:buChar char="✓"/>
+              <a:spcAft>
+                <a:spcPts val="800"/>
+              </a:spcAft>
+              <a:buClr>
+                <a:srgbClr val="14B8A6"/>
+              </a:buClr>
+            </a:pPr>
+            <a:r>
+              <a:rPr sz="1000">
+                <a:solidFill>
+                  <a:srgbClr val="1F2937"/>
+                </a:solidFill>
+                <a:latin typeface="Inter"/>
+              </a:rPr>
+              <a:t>Custom growth plan</a:t>
+            </a:r>
+          </a:p>
+          <a:p>
+            <a:pPr algn="l" marL="342900" indent="-342900">
+              <a:buChar char="✓"/>
+              <a:spcAft>
+                <a:spcPts val="800"/>
+              </a:spcAft>
+              <a:buClr>
+                <a:srgbClr val="14B8A6"/>
+              </a:buClr>
+            </a:pPr>
+            <a:r>
+              <a:rPr sz="1000">
+                <a:solidFill>
+                  <a:srgbClr val="1F2937"/>
+                </a:solidFill>
+                <a:latin typeface="Inter"/>
+              </a:rPr>
+              <a:t>Market analysis</a:t>
+            </a:r>
+          </a:p>
+          <a:p>
+            <a:pPr algn="l" marL="342900" indent="-342900">
+              <a:buChar char="✓"/>
+              <a:spcAft>
+                <a:spcPts val="800"/>
+              </a:spcAft>
+              <a:buClr>
+                <a:srgbClr val="14B8A6"/>
+              </a:buClr>
+            </a:pPr>
+            <a:r>
+              <a:rPr sz="1000">
+                <a:solidFill>
+                  <a:srgbClr val="1F2937"/>
+                </a:solidFill>
+                <a:latin typeface="Inter"/>
+              </a:rPr>
+              <a:t>Revenue strategy</a:t>
+            </a:r>
+          </a:p>
+        </p:txBody>
+      </p:sp>
+      <p:sp>
+        <p:nvSpPr>
+          <p:cNvPr id="17" name="Rounded Rectangle 16"/>
+          <p:cNvSpPr/>
+          <p:nvPr/>
+        </p:nvSpPr>
+        <p:spPr>
+          <a:xfrm>
+            <a:off x="6187287" y="2194560"/>
+            <a:ext cx="2606040" cy="4114800"/>
+          </a:xfrm>
+          <a:prstGeom prst="roundRect">
+            <a:avLst>
+              <a:gd name="adj" fmla="val 5000"/>
+            </a:avLst>
+          </a:prstGeom>
+          <a:solidFill>
+            <a:srgbClr val="FFFFFF"/>
+          </a:solidFill>
+          <a:ln w="9525">
+            <a:solidFill>
+              <a:srgbClr val="E2E8F0"/>
+            </a:solidFill>
+          </a:ln>
+          <a:effectLst/>
+        </p:spPr>
+        <p:style>
+          <a:lnRef idx="1">
+            <a:schemeClr val="accent1"/>
+          </a:lnRef>
+          <a:fillRef idx="3">
+            <a:schemeClr val="accent1"/>
+          </a:fillRef>
+          <a:effectRef idx="2">
+            <a:schemeClr val="accent1"/>
+          </a:effectRef>
+          <a:fontRef idx="minor">
+            <a:schemeClr val="lt1"/>
+          </a:fontRef>
+        </p:style>
+        <p:txBody>
+          <a:bodyPr rtlCol="0" anchor="ctr"/>
+          <a:lstStyle/>
+          <a:p>
+            <a:pPr algn="ctr"/>
+          </a:p>
+        </p:txBody>
+      </p:sp>
+      <p:sp>
+        <p:nvSpPr>
+          <p:cNvPr id="18" name="Rounded Rectangle 17"/>
+          <p:cNvSpPr/>
+          <p:nvPr/>
+        </p:nvSpPr>
+        <p:spPr>
+          <a:xfrm>
+            <a:off x="6461607" y="2468880"/>
+            <a:ext cx="502920" cy="502920"/>
+          </a:xfrm>
+          <a:prstGeom prst="roundRect">
+            <a:avLst>
+              <a:gd name="adj" fmla="val 50000"/>
+            </a:avLst>
+          </a:prstGeom>
+          <a:solidFill>
+            <a:srgbClr val="E0F2FE"/>
+          </a:solidFill>
+          <a:ln>
+            <a:noFill/>
+          </a:ln>
+          <a:effectLst/>
+        </p:spPr>
+        <p:style>
+          <a:lnRef idx="1">
+            <a:schemeClr val="accent1"/>
+          </a:lnRef>
+          <a:fillRef idx="3">
+            <a:schemeClr val="accent1"/>
+          </a:fillRef>
+          <a:effectRef idx="2">
+            <a:schemeClr val="accent1"/>
+          </a:effectRef>
+          <a:fontRef idx="minor">
+            <a:schemeClr val="lt1"/>
+          </a:fontRef>
+        </p:style>
+        <p:txBody>
+          <a:bodyPr rtlCol="0" anchor="ctr"/>
+          <a:lstStyle/>
+          <a:p>
+            <a:pPr algn="ctr"/>
+          </a:p>
+        </p:txBody>
+      </p:sp>
+      <p:sp>
+        <p:nvSpPr>
+          <p:cNvPr id="19" name="TextBox 18"/>
+          <p:cNvSpPr txBox="1"/>
+          <p:nvPr/>
+        </p:nvSpPr>
+        <p:spPr>
+          <a:xfrm>
+            <a:off x="6461607" y="2468880"/>
+            <a:ext cx="502920" cy="502920"/>
+          </a:xfrm>
+          <a:prstGeom prst="rect">
+            <a:avLst/>
+          </a:prstGeom>
+          <a:noFill/>
+        </p:spPr>
+        <p:txBody>
+          <a:bodyPr wrap="square" tIns="25400" bIns="25400" lIns="25400" rIns="25400" anchor="ctr">
+            <a:spAutoFit/>
+          </a:bodyPr>
+          <a:lstStyle/>
+          <a:p>
+            <a:pPr algn="ctr"/>
+            <a:r>
+              <a:rPr sz="1400" b="1" i="0">
+                <a:solidFill>
+                  <a:srgbClr val="0284C7"/>
+                </a:solidFill>
+                <a:latin typeface="Space Grotesk"/>
+              </a:rPr>
+              <a:t>▶</a:t>
+            </a:r>
+          </a:p>
+        </p:txBody>
+      </p:sp>
+      <p:sp>
+        <p:nvSpPr>
+          <p:cNvPr id="20" name="TextBox 19"/>
+          <p:cNvSpPr txBox="1"/>
+          <p:nvPr/>
+        </p:nvSpPr>
+        <p:spPr>
+          <a:xfrm>
+            <a:off x="6415887" y="3154680"/>
+            <a:ext cx="2148840" cy="640080"/>
+          </a:xfrm>
+          <a:prstGeom prst="rect">
+            <a:avLst/>
+          </a:prstGeom>
+          <a:noFill/>
+        </p:spPr>
+        <p:txBody>
+          <a:bodyPr wrap="square" tIns="25400" bIns="25400" lIns="25400" rIns="25400" anchor="t">
+            <a:spAutoFit/>
+          </a:bodyPr>
+          <a:lstStyle/>
+          <a:p>
+            <a:pPr algn="l"/>
+            <a:r>
+              <a:rPr sz="1500" b="1" i="0">
+                <a:solidFill>
+                  <a:srgbClr val="0C1A2E"/>
+                </a:solidFill>
+                <a:latin typeface="Space Grotesk"/>
+              </a:rPr>
+              <a:t>AI-Powered Solutions</a:t>
+            </a:r>
+          </a:p>
+        </p:txBody>
+      </p:sp>
+      <p:sp>
+        <p:nvSpPr>
+          <p:cNvPr id="21" name="TextBox 20"/>
+          <p:cNvSpPr txBox="1"/>
+          <p:nvPr/>
+        </p:nvSpPr>
+        <p:spPr>
+          <a:xfrm>
+            <a:off x="6415887" y="3703320"/>
+            <a:ext cx="2148840" cy="1280160"/>
+          </a:xfrm>
+          <a:prstGeom prst="rect">
+            <a:avLst/>
+          </a:prstGeom>
+          <a:noFill/>
+        </p:spPr>
+        <p:txBody>
+          <a:bodyPr wrap="square" tIns="25400" bIns="25400" lIns="25400" rIns="25400" anchor="t">
+            <a:spAutoFit/>
+          </a:bodyPr>
+          <a:lstStyle/>
+          <a:p>
+            <a:pPr algn="l"/>
+            <a:r>
+              <a:rPr sz="1100" b="0" i="0">
+                <a:solidFill>
+                  <a:srgbClr val="64748B"/>
+                </a:solidFill>
+                <a:latin typeface="Inter"/>
+              </a:rPr>
+              <a:t>Cutting-edge AI technology to optimize your business operations.</a:t>
+            </a:r>
+          </a:p>
+        </p:txBody>
+      </p:sp>
+      <p:sp>
+        <p:nvSpPr>
+          <p:cNvPr id="22" name="TextBox 21"/>
+          <p:cNvSpPr txBox="1"/>
+          <p:nvPr/>
+        </p:nvSpPr>
+        <p:spPr>
+          <a:xfrm>
+            <a:off x="6415887" y="4937760"/>
+            <a:ext cx="2148840" cy="1280160"/>
+          </a:xfrm>
+          <a:prstGeom prst="rect">
+            <a:avLst/>
+          </a:prstGeom>
+          <a:noFill/>
+        </p:spPr>
+        <p:txBody>
+          <a:bodyPr wrap="square">
+            <a:spAutoFit/>
+          </a:bodyPr>
+          <a:lstStyle/>
+          <a:p/>
+          <a:p>
+            <a:pPr algn="l" marL="342900" indent="-342900">
+              <a:buChar char="✓"/>
+              <a:spcAft>
+                <a:spcPts val="800"/>
+              </a:spcAft>
+              <a:buClr>
+                <a:srgbClr val="14B8A6"/>
+              </a:buClr>
+            </a:pPr>
+            <a:r>
+              <a:rPr sz="1000">
+                <a:solidFill>
+                  <a:srgbClr val="1F2937"/>
+                </a:solidFill>
+                <a:latin typeface="Inter"/>
+              </a:rPr>
+              <a:t>Custom growth plan</a:t>
+            </a:r>
+          </a:p>
+          <a:p>
+            <a:pPr algn="l" marL="342900" indent="-342900">
+              <a:buChar char="✓"/>
+              <a:spcAft>
+                <a:spcPts val="800"/>
+              </a:spcAft>
+              <a:buClr>
+                <a:srgbClr val="14B8A6"/>
+              </a:buClr>
+            </a:pPr>
+            <a:r>
+              <a:rPr sz="1000">
+                <a:solidFill>
+                  <a:srgbClr val="1F2937"/>
+                </a:solidFill>
+                <a:latin typeface="Inter"/>
+              </a:rPr>
+              <a:t>Market analysis</a:t>
+            </a:r>
+          </a:p>
+          <a:p>
+            <a:pPr algn="l" marL="342900" indent="-342900">
+              <a:buChar char="✓"/>
+              <a:spcAft>
+                <a:spcPts val="800"/>
+              </a:spcAft>
+              <a:buClr>
+                <a:srgbClr val="14B8A6"/>
+              </a:buClr>
+            </a:pPr>
+            <a:r>
+              <a:rPr sz="1000">
+                <a:solidFill>
+                  <a:srgbClr val="1F2937"/>
+                </a:solidFill>
+                <a:latin typeface="Inter"/>
+              </a:rPr>
+              <a:t>Revenue strategy</a:t>
+            </a:r>
+          </a:p>
+        </p:txBody>
+      </p:sp>
+      <p:sp>
+        <p:nvSpPr>
+          <p:cNvPr id="23" name="Rounded Rectangle 22"/>
+          <p:cNvSpPr/>
+          <p:nvPr/>
+        </p:nvSpPr>
+        <p:spPr>
+          <a:xfrm>
+            <a:off x="8976207" y="2194560"/>
+            <a:ext cx="2606040" cy="4114800"/>
+          </a:xfrm>
+          <a:prstGeom prst="roundRect">
+            <a:avLst>
+              <a:gd name="adj" fmla="val 5000"/>
+            </a:avLst>
+          </a:prstGeom>
+          <a:solidFill>
+            <a:srgbClr val="FFFFFF"/>
+          </a:solidFill>
+          <a:ln w="9525">
+            <a:solidFill>
+              <a:srgbClr val="E2E8F0"/>
+            </a:solidFill>
+          </a:ln>
+          <a:effectLst/>
+        </p:spPr>
+        <p:style>
+          <a:lnRef idx="1">
+            <a:schemeClr val="accent1"/>
+          </a:lnRef>
+          <a:fillRef idx="3">
+            <a:schemeClr val="accent1"/>
+          </a:fillRef>
+          <a:effectRef idx="2">
+            <a:schemeClr val="accent1"/>
+          </a:effectRef>
+          <a:fontRef idx="minor">
+            <a:schemeClr val="lt1"/>
+          </a:fontRef>
+        </p:style>
+        <p:txBody>
+          <a:bodyPr rtlCol="0" anchor="ctr"/>
+          <a:lstStyle/>
+          <a:p>
+            <a:pPr algn="ctr"/>
+          </a:p>
+        </p:txBody>
+      </p:sp>
+      <p:sp>
+        <p:nvSpPr>
+          <p:cNvPr id="24" name="Rounded Rectangle 23"/>
+          <p:cNvSpPr/>
+          <p:nvPr/>
+        </p:nvSpPr>
+        <p:spPr>
+          <a:xfrm>
+            <a:off x="9250527" y="2468880"/>
+            <a:ext cx="502920" cy="502920"/>
+          </a:xfrm>
+          <a:prstGeom prst="roundRect">
+            <a:avLst>
+              <a:gd name="adj" fmla="val 50000"/>
+            </a:avLst>
+          </a:prstGeom>
+          <a:solidFill>
+            <a:srgbClr val="E0F2FE"/>
+          </a:solidFill>
+          <a:ln>
+            <a:noFill/>
+          </a:ln>
+          <a:effectLst/>
+        </p:spPr>
+        <p:style>
+          <a:lnRef idx="1">
+            <a:schemeClr val="accent1"/>
+          </a:lnRef>
+          <a:fillRef idx="3">
+            <a:schemeClr val="accent1"/>
+          </a:fillRef>
+          <a:effectRef idx="2">
+            <a:schemeClr val="accent1"/>
+          </a:effectRef>
+          <a:fontRef idx="minor">
+            <a:schemeClr val="lt1"/>
+          </a:fontRef>
+        </p:style>
+        <p:txBody>
+          <a:bodyPr rtlCol="0" anchor="ctr"/>
+          <a:lstStyle/>
+          <a:p>
+            <a:pPr algn="ctr"/>
+          </a:p>
+        </p:txBody>
+      </p:sp>
+      <p:sp>
+        <p:nvSpPr>
+          <p:cNvPr id="25" name="TextBox 24"/>
+          <p:cNvSpPr txBox="1"/>
+          <p:nvPr/>
+        </p:nvSpPr>
+        <p:spPr>
+          <a:xfrm>
+            <a:off x="9250527" y="2468880"/>
+            <a:ext cx="502920" cy="502920"/>
+          </a:xfrm>
+          <a:prstGeom prst="rect">
+            <a:avLst/>
+          </a:prstGeom>
+          <a:noFill/>
+        </p:spPr>
+        <p:txBody>
+          <a:bodyPr wrap="square" tIns="25400" bIns="25400" lIns="25400" rIns="25400" anchor="ctr">
+            <a:spAutoFit/>
+          </a:bodyPr>
+          <a:lstStyle/>
+          <a:p>
+            <a:pPr algn="ctr"/>
+            <a:r>
+              <a:rPr sz="1400" b="1" i="0">
+                <a:solidFill>
+                  <a:srgbClr val="0284C7"/>
+                </a:solidFill>
+                <a:latin typeface="Space Grotesk"/>
+              </a:rPr>
+              <a:t>▶</a:t>
+            </a:r>
+          </a:p>
+        </p:txBody>
+      </p:sp>
+      <p:sp>
+        <p:nvSpPr>
+          <p:cNvPr id="26" name="TextBox 25"/>
+          <p:cNvSpPr txBox="1"/>
+          <p:nvPr/>
+        </p:nvSpPr>
+        <p:spPr>
+          <a:xfrm>
+            <a:off x="9204807" y="3154680"/>
+            <a:ext cx="2148840" cy="640080"/>
+          </a:xfrm>
+          <a:prstGeom prst="rect">
+            <a:avLst/>
+          </a:prstGeom>
+          <a:noFill/>
+        </p:spPr>
+        <p:txBody>
+          <a:bodyPr wrap="square" tIns="25400" bIns="25400" lIns="25400" rIns="25400" anchor="t">
+            <a:spAutoFit/>
+          </a:bodyPr>
+          <a:lstStyle/>
+          <a:p>
+            <a:pPr algn="l"/>
+            <a:r>
+              <a:rPr sz="1500" b="1" i="0">
+                <a:solidFill>
+                  <a:srgbClr val="0C1A2E"/>
+                </a:solidFill>
+                <a:latin typeface="Space Grotesk"/>
+              </a:rPr>
+              <a:t>Growth Optimization</a:t>
+            </a:r>
+          </a:p>
+        </p:txBody>
+      </p:sp>
+      <p:sp>
+        <p:nvSpPr>
+          <p:cNvPr id="27" name="TextBox 26"/>
+          <p:cNvSpPr txBox="1"/>
+          <p:nvPr/>
+        </p:nvSpPr>
+        <p:spPr>
+          <a:xfrm>
+            <a:off x="9204807" y="3703320"/>
+            <a:ext cx="2148840" cy="1280160"/>
+          </a:xfrm>
+          <a:prstGeom prst="rect">
+            <a:avLst/>
+          </a:prstGeom>
+          <a:noFill/>
+        </p:spPr>
+        <p:txBody>
+          <a:bodyPr wrap="square" tIns="25400" bIns="25400" lIns="25400" rIns="25400" anchor="t">
+            <a:spAutoFit/>
+          </a:bodyPr>
+          <a:lstStyle/>
+          <a:p>
+            <a:pPr algn="l"/>
+            <a:r>
+              <a:rPr sz="1100" b="0" i="0">
+                <a:solidFill>
+                  <a:srgbClr val="64748B"/>
+                </a:solidFill>
+                <a:latin typeface="Inter"/>
+              </a:rPr>
+              <a:t>Comprehensive programs that scale your business efficiently and sustainably.</a:t>
+            </a:r>
+          </a:p>
+        </p:txBody>
+      </p:sp>
+      <p:sp>
+        <p:nvSpPr>
+          <p:cNvPr id="28" name="TextBox 27"/>
+          <p:cNvSpPr txBox="1"/>
+          <p:nvPr/>
+        </p:nvSpPr>
+        <p:spPr>
+          <a:xfrm>
+            <a:off x="9204807" y="4937760"/>
+            <a:ext cx="2148840" cy="1280160"/>
+          </a:xfrm>
+          <a:prstGeom prst="rect">
+            <a:avLst/>
+          </a:prstGeom>
+          <a:noFill/>
+        </p:spPr>
+        <p:txBody>
+          <a:bodyPr wrap="square">
+            <a:spAutoFit/>
+          </a:bodyPr>
+          <a:lstStyle/>
+          <a:p/>
+          <a:p>
+            <a:pPr algn="l" marL="342900" indent="-342900">
+              <a:buChar char="✓"/>
+              <a:spcAft>
+                <a:spcPts val="800"/>
+              </a:spcAft>
+              <a:buClr>
+                <a:srgbClr val="14B8A6"/>
+              </a:buClr>
+            </a:pPr>
+            <a:r>
+              <a:rPr sz="1000">
+                <a:solidFill>
+                  <a:srgbClr val="1F2937"/>
+                </a:solidFill>
+                <a:latin typeface="Inter"/>
+              </a:rPr>
+              <a:t>Custom growth plan</a:t>
+            </a:r>
+          </a:p>
+          <a:p>
+            <a:pPr algn="l" marL="342900" indent="-342900">
+              <a:buChar char="✓"/>
+              <a:spcAft>
+                <a:spcPts val="800"/>
+              </a:spcAft>
+              <a:buClr>
+                <a:srgbClr val="14B8A6"/>
+              </a:buClr>
+            </a:pPr>
+            <a:r>
+              <a:rPr sz="1000">
+                <a:solidFill>
+                  <a:srgbClr val="1F2937"/>
+                </a:solidFill>
+                <a:latin typeface="Inter"/>
+              </a:rPr>
+              <a:t>Market analysis</a:t>
+            </a:r>
+          </a:p>
+          <a:p>
+            <a:pPr algn="l" marL="342900" indent="-342900">
+              <a:buChar char="✓"/>
+              <a:spcAft>
+                <a:spcPts val="800"/>
+              </a:spcAft>
+              <a:buClr>
+                <a:srgbClr val="14B8A6"/>
+              </a:buClr>
+            </a:pPr>
+            <a:r>
+              <a:rPr sz="1000">
+                <a:solidFill>
+                  <a:srgbClr val="1F2937"/>
+                </a:solidFill>
+                <a:latin typeface="Inter"/>
+              </a:rPr>
+              <a:t>Revenue strategy</a:t>
+            </a:r>
+          </a:p>
+        </p:txBody>
+      </p:sp>
+      <p:sp>
+        <p:nvSpPr>
+          <p:cNvPr id="29" name="Rectangle 28"/>
           <p:cNvSpPr/>
           <p:nvPr/>
         </p:nvSpPr>
@@ -5051,7 +9206,7 @@
       </p:sp>
       <p:sp>
         <p:nvSpPr>
-          <p:cNvPr id="9" name="TextBox 8"/>
+          <p:cNvPr id="30" name="TextBox 29"/>
           <p:cNvSpPr txBox="1"/>
           <p:nvPr/>
         </p:nvSpPr>
@@ -5073,7 +9228,7 @@
           <a:p>
             <a:pPr algn="l"/>
             <a:r>
-              <a:rPr sz="900" b="1">
+              <a:rPr sz="900" b="1" i="0">
                 <a:solidFill>
                   <a:srgbClr val="0284C7"/>
                 </a:solidFill>
@@ -5086,7 +9241,7 @@
       </p:sp>
       <p:sp>
         <p:nvSpPr>
-          <p:cNvPr id="10" name="TextBox 9"/>
+          <p:cNvPr id="31" name="TextBox 30"/>
           <p:cNvSpPr txBox="1"/>
           <p:nvPr/>
         </p:nvSpPr>
@@ -5108,13 +9263,13 @@
           <a:p>
             <a:pPr algn="r"/>
             <a:r>
-              <a:rPr sz="900" b="0">
+              <a:rPr sz="900" b="0" i="0">
                 <a:solidFill>
                   <a:srgbClr val="64748B"/>
                 </a:solidFill>
                 <a:latin typeface="Inter"/>
               </a:rPr>
-              <a:t>5 / 8</a:t>
+              <a:t>5 / 12</a:t>
             </a:r>
           </a:p>
         </p:txBody>
@@ -5152,7 +9307,7 @@
             <a:avLst/>
           </a:prstGeom>
           <a:solidFill>
-            <a:srgbClr val="F8FAFC"/>
+            <a:srgbClr val="FFFFFF"/>
           </a:solidFill>
           <a:ln>
             <a:noFill/>
@@ -5183,84 +9338,14 @@
       </p:sp>
       <p:sp>
         <p:nvSpPr>
-          <p:cNvPr id="3" name="TextBox 2"/>
-          <p:cNvSpPr txBox="1"/>
-          <p:nvPr/>
-        </p:nvSpPr>
-        <p:spPr>
-          <a:xfrm>
-            <a:off x="640080" y="274320"/>
-            <a:ext cx="1828800" cy="2286000"/>
-          </a:xfrm>
-          <a:prstGeom prst="rect">
-            <a:avLst/>
-          </a:prstGeom>
-          <a:noFill/>
-        </p:spPr>
-        <p:txBody>
-          <a:bodyPr wrap="square" tIns="25400" bIns="25400" lIns="25400" rIns="25400" anchor="t">
-            <a:spAutoFit/>
-          </a:bodyPr>
-          <a:lstStyle/>
-          <a:p>
-            <a:pPr algn="l"/>
-            <a:r>
-              <a:rPr sz="20000" b="1">
-                <a:solidFill>
-                  <a:srgbClr val="0284C7"/>
-                </a:solidFill>
-                <a:latin typeface="Space Grotesk"/>
-              </a:rPr>
-              <a:t>“</a:t>
-            </a:r>
-          </a:p>
-        </p:txBody>
-      </p:sp>
-      <p:sp>
-        <p:nvSpPr>
-          <p:cNvPr id="4" name="TextBox 3"/>
-          <p:cNvSpPr txBox="1"/>
-          <p:nvPr/>
-        </p:nvSpPr>
-        <p:spPr>
-          <a:xfrm>
-            <a:off x="1828800" y="1828800"/>
-            <a:ext cx="9601200" cy="2377440"/>
-          </a:xfrm>
-          <a:prstGeom prst="rect">
-            <a:avLst/>
-          </a:prstGeom>
-          <a:noFill/>
-        </p:spPr>
-        <p:txBody>
-          <a:bodyPr wrap="square" tIns="25400" bIns="25400" lIns="25400" rIns="25400" anchor="t">
-            <a:spAutoFit/>
-          </a:bodyPr>
-          <a:lstStyle/>
-          <a:p>
-            <a:pPr algn="l"/>
-            <a:r>
-              <a:rPr sz="2800" b="1">
-                <a:solidFill>
-                  <a:srgbClr val="0C1A2E"/>
-                </a:solidFill>
-                <a:latin typeface="Space Grotesk"/>
-              </a:rPr>
-              <a:t>Brand authority is the single strongest predictor of AI citation. Brand mentions matter roughly three times more than backlinks.</a:t>
-            </a:r>
-          </a:p>
-        </p:txBody>
-      </p:sp>
-      <p:sp>
-        <p:nvSpPr>
-          <p:cNvPr id="5" name="Rectangle 4"/>
+          <p:cNvPr id="3" name="Rectangle 2"/>
           <p:cNvSpPr/>
           <p:nvPr/>
         </p:nvSpPr>
         <p:spPr>
           <a:xfrm>
-            <a:off x="1828800" y="4754880"/>
-            <a:ext cx="457200" cy="38100"/>
+            <a:off x="914400" y="777240"/>
+            <a:ext cx="548640" cy="44450"/>
           </a:xfrm>
           <a:prstGeom prst="rect">
             <a:avLst/>
@@ -5271,7 +9356,6 @@
           <a:ln>
             <a:noFill/>
           </a:ln>
-          <a:effectLst/>
         </p:spPr>
         <p:style>
           <a:lnRef idx="1">
@@ -5297,14 +9381,14 @@
       </p:sp>
       <p:sp>
         <p:nvSpPr>
-          <p:cNvPr id="6" name="TextBox 5"/>
-          <p:cNvSpPr txBox="1"/>
-          <p:nvPr/>
-        </p:nvSpPr>
-        <p:spPr>
-          <a:xfrm>
-            <a:off x="1828800" y="4892040"/>
-            <a:ext cx="9144000" cy="365760"/>
+          <p:cNvPr id="4" name="TextBox 3"/>
+          <p:cNvSpPr txBox="1"/>
+          <p:nvPr/>
+        </p:nvSpPr>
+        <p:spPr>
+          <a:xfrm>
+            <a:off x="914400" y="914400"/>
+            <a:ext cx="10058400" cy="640080"/>
           </a:xfrm>
           <a:prstGeom prst="rect">
             <a:avLst/>
@@ -5319,20 +9403,843 @@
           <a:p>
             <a:pPr algn="l"/>
             <a:r>
-              <a:rPr sz="1400" b="1">
+              <a:rPr sz="3200" b="1" i="0">
+                <a:solidFill>
+                  <a:srgbClr val="0C1A2E"/>
+                </a:solidFill>
+                <a:latin typeface="Space Grotesk"/>
+              </a:rPr>
+              <a:t>What you get</a:t>
+            </a:r>
+          </a:p>
+        </p:txBody>
+      </p:sp>
+      <p:sp>
+        <p:nvSpPr>
+          <p:cNvPr id="5" name="TextBox 4"/>
+          <p:cNvSpPr txBox="1"/>
+          <p:nvPr/>
+        </p:nvSpPr>
+        <p:spPr>
+          <a:xfrm>
+            <a:off x="914400" y="1554480"/>
+            <a:ext cx="10058400" cy="365760"/>
+          </a:xfrm>
+          <a:prstGeom prst="rect">
+            <a:avLst/>
+          </a:prstGeom>
+          <a:noFill/>
+        </p:spPr>
+        <p:txBody>
+          <a:bodyPr wrap="square" tIns="25400" bIns="25400" lIns="25400" rIns="25400" anchor="t">
+            <a:spAutoFit/>
+          </a:bodyPr>
+          <a:lstStyle/>
+          <a:p>
+            <a:pPr algn="l"/>
+            <a:r>
+              <a:rPr sz="1500" b="0" i="0">
                 <a:solidFill>
                   <a:srgbClr val="64748B"/>
                 </a:solidFill>
                 <a:latin typeface="Inter"/>
               </a:rPr>
-              <a:t>Princeton GEO Study  |  ACM KDD 2024</a:t>
-            </a:r>
-          </a:p>
-        </p:txBody>
-      </p:sp>
-      <p:sp>
-        <p:nvSpPr>
-          <p:cNvPr id="7" name="Rectangle 6"/>
+              <a:t>Four named deliverables, every engagement.</a:t>
+            </a:r>
+          </a:p>
+        </p:txBody>
+      </p:sp>
+      <p:sp>
+        <p:nvSpPr>
+          <p:cNvPr id="6" name="Rounded Rectangle 5"/>
+          <p:cNvSpPr/>
+          <p:nvPr/>
+        </p:nvSpPr>
+        <p:spPr>
+          <a:xfrm>
+            <a:off x="914400" y="2468880"/>
+            <a:ext cx="5120640" cy="1828800"/>
+          </a:xfrm>
+          <a:prstGeom prst="roundRect">
+            <a:avLst>
+              <a:gd name="adj" fmla="val 4000"/>
+            </a:avLst>
+          </a:prstGeom>
+          <a:solidFill>
+            <a:srgbClr val="F0F9FF"/>
+          </a:solidFill>
+          <a:ln>
+            <a:noFill/>
+          </a:ln>
+          <a:effectLst/>
+        </p:spPr>
+        <p:style>
+          <a:lnRef idx="1">
+            <a:schemeClr val="accent1"/>
+          </a:lnRef>
+          <a:fillRef idx="3">
+            <a:schemeClr val="accent1"/>
+          </a:fillRef>
+          <a:effectRef idx="2">
+            <a:schemeClr val="accent1"/>
+          </a:effectRef>
+          <a:fontRef idx="minor">
+            <a:schemeClr val="lt1"/>
+          </a:fontRef>
+        </p:style>
+        <p:txBody>
+          <a:bodyPr rtlCol="0" anchor="ctr"/>
+          <a:lstStyle/>
+          <a:p>
+            <a:pPr algn="ctr"/>
+          </a:p>
+        </p:txBody>
+      </p:sp>
+      <p:sp>
+        <p:nvSpPr>
+          <p:cNvPr id="7" name="Rounded Rectangle 6"/>
+          <p:cNvSpPr/>
+          <p:nvPr/>
+        </p:nvSpPr>
+        <p:spPr>
+          <a:xfrm>
+            <a:off x="1234440" y="2834640"/>
+            <a:ext cx="502920" cy="502920"/>
+          </a:xfrm>
+          <a:prstGeom prst="roundRect">
+            <a:avLst>
+              <a:gd name="adj" fmla="val 50000"/>
+            </a:avLst>
+          </a:prstGeom>
+          <a:solidFill>
+            <a:srgbClr val="0284C7"/>
+          </a:solidFill>
+          <a:ln>
+            <a:noFill/>
+          </a:ln>
+          <a:effectLst/>
+        </p:spPr>
+        <p:style>
+          <a:lnRef idx="1">
+            <a:schemeClr val="accent1"/>
+          </a:lnRef>
+          <a:fillRef idx="3">
+            <a:schemeClr val="accent1"/>
+          </a:fillRef>
+          <a:effectRef idx="2">
+            <a:schemeClr val="accent1"/>
+          </a:effectRef>
+          <a:fontRef idx="minor">
+            <a:schemeClr val="lt1"/>
+          </a:fontRef>
+        </p:style>
+        <p:txBody>
+          <a:bodyPr rtlCol="0" anchor="ctr"/>
+          <a:lstStyle/>
+          <a:p>
+            <a:pPr algn="ctr"/>
+          </a:p>
+        </p:txBody>
+      </p:sp>
+      <p:sp>
+        <p:nvSpPr>
+          <p:cNvPr id="8" name="TextBox 7"/>
+          <p:cNvSpPr txBox="1"/>
+          <p:nvPr/>
+        </p:nvSpPr>
+        <p:spPr>
+          <a:xfrm>
+            <a:off x="1234440" y="2834640"/>
+            <a:ext cx="502920" cy="502920"/>
+          </a:xfrm>
+          <a:prstGeom prst="rect">
+            <a:avLst/>
+          </a:prstGeom>
+          <a:noFill/>
+        </p:spPr>
+        <p:txBody>
+          <a:bodyPr wrap="square" tIns="25400" bIns="25400" lIns="25400" rIns="25400" anchor="ctr">
+            <a:spAutoFit/>
+          </a:bodyPr>
+          <a:lstStyle/>
+          <a:p>
+            <a:pPr algn="ctr"/>
+            <a:r>
+              <a:rPr sz="1600" b="1" i="0">
+                <a:solidFill>
+                  <a:srgbClr val="FFFFFF"/>
+                </a:solidFill>
+                <a:latin typeface="Space Grotesk"/>
+              </a:rPr>
+              <a:t>✓</a:t>
+            </a:r>
+          </a:p>
+        </p:txBody>
+      </p:sp>
+      <p:sp>
+        <p:nvSpPr>
+          <p:cNvPr id="9" name="TextBox 8"/>
+          <p:cNvSpPr txBox="1"/>
+          <p:nvPr/>
+        </p:nvSpPr>
+        <p:spPr>
+          <a:xfrm>
+            <a:off x="1920240" y="2834640"/>
+            <a:ext cx="3931920" cy="457200"/>
+          </a:xfrm>
+          <a:prstGeom prst="rect">
+            <a:avLst/>
+          </a:prstGeom>
+          <a:noFill/>
+        </p:spPr>
+        <p:txBody>
+          <a:bodyPr wrap="square" tIns="25400" bIns="25400" lIns="25400" rIns="25400" anchor="t">
+            <a:spAutoFit/>
+          </a:bodyPr>
+          <a:lstStyle/>
+          <a:p>
+            <a:pPr algn="l"/>
+            <a:r>
+              <a:rPr sz="1800" b="1" i="0">
+                <a:solidFill>
+                  <a:srgbClr val="0C1A2E"/>
+                </a:solidFill>
+                <a:latin typeface="Space Grotesk"/>
+              </a:rPr>
+              <a:t>Growth Frameworks</a:t>
+            </a:r>
+          </a:p>
+        </p:txBody>
+      </p:sp>
+      <p:sp>
+        <p:nvSpPr>
+          <p:cNvPr id="10" name="TextBox 9"/>
+          <p:cNvSpPr txBox="1"/>
+          <p:nvPr/>
+        </p:nvSpPr>
+        <p:spPr>
+          <a:xfrm>
+            <a:off x="1920240" y="3337560"/>
+            <a:ext cx="3931920" cy="822960"/>
+          </a:xfrm>
+          <a:prstGeom prst="rect">
+            <a:avLst/>
+          </a:prstGeom>
+          <a:noFill/>
+        </p:spPr>
+        <p:txBody>
+          <a:bodyPr wrap="square" tIns="25400" bIns="25400" lIns="25400" rIns="25400" anchor="t">
+            <a:spAutoFit/>
+          </a:bodyPr>
+          <a:lstStyle/>
+          <a:p>
+            <a:pPr algn="l"/>
+            <a:r>
+              <a:rPr sz="1300" b="0" i="0">
+                <a:solidFill>
+                  <a:srgbClr val="1F2937"/>
+                </a:solidFill>
+                <a:latin typeface="Inter"/>
+              </a:rPr>
+              <a:t>Proven methodologies for sustainable growth.</a:t>
+            </a:r>
+          </a:p>
+        </p:txBody>
+      </p:sp>
+      <p:sp>
+        <p:nvSpPr>
+          <p:cNvPr id="11" name="Rounded Rectangle 10"/>
+          <p:cNvSpPr/>
+          <p:nvPr/>
+        </p:nvSpPr>
+        <p:spPr>
+          <a:xfrm>
+            <a:off x="6309360" y="2468880"/>
+            <a:ext cx="5120640" cy="1828800"/>
+          </a:xfrm>
+          <a:prstGeom prst="roundRect">
+            <a:avLst>
+              <a:gd name="adj" fmla="val 4000"/>
+            </a:avLst>
+          </a:prstGeom>
+          <a:solidFill>
+            <a:srgbClr val="F0F9FF"/>
+          </a:solidFill>
+          <a:ln>
+            <a:noFill/>
+          </a:ln>
+          <a:effectLst/>
+        </p:spPr>
+        <p:style>
+          <a:lnRef idx="1">
+            <a:schemeClr val="accent1"/>
+          </a:lnRef>
+          <a:fillRef idx="3">
+            <a:schemeClr val="accent1"/>
+          </a:fillRef>
+          <a:effectRef idx="2">
+            <a:schemeClr val="accent1"/>
+          </a:effectRef>
+          <a:fontRef idx="minor">
+            <a:schemeClr val="lt1"/>
+          </a:fontRef>
+        </p:style>
+        <p:txBody>
+          <a:bodyPr rtlCol="0" anchor="ctr"/>
+          <a:lstStyle/>
+          <a:p>
+            <a:pPr algn="ctr"/>
+          </a:p>
+        </p:txBody>
+      </p:sp>
+      <p:sp>
+        <p:nvSpPr>
+          <p:cNvPr id="12" name="Rounded Rectangle 11"/>
+          <p:cNvSpPr/>
+          <p:nvPr/>
+        </p:nvSpPr>
+        <p:spPr>
+          <a:xfrm>
+            <a:off x="6629400" y="2834640"/>
+            <a:ext cx="502920" cy="502920"/>
+          </a:xfrm>
+          <a:prstGeom prst="roundRect">
+            <a:avLst>
+              <a:gd name="adj" fmla="val 50000"/>
+            </a:avLst>
+          </a:prstGeom>
+          <a:solidFill>
+            <a:srgbClr val="0284C7"/>
+          </a:solidFill>
+          <a:ln>
+            <a:noFill/>
+          </a:ln>
+          <a:effectLst/>
+        </p:spPr>
+        <p:style>
+          <a:lnRef idx="1">
+            <a:schemeClr val="accent1"/>
+          </a:lnRef>
+          <a:fillRef idx="3">
+            <a:schemeClr val="accent1"/>
+          </a:fillRef>
+          <a:effectRef idx="2">
+            <a:schemeClr val="accent1"/>
+          </a:effectRef>
+          <a:fontRef idx="minor">
+            <a:schemeClr val="lt1"/>
+          </a:fontRef>
+        </p:style>
+        <p:txBody>
+          <a:bodyPr rtlCol="0" anchor="ctr"/>
+          <a:lstStyle/>
+          <a:p>
+            <a:pPr algn="ctr"/>
+          </a:p>
+        </p:txBody>
+      </p:sp>
+      <p:sp>
+        <p:nvSpPr>
+          <p:cNvPr id="13" name="TextBox 12"/>
+          <p:cNvSpPr txBox="1"/>
+          <p:nvPr/>
+        </p:nvSpPr>
+        <p:spPr>
+          <a:xfrm>
+            <a:off x="6629400" y="2834640"/>
+            <a:ext cx="502920" cy="502920"/>
+          </a:xfrm>
+          <a:prstGeom prst="rect">
+            <a:avLst/>
+          </a:prstGeom>
+          <a:noFill/>
+        </p:spPr>
+        <p:txBody>
+          <a:bodyPr wrap="square" tIns="25400" bIns="25400" lIns="25400" rIns="25400" anchor="ctr">
+            <a:spAutoFit/>
+          </a:bodyPr>
+          <a:lstStyle/>
+          <a:p>
+            <a:pPr algn="ctr"/>
+            <a:r>
+              <a:rPr sz="1600" b="1" i="0">
+                <a:solidFill>
+                  <a:srgbClr val="FFFFFF"/>
+                </a:solidFill>
+                <a:latin typeface="Space Grotesk"/>
+              </a:rPr>
+              <a:t>✓</a:t>
+            </a:r>
+          </a:p>
+        </p:txBody>
+      </p:sp>
+      <p:sp>
+        <p:nvSpPr>
+          <p:cNvPr id="14" name="TextBox 13"/>
+          <p:cNvSpPr txBox="1"/>
+          <p:nvPr/>
+        </p:nvSpPr>
+        <p:spPr>
+          <a:xfrm>
+            <a:off x="7315200" y="2834640"/>
+            <a:ext cx="3931920" cy="457200"/>
+          </a:xfrm>
+          <a:prstGeom prst="rect">
+            <a:avLst/>
+          </a:prstGeom>
+          <a:noFill/>
+        </p:spPr>
+        <p:txBody>
+          <a:bodyPr wrap="square" tIns="25400" bIns="25400" lIns="25400" rIns="25400" anchor="t">
+            <a:spAutoFit/>
+          </a:bodyPr>
+          <a:lstStyle/>
+          <a:p>
+            <a:pPr algn="l"/>
+            <a:r>
+              <a:rPr sz="1800" b="1" i="0">
+                <a:solidFill>
+                  <a:srgbClr val="0C1A2E"/>
+                </a:solidFill>
+                <a:latin typeface="Space Grotesk"/>
+              </a:rPr>
+              <a:t>ROI Templates</a:t>
+            </a:r>
+          </a:p>
+        </p:txBody>
+      </p:sp>
+      <p:sp>
+        <p:nvSpPr>
+          <p:cNvPr id="15" name="TextBox 14"/>
+          <p:cNvSpPr txBox="1"/>
+          <p:nvPr/>
+        </p:nvSpPr>
+        <p:spPr>
+          <a:xfrm>
+            <a:off x="7315200" y="3337560"/>
+            <a:ext cx="3931920" cy="822960"/>
+          </a:xfrm>
+          <a:prstGeom prst="rect">
+            <a:avLst/>
+          </a:prstGeom>
+          <a:noFill/>
+        </p:spPr>
+        <p:txBody>
+          <a:bodyPr wrap="square" tIns="25400" bIns="25400" lIns="25400" rIns="25400" anchor="t">
+            <a:spAutoFit/>
+          </a:bodyPr>
+          <a:lstStyle/>
+          <a:p>
+            <a:pPr algn="l"/>
+            <a:r>
+              <a:rPr sz="1300" b="0" i="0">
+                <a:solidFill>
+                  <a:srgbClr val="1F2937"/>
+                </a:solidFill>
+                <a:latin typeface="Inter"/>
+              </a:rPr>
+              <a:t>Calculate and track your marketing ROI.</a:t>
+            </a:r>
+          </a:p>
+        </p:txBody>
+      </p:sp>
+      <p:sp>
+        <p:nvSpPr>
+          <p:cNvPr id="16" name="Rounded Rectangle 15"/>
+          <p:cNvSpPr/>
+          <p:nvPr/>
+        </p:nvSpPr>
+        <p:spPr>
+          <a:xfrm>
+            <a:off x="914400" y="4572000"/>
+            <a:ext cx="5120640" cy="1828800"/>
+          </a:xfrm>
+          <a:prstGeom prst="roundRect">
+            <a:avLst>
+              <a:gd name="adj" fmla="val 4000"/>
+            </a:avLst>
+          </a:prstGeom>
+          <a:solidFill>
+            <a:srgbClr val="F0F9FF"/>
+          </a:solidFill>
+          <a:ln>
+            <a:noFill/>
+          </a:ln>
+          <a:effectLst/>
+        </p:spPr>
+        <p:style>
+          <a:lnRef idx="1">
+            <a:schemeClr val="accent1"/>
+          </a:lnRef>
+          <a:fillRef idx="3">
+            <a:schemeClr val="accent1"/>
+          </a:fillRef>
+          <a:effectRef idx="2">
+            <a:schemeClr val="accent1"/>
+          </a:effectRef>
+          <a:fontRef idx="minor">
+            <a:schemeClr val="lt1"/>
+          </a:fontRef>
+        </p:style>
+        <p:txBody>
+          <a:bodyPr rtlCol="0" anchor="ctr"/>
+          <a:lstStyle/>
+          <a:p>
+            <a:pPr algn="ctr"/>
+          </a:p>
+        </p:txBody>
+      </p:sp>
+      <p:sp>
+        <p:nvSpPr>
+          <p:cNvPr id="17" name="Rounded Rectangle 16"/>
+          <p:cNvSpPr/>
+          <p:nvPr/>
+        </p:nvSpPr>
+        <p:spPr>
+          <a:xfrm>
+            <a:off x="1234440" y="4937760"/>
+            <a:ext cx="502920" cy="502920"/>
+          </a:xfrm>
+          <a:prstGeom prst="roundRect">
+            <a:avLst>
+              <a:gd name="adj" fmla="val 50000"/>
+            </a:avLst>
+          </a:prstGeom>
+          <a:solidFill>
+            <a:srgbClr val="0284C7"/>
+          </a:solidFill>
+          <a:ln>
+            <a:noFill/>
+          </a:ln>
+          <a:effectLst/>
+        </p:spPr>
+        <p:style>
+          <a:lnRef idx="1">
+            <a:schemeClr val="accent1"/>
+          </a:lnRef>
+          <a:fillRef idx="3">
+            <a:schemeClr val="accent1"/>
+          </a:fillRef>
+          <a:effectRef idx="2">
+            <a:schemeClr val="accent1"/>
+          </a:effectRef>
+          <a:fontRef idx="minor">
+            <a:schemeClr val="lt1"/>
+          </a:fontRef>
+        </p:style>
+        <p:txBody>
+          <a:bodyPr rtlCol="0" anchor="ctr"/>
+          <a:lstStyle/>
+          <a:p>
+            <a:pPr algn="ctr"/>
+          </a:p>
+        </p:txBody>
+      </p:sp>
+      <p:sp>
+        <p:nvSpPr>
+          <p:cNvPr id="18" name="TextBox 17"/>
+          <p:cNvSpPr txBox="1"/>
+          <p:nvPr/>
+        </p:nvSpPr>
+        <p:spPr>
+          <a:xfrm>
+            <a:off x="1234440" y="4937760"/>
+            <a:ext cx="502920" cy="502920"/>
+          </a:xfrm>
+          <a:prstGeom prst="rect">
+            <a:avLst/>
+          </a:prstGeom>
+          <a:noFill/>
+        </p:spPr>
+        <p:txBody>
+          <a:bodyPr wrap="square" tIns="25400" bIns="25400" lIns="25400" rIns="25400" anchor="ctr">
+            <a:spAutoFit/>
+          </a:bodyPr>
+          <a:lstStyle/>
+          <a:p>
+            <a:pPr algn="ctr"/>
+            <a:r>
+              <a:rPr sz="1600" b="1" i="0">
+                <a:solidFill>
+                  <a:srgbClr val="FFFFFF"/>
+                </a:solidFill>
+                <a:latin typeface="Space Grotesk"/>
+              </a:rPr>
+              <a:t>✓</a:t>
+            </a:r>
+          </a:p>
+        </p:txBody>
+      </p:sp>
+      <p:sp>
+        <p:nvSpPr>
+          <p:cNvPr id="19" name="TextBox 18"/>
+          <p:cNvSpPr txBox="1"/>
+          <p:nvPr/>
+        </p:nvSpPr>
+        <p:spPr>
+          <a:xfrm>
+            <a:off x="1920240" y="4937760"/>
+            <a:ext cx="3931920" cy="457200"/>
+          </a:xfrm>
+          <a:prstGeom prst="rect">
+            <a:avLst/>
+          </a:prstGeom>
+          <a:noFill/>
+        </p:spPr>
+        <p:txBody>
+          <a:bodyPr wrap="square" tIns="25400" bIns="25400" lIns="25400" rIns="25400" anchor="t">
+            <a:spAutoFit/>
+          </a:bodyPr>
+          <a:lstStyle/>
+          <a:p>
+            <a:pPr algn="l"/>
+            <a:r>
+              <a:rPr sz="1800" b="1" i="0">
+                <a:solidFill>
+                  <a:srgbClr val="0C1A2E"/>
+                </a:solidFill>
+                <a:latin typeface="Space Grotesk"/>
+              </a:rPr>
+              <a:t>AI Implementation</a:t>
+            </a:r>
+          </a:p>
+        </p:txBody>
+      </p:sp>
+      <p:sp>
+        <p:nvSpPr>
+          <p:cNvPr id="20" name="TextBox 19"/>
+          <p:cNvSpPr txBox="1"/>
+          <p:nvPr/>
+        </p:nvSpPr>
+        <p:spPr>
+          <a:xfrm>
+            <a:off x="1920240" y="5440680"/>
+            <a:ext cx="3931920" cy="822960"/>
+          </a:xfrm>
+          <a:prstGeom prst="rect">
+            <a:avLst/>
+          </a:prstGeom>
+          <a:noFill/>
+        </p:spPr>
+        <p:txBody>
+          <a:bodyPr wrap="square" tIns="25400" bIns="25400" lIns="25400" rIns="25400" anchor="t">
+            <a:spAutoFit/>
+          </a:bodyPr>
+          <a:lstStyle/>
+          <a:p>
+            <a:pPr algn="l"/>
+            <a:r>
+              <a:rPr sz="1300" b="0" i="0">
+                <a:solidFill>
+                  <a:srgbClr val="1F2937"/>
+                </a:solidFill>
+                <a:latin typeface="Inter"/>
+              </a:rPr>
+              <a:t>Step-by-step AI integration guide.</a:t>
+            </a:r>
+          </a:p>
+        </p:txBody>
+      </p:sp>
+      <p:sp>
+        <p:nvSpPr>
+          <p:cNvPr id="21" name="Rounded Rectangle 20"/>
+          <p:cNvSpPr/>
+          <p:nvPr/>
+        </p:nvSpPr>
+        <p:spPr>
+          <a:xfrm>
+            <a:off x="6309360" y="4572000"/>
+            <a:ext cx="5120640" cy="1828800"/>
+          </a:xfrm>
+          <a:prstGeom prst="roundRect">
+            <a:avLst>
+              <a:gd name="adj" fmla="val 4000"/>
+            </a:avLst>
+          </a:prstGeom>
+          <a:solidFill>
+            <a:srgbClr val="F0F9FF"/>
+          </a:solidFill>
+          <a:ln>
+            <a:noFill/>
+          </a:ln>
+          <a:effectLst/>
+        </p:spPr>
+        <p:style>
+          <a:lnRef idx="1">
+            <a:schemeClr val="accent1"/>
+          </a:lnRef>
+          <a:fillRef idx="3">
+            <a:schemeClr val="accent1"/>
+          </a:fillRef>
+          <a:effectRef idx="2">
+            <a:schemeClr val="accent1"/>
+          </a:effectRef>
+          <a:fontRef idx="minor">
+            <a:schemeClr val="lt1"/>
+          </a:fontRef>
+        </p:style>
+        <p:txBody>
+          <a:bodyPr rtlCol="0" anchor="ctr"/>
+          <a:lstStyle/>
+          <a:p>
+            <a:pPr algn="ctr"/>
+          </a:p>
+        </p:txBody>
+      </p:sp>
+      <p:sp>
+        <p:nvSpPr>
+          <p:cNvPr id="22" name="Rounded Rectangle 21"/>
+          <p:cNvSpPr/>
+          <p:nvPr/>
+        </p:nvSpPr>
+        <p:spPr>
+          <a:xfrm>
+            <a:off x="6629400" y="4937760"/>
+            <a:ext cx="502920" cy="502920"/>
+          </a:xfrm>
+          <a:prstGeom prst="roundRect">
+            <a:avLst>
+              <a:gd name="adj" fmla="val 50000"/>
+            </a:avLst>
+          </a:prstGeom>
+          <a:solidFill>
+            <a:srgbClr val="0284C7"/>
+          </a:solidFill>
+          <a:ln>
+            <a:noFill/>
+          </a:ln>
+          <a:effectLst/>
+        </p:spPr>
+        <p:style>
+          <a:lnRef idx="1">
+            <a:schemeClr val="accent1"/>
+          </a:lnRef>
+          <a:fillRef idx="3">
+            <a:schemeClr val="accent1"/>
+          </a:fillRef>
+          <a:effectRef idx="2">
+            <a:schemeClr val="accent1"/>
+          </a:effectRef>
+          <a:fontRef idx="minor">
+            <a:schemeClr val="lt1"/>
+          </a:fontRef>
+        </p:style>
+        <p:txBody>
+          <a:bodyPr rtlCol="0" anchor="ctr"/>
+          <a:lstStyle/>
+          <a:p>
+            <a:pPr algn="ctr"/>
+          </a:p>
+        </p:txBody>
+      </p:sp>
+      <p:sp>
+        <p:nvSpPr>
+          <p:cNvPr id="23" name="TextBox 22"/>
+          <p:cNvSpPr txBox="1"/>
+          <p:nvPr/>
+        </p:nvSpPr>
+        <p:spPr>
+          <a:xfrm>
+            <a:off x="6629400" y="4937760"/>
+            <a:ext cx="502920" cy="502920"/>
+          </a:xfrm>
+          <a:prstGeom prst="rect">
+            <a:avLst/>
+          </a:prstGeom>
+          <a:noFill/>
+        </p:spPr>
+        <p:txBody>
+          <a:bodyPr wrap="square" tIns="25400" bIns="25400" lIns="25400" rIns="25400" anchor="ctr">
+            <a:spAutoFit/>
+          </a:bodyPr>
+          <a:lstStyle/>
+          <a:p>
+            <a:pPr algn="ctr"/>
+            <a:r>
+              <a:rPr sz="1600" b="1" i="0">
+                <a:solidFill>
+                  <a:srgbClr val="FFFFFF"/>
+                </a:solidFill>
+                <a:latin typeface="Space Grotesk"/>
+              </a:rPr>
+              <a:t>✓</a:t>
+            </a:r>
+          </a:p>
+        </p:txBody>
+      </p:sp>
+      <p:sp>
+        <p:nvSpPr>
+          <p:cNvPr id="24" name="TextBox 23"/>
+          <p:cNvSpPr txBox="1"/>
+          <p:nvPr/>
+        </p:nvSpPr>
+        <p:spPr>
+          <a:xfrm>
+            <a:off x="7315200" y="4937760"/>
+            <a:ext cx="3931920" cy="457200"/>
+          </a:xfrm>
+          <a:prstGeom prst="rect">
+            <a:avLst/>
+          </a:prstGeom>
+          <a:noFill/>
+        </p:spPr>
+        <p:txBody>
+          <a:bodyPr wrap="square" tIns="25400" bIns="25400" lIns="25400" rIns="25400" anchor="t">
+            <a:spAutoFit/>
+          </a:bodyPr>
+          <a:lstStyle/>
+          <a:p>
+            <a:pPr algn="l"/>
+            <a:r>
+              <a:rPr sz="1800" b="1" i="0">
+                <a:solidFill>
+                  <a:srgbClr val="0C1A2E"/>
+                </a:solidFill>
+                <a:latin typeface="Space Grotesk"/>
+              </a:rPr>
+              <a:t>Case Studies</a:t>
+            </a:r>
+          </a:p>
+        </p:txBody>
+      </p:sp>
+      <p:sp>
+        <p:nvSpPr>
+          <p:cNvPr id="25" name="TextBox 24"/>
+          <p:cNvSpPr txBox="1"/>
+          <p:nvPr/>
+        </p:nvSpPr>
+        <p:spPr>
+          <a:xfrm>
+            <a:off x="7315200" y="5440680"/>
+            <a:ext cx="3931920" cy="822960"/>
+          </a:xfrm>
+          <a:prstGeom prst="rect">
+            <a:avLst/>
+          </a:prstGeom>
+          <a:noFill/>
+        </p:spPr>
+        <p:txBody>
+          <a:bodyPr wrap="square" tIns="25400" bIns="25400" lIns="25400" rIns="25400" anchor="t">
+            <a:spAutoFit/>
+          </a:bodyPr>
+          <a:lstStyle/>
+          <a:p>
+            <a:pPr algn="l"/>
+            <a:r>
+              <a:rPr sz="1300" b="0" i="0">
+                <a:solidFill>
+                  <a:srgbClr val="1F2937"/>
+                </a:solidFill>
+                <a:latin typeface="Inter"/>
+              </a:rPr>
+              <a:t>Real examples from successful clients.</a:t>
+            </a:r>
+          </a:p>
+        </p:txBody>
+      </p:sp>
+      <p:sp>
+        <p:nvSpPr>
+          <p:cNvPr id="26" name="Rectangle 25"/>
           <p:cNvSpPr/>
           <p:nvPr/>
         </p:nvSpPr>
@@ -5376,7 +10283,7 @@
       </p:sp>
       <p:sp>
         <p:nvSpPr>
-          <p:cNvPr id="8" name="TextBox 7"/>
+          <p:cNvPr id="27" name="TextBox 26"/>
           <p:cNvSpPr txBox="1"/>
           <p:nvPr/>
         </p:nvSpPr>
@@ -5398,7 +10305,7 @@
           <a:p>
             <a:pPr algn="l"/>
             <a:r>
-              <a:rPr sz="900" b="1">
+              <a:rPr sz="900" b="1" i="0">
                 <a:solidFill>
                   <a:srgbClr val="0284C7"/>
                 </a:solidFill>
@@ -5411,7 +10318,7 @@
       </p:sp>
       <p:sp>
         <p:nvSpPr>
-          <p:cNvPr id="9" name="TextBox 8"/>
+          <p:cNvPr id="28" name="TextBox 27"/>
           <p:cNvSpPr txBox="1"/>
           <p:nvPr/>
         </p:nvSpPr>
@@ -5433,13 +10340,13 @@
           <a:p>
             <a:pPr algn="r"/>
             <a:r>
-              <a:rPr sz="900" b="0">
+              <a:rPr sz="900" b="0" i="0">
                 <a:solidFill>
                   <a:srgbClr val="64748B"/>
                 </a:solidFill>
                 <a:latin typeface="Inter"/>
               </a:rPr>
-              <a:t>6 / 8</a:t>
+              <a:t>6 / 12</a:t>
             </a:r>
           </a:p>
         </p:txBody>
@@ -5508,130 +10415,19 @@
       </p:sp>
       <p:sp>
         <p:nvSpPr>
-          <p:cNvPr id="3" name="Rectangle 2"/>
+          <p:cNvPr id="3" name="Rounded Rectangle 2"/>
           <p:cNvSpPr/>
           <p:nvPr/>
         </p:nvSpPr>
         <p:spPr>
           <a:xfrm>
-            <a:off x="914400" y="914400"/>
-            <a:ext cx="548640" cy="44450"/>
-          </a:xfrm>
-          <a:prstGeom prst="rect">
-            <a:avLst/>
-          </a:prstGeom>
-          <a:solidFill>
-            <a:srgbClr val="14B8A6"/>
-          </a:solidFill>
-          <a:ln>
-            <a:noFill/>
-          </a:ln>
-        </p:spPr>
-        <p:style>
-          <a:lnRef idx="1">
-            <a:schemeClr val="accent1"/>
-          </a:lnRef>
-          <a:fillRef idx="3">
-            <a:schemeClr val="accent1"/>
-          </a:fillRef>
-          <a:effectRef idx="2">
-            <a:schemeClr val="accent1"/>
-          </a:effectRef>
-          <a:fontRef idx="minor">
-            <a:schemeClr val="lt1"/>
-          </a:fontRef>
-        </p:style>
-        <p:txBody>
-          <a:bodyPr rtlCol="0" anchor="ctr"/>
-          <a:lstStyle/>
-          <a:p>
-            <a:pPr algn="ctr"/>
-          </a:p>
-        </p:txBody>
-      </p:sp>
-      <p:sp>
-        <p:nvSpPr>
-          <p:cNvPr id="4" name="TextBox 3"/>
-          <p:cNvSpPr txBox="1"/>
-          <p:nvPr/>
-        </p:nvSpPr>
-        <p:spPr>
-          <a:xfrm>
-            <a:off x="914400" y="1051560"/>
-            <a:ext cx="10058400" cy="640080"/>
-          </a:xfrm>
-          <a:prstGeom prst="rect">
-            <a:avLst/>
-          </a:prstGeom>
-          <a:noFill/>
-        </p:spPr>
-        <p:txBody>
-          <a:bodyPr wrap="square" tIns="25400" bIns="25400" lIns="25400" rIns="25400" anchor="t">
-            <a:spAutoFit/>
-          </a:bodyPr>
-          <a:lstStyle/>
-          <a:p>
-            <a:pPr algn="l"/>
-            <a:r>
-              <a:rPr sz="3200" b="1">
-                <a:solidFill>
-                  <a:srgbClr val="0C1A2E"/>
-                </a:solidFill>
-                <a:latin typeface="Space Grotesk"/>
-              </a:rPr>
-              <a:t>Three numbers that frame the case</a:t>
-            </a:r>
-          </a:p>
-        </p:txBody>
-      </p:sp>
-      <p:sp>
-        <p:nvSpPr>
-          <p:cNvPr id="5" name="TextBox 4"/>
-          <p:cNvSpPr txBox="1"/>
-          <p:nvPr/>
-        </p:nvSpPr>
-        <p:spPr>
-          <a:xfrm>
-            <a:off x="914400" y="1737360"/>
-            <a:ext cx="10058400" cy="365760"/>
-          </a:xfrm>
-          <a:prstGeom prst="rect">
-            <a:avLst/>
-          </a:prstGeom>
-          <a:noFill/>
-        </p:spPr>
-        <p:txBody>
-          <a:bodyPr wrap="square" tIns="25400" bIns="25400" lIns="25400" rIns="25400" anchor="t">
-            <a:spAutoFit/>
-          </a:bodyPr>
-          <a:lstStyle/>
-          <a:p>
-            <a:pPr algn="l"/>
-            <a:r>
-              <a:rPr sz="1600" b="0">
-                <a:solidFill>
-                  <a:srgbClr val="64748B"/>
-                </a:solidFill>
-                <a:latin typeface="Inter"/>
-              </a:rPr>
-              <a:t>Each card is a self-contained passage. Quotable, citable, scannable.</a:t>
-            </a:r>
-          </a:p>
-        </p:txBody>
-      </p:sp>
-      <p:sp>
-        <p:nvSpPr>
-          <p:cNvPr id="6" name="Rectangle 5"/>
-          <p:cNvSpPr/>
-          <p:nvPr/>
-        </p:nvSpPr>
-        <p:spPr>
-          <a:xfrm>
-            <a:off x="914400" y="2651760"/>
-            <a:ext cx="3383280" cy="3291840"/>
-          </a:xfrm>
-          <a:prstGeom prst="rect">
-            <a:avLst/>
+            <a:off x="640080" y="640080"/>
+            <a:ext cx="5303520" cy="5577840"/>
+          </a:xfrm>
+          <a:prstGeom prst="roundRect">
+            <a:avLst>
+              <a:gd name="adj" fmla="val 3000"/>
+            </a:avLst>
           </a:prstGeom>
           <a:solidFill>
             <a:srgbClr val="F0F9FF"/>
@@ -5665,25 +10461,24 @@
       </p:sp>
       <p:sp>
         <p:nvSpPr>
-          <p:cNvPr id="7" name="Rectangle 6"/>
+          <p:cNvPr id="4" name="Rectangle 3"/>
           <p:cNvSpPr/>
           <p:nvPr/>
         </p:nvSpPr>
         <p:spPr>
           <a:xfrm>
-            <a:off x="914400" y="2651760"/>
-            <a:ext cx="3383280" cy="73152"/>
+            <a:off x="1005840" y="1005840"/>
+            <a:ext cx="548640" cy="44450"/>
           </a:xfrm>
           <a:prstGeom prst="rect">
             <a:avLst/>
           </a:prstGeom>
           <a:solidFill>
-            <a:srgbClr val="0284C7"/>
+            <a:srgbClr val="14B8A6"/>
           </a:solidFill>
           <a:ln>
             <a:noFill/>
           </a:ln>
-          <a:effectLst/>
         </p:spPr>
         <p:style>
           <a:lnRef idx="1">
@@ -5709,14 +10504,223 @@
       </p:sp>
       <p:sp>
         <p:nvSpPr>
+          <p:cNvPr id="5" name="TextBox 4"/>
+          <p:cNvSpPr txBox="1"/>
+          <p:nvPr/>
+        </p:nvSpPr>
+        <p:spPr>
+          <a:xfrm>
+            <a:off x="1005840" y="1143000"/>
+            <a:ext cx="4572000" cy="548640"/>
+          </a:xfrm>
+          <a:prstGeom prst="rect">
+            <a:avLst/>
+          </a:prstGeom>
+          <a:noFill/>
+        </p:spPr>
+        <p:txBody>
+          <a:bodyPr wrap="square" tIns="25400" bIns="25400" lIns="25400" rIns="25400" anchor="t">
+            <a:spAutoFit/>
+          </a:bodyPr>
+          <a:lstStyle/>
+          <a:p>
+            <a:pPr algn="l"/>
+            <a:r>
+              <a:rPr sz="2200" b="1" i="0">
+                <a:solidFill>
+                  <a:srgbClr val="0C1A2E"/>
+                </a:solidFill>
+                <a:latin typeface="Space Grotesk"/>
+              </a:rPr>
+              <a:t>Our Mission</a:t>
+            </a:r>
+          </a:p>
+        </p:txBody>
+      </p:sp>
+      <p:sp>
+        <p:nvSpPr>
+          <p:cNvPr id="6" name="TextBox 5"/>
+          <p:cNvSpPr txBox="1"/>
+          <p:nvPr/>
+        </p:nvSpPr>
+        <p:spPr>
+          <a:xfrm>
+            <a:off x="1005840" y="1737360"/>
+            <a:ext cx="4572000" cy="1280160"/>
+          </a:xfrm>
+          <a:prstGeom prst="rect">
+            <a:avLst/>
+          </a:prstGeom>
+          <a:noFill/>
+        </p:spPr>
+        <p:txBody>
+          <a:bodyPr wrap="square" tIns="25400" bIns="25400" lIns="25400" rIns="25400" anchor="t">
+            <a:spAutoFit/>
+          </a:bodyPr>
+          <a:lstStyle/>
+          <a:p>
+            <a:pPr algn="l"/>
+            <a:r>
+              <a:rPr sz="1300" b="0" i="0">
+                <a:solidFill>
+                  <a:srgbClr val="1F2937"/>
+                </a:solidFill>
+                <a:latin typeface="Inter"/>
+              </a:rPr>
+              <a:t>Based from Rotterdam, The Netherlands, we are committed to empowering businesses with innovative marketing strategies and AI-driven solutions that drive sustainable growth.</a:t>
+            </a:r>
+          </a:p>
+        </p:txBody>
+      </p:sp>
+      <p:sp>
+        <p:nvSpPr>
+          <p:cNvPr id="7" name="TextBox 6"/>
+          <p:cNvSpPr txBox="1"/>
+          <p:nvPr/>
+        </p:nvSpPr>
+        <p:spPr>
+          <a:xfrm>
+            <a:off x="1005840" y="3383280"/>
+            <a:ext cx="4572000" cy="457200"/>
+          </a:xfrm>
+          <a:prstGeom prst="rect">
+            <a:avLst/>
+          </a:prstGeom>
+          <a:noFill/>
+        </p:spPr>
+        <p:txBody>
+          <a:bodyPr wrap="square" tIns="25400" bIns="25400" lIns="25400" rIns="25400" anchor="t">
+            <a:spAutoFit/>
+          </a:bodyPr>
+          <a:lstStyle/>
+          <a:p>
+            <a:pPr algn="l"/>
+            <a:r>
+              <a:rPr sz="2200" b="1" i="0">
+                <a:solidFill>
+                  <a:srgbClr val="0C1A2E"/>
+                </a:solidFill>
+                <a:latin typeface="Space Grotesk"/>
+              </a:rPr>
+              <a:t>Our Values</a:t>
+            </a:r>
+          </a:p>
+        </p:txBody>
+      </p:sp>
+      <p:sp>
+        <p:nvSpPr>
           <p:cNvPr id="8" name="TextBox 7"/>
           <p:cNvSpPr txBox="1"/>
           <p:nvPr/>
         </p:nvSpPr>
         <p:spPr>
           <a:xfrm>
-            <a:off x="1188720" y="3017520"/>
-            <a:ext cx="2926080" cy="1280160"/>
+            <a:off x="1005840" y="3931920"/>
+            <a:ext cx="4572000" cy="2286000"/>
+          </a:xfrm>
+          <a:prstGeom prst="rect">
+            <a:avLst/>
+          </a:prstGeom>
+          <a:noFill/>
+        </p:spPr>
+        <p:txBody>
+          <a:bodyPr wrap="square">
+            <a:spAutoFit/>
+          </a:bodyPr>
+          <a:lstStyle/>
+          <a:p/>
+          <a:p>
+            <a:pPr algn="l" marL="342900" indent="-342900">
+              <a:buChar char="✓"/>
+              <a:spcAft>
+                <a:spcPts val="800"/>
+              </a:spcAft>
+              <a:buClr>
+                <a:srgbClr val="0284C7"/>
+              </a:buClr>
+            </a:pPr>
+            <a:r>
+              <a:rPr sz="1300">
+                <a:solidFill>
+                  <a:srgbClr val="1F2937"/>
+                </a:solidFill>
+                <a:latin typeface="Inter"/>
+              </a:rPr>
+              <a:t>Innovation at the core of everything we do</a:t>
+            </a:r>
+          </a:p>
+          <a:p>
+            <a:pPr algn="l" marL="342900" indent="-342900">
+              <a:buChar char="✓"/>
+              <a:spcAft>
+                <a:spcPts val="800"/>
+              </a:spcAft>
+              <a:buClr>
+                <a:srgbClr val="0284C7"/>
+              </a:buClr>
+            </a:pPr>
+            <a:r>
+              <a:rPr sz="1300">
+                <a:solidFill>
+                  <a:srgbClr val="1F2937"/>
+                </a:solidFill>
+                <a:latin typeface="Inter"/>
+              </a:rPr>
+              <a:t>Results-oriented approach to business growth</a:t>
+            </a:r>
+          </a:p>
+          <a:p>
+            <a:pPr algn="l" marL="342900" indent="-342900">
+              <a:buChar char="✓"/>
+              <a:spcAft>
+                <a:spcPts val="800"/>
+              </a:spcAft>
+              <a:buClr>
+                <a:srgbClr val="0284C7"/>
+              </a:buClr>
+            </a:pPr>
+            <a:r>
+              <a:rPr sz="1300">
+                <a:solidFill>
+                  <a:srgbClr val="1F2937"/>
+                </a:solidFill>
+                <a:latin typeface="Inter"/>
+              </a:rPr>
+              <a:t>Transparency and integrity in all partnerships</a:t>
+            </a:r>
+          </a:p>
+          <a:p>
+            <a:pPr algn="l" marL="342900" indent="-342900">
+              <a:buChar char="✓"/>
+              <a:spcAft>
+                <a:spcPts val="800"/>
+              </a:spcAft>
+              <a:buClr>
+                <a:srgbClr val="0284C7"/>
+              </a:buClr>
+            </a:pPr>
+            <a:r>
+              <a:rPr sz="1300">
+                <a:solidFill>
+                  <a:srgbClr val="1F2937"/>
+                </a:solidFill>
+                <a:latin typeface="Inter"/>
+              </a:rPr>
+              <a:t>Continuous learning and improvement</a:t>
+            </a:r>
+          </a:p>
+        </p:txBody>
+      </p:sp>
+      <p:sp>
+        <p:nvSpPr>
+          <p:cNvPr id="9" name="TextBox 8"/>
+          <p:cNvSpPr txBox="1"/>
+          <p:nvPr/>
+        </p:nvSpPr>
+        <p:spPr>
+          <a:xfrm>
+            <a:off x="6400800" y="777240"/>
+            <a:ext cx="5029200" cy="640080"/>
           </a:xfrm>
           <a:prstGeom prst="rect">
             <a:avLst/>
@@ -5731,27 +10735,27 @@
           <a:p>
             <a:pPr algn="l"/>
             <a:r>
-              <a:rPr sz="5600" b="1">
-                <a:solidFill>
-                  <a:srgbClr val="0369A1"/>
+              <a:rPr sz="2200" b="1" i="0">
+                <a:solidFill>
+                  <a:srgbClr val="0C1A2E"/>
                 </a:solidFill>
                 <a:latin typeface="Space Grotesk"/>
               </a:rPr>
-              <a:t>41%</a:t>
-            </a:r>
-          </a:p>
-        </p:txBody>
-      </p:sp>
-      <p:sp>
-        <p:nvSpPr>
-          <p:cNvPr id="9" name="TextBox 8"/>
-          <p:cNvSpPr txBox="1"/>
-          <p:nvPr/>
-        </p:nvSpPr>
-        <p:spPr>
-          <a:xfrm>
-            <a:off x="1188720" y="4389120"/>
-            <a:ext cx="2926080" cy="914400"/>
+              <a:t>Why Choose Booming Venture</a:t>
+            </a:r>
+          </a:p>
+        </p:txBody>
+      </p:sp>
+      <p:sp>
+        <p:nvSpPr>
+          <p:cNvPr id="10" name="TextBox 9"/>
+          <p:cNvSpPr txBox="1"/>
+          <p:nvPr/>
+        </p:nvSpPr>
+        <p:spPr>
+          <a:xfrm>
+            <a:off x="6400800" y="1417320"/>
+            <a:ext cx="5029200" cy="457200"/>
           </a:xfrm>
           <a:prstGeom prst="rect">
             <a:avLst/>
@@ -5766,65 +10770,32 @@
           <a:p>
             <a:pPr algn="l"/>
             <a:r>
-              <a:rPr sz="1600" b="1">
-                <a:solidFill>
-                  <a:srgbClr val="0C1A2E"/>
+              <a:rPr sz="1200" b="0" i="0">
+                <a:solidFill>
+                  <a:srgbClr val="64748B"/>
                 </a:solidFill>
                 <a:latin typeface="Inter"/>
               </a:rPr>
-              <a:t>AI visibility lift from statistics-addition</a:t>
-            </a:r>
-          </a:p>
-        </p:txBody>
-      </p:sp>
-      <p:sp>
-        <p:nvSpPr>
-          <p:cNvPr id="10" name="TextBox 9"/>
-          <p:cNvSpPr txBox="1"/>
-          <p:nvPr/>
-        </p:nvSpPr>
-        <p:spPr>
-          <a:xfrm>
-            <a:off x="1188720" y="5394960"/>
-            <a:ext cx="2926080" cy="365760"/>
-          </a:xfrm>
-          <a:prstGeom prst="rect">
-            <a:avLst/>
-          </a:prstGeom>
-          <a:noFill/>
-        </p:spPr>
-        <p:txBody>
-          <a:bodyPr wrap="square" tIns="25400" bIns="25400" lIns="25400" rIns="25400" anchor="t">
-            <a:spAutoFit/>
-          </a:bodyPr>
-          <a:lstStyle/>
-          <a:p>
-            <a:pPr algn="l"/>
-            <a:r>
-              <a:rPr sz="1100" b="0">
-                <a:solidFill>
-                  <a:srgbClr val="64748B"/>
-                </a:solidFill>
-                <a:latin typeface="Inter"/>
-              </a:rPr>
-              <a:t>Princeton GEO study, 10,000 queries</a:t>
-            </a:r>
-          </a:p>
-        </p:txBody>
-      </p:sp>
-      <p:sp>
-        <p:nvSpPr>
-          <p:cNvPr id="11" name="Rectangle 10"/>
+              <a:t>We combine strategic thinking with cutting-edge technology to help businesses achieve exceptional growth.</a:t>
+            </a:r>
+          </a:p>
+        </p:txBody>
+      </p:sp>
+      <p:sp>
+        <p:nvSpPr>
+          <p:cNvPr id="11" name="Rounded Rectangle 10"/>
           <p:cNvSpPr/>
           <p:nvPr/>
         </p:nvSpPr>
         <p:spPr>
           <a:xfrm>
-            <a:off x="4526280" y="2651760"/>
-            <a:ext cx="3383280" cy="3291840"/>
-          </a:xfrm>
-          <a:prstGeom prst="rect">
-            <a:avLst/>
+            <a:off x="6400800" y="2103120"/>
+            <a:ext cx="2468880" cy="1874519"/>
+          </a:xfrm>
+          <a:prstGeom prst="roundRect">
+            <a:avLst>
+              <a:gd name="adj" fmla="val 4000"/>
+            </a:avLst>
           </a:prstGeom>
           <a:solidFill>
             <a:srgbClr val="F0F9FF"/>
@@ -5858,166 +10829,89 @@
       </p:sp>
       <p:sp>
         <p:nvSpPr>
-          <p:cNvPr id="12" name="Rectangle 11"/>
+          <p:cNvPr id="12" name="TextBox 11"/>
+          <p:cNvSpPr txBox="1"/>
+          <p:nvPr/>
+        </p:nvSpPr>
+        <p:spPr>
+          <a:xfrm>
+            <a:off x="6629400" y="2331720"/>
+            <a:ext cx="2103120" cy="365760"/>
+          </a:xfrm>
+          <a:prstGeom prst="rect">
+            <a:avLst/>
+          </a:prstGeom>
+          <a:noFill/>
+        </p:spPr>
+        <p:txBody>
+          <a:bodyPr wrap="square" tIns="25400" bIns="25400" lIns="25400" rIns="25400" anchor="t">
+            <a:spAutoFit/>
+          </a:bodyPr>
+          <a:lstStyle/>
+          <a:p>
+            <a:pPr algn="l"/>
+            <a:r>
+              <a:rPr sz="1400" b="1" i="0">
+                <a:solidFill>
+                  <a:srgbClr val="0284C7"/>
+                </a:solidFill>
+                <a:latin typeface="Space Grotesk"/>
+              </a:rPr>
+              <a:t>Expertise</a:t>
+            </a:r>
+          </a:p>
+        </p:txBody>
+      </p:sp>
+      <p:sp>
+        <p:nvSpPr>
+          <p:cNvPr id="13" name="TextBox 12"/>
+          <p:cNvSpPr txBox="1"/>
+          <p:nvPr/>
+        </p:nvSpPr>
+        <p:spPr>
+          <a:xfrm>
+            <a:off x="6629400" y="2788920"/>
+            <a:ext cx="2103120" cy="1097280"/>
+          </a:xfrm>
+          <a:prstGeom prst="rect">
+            <a:avLst/>
+          </a:prstGeom>
+          <a:noFill/>
+        </p:spPr>
+        <p:txBody>
+          <a:bodyPr wrap="square" tIns="25400" bIns="25400" lIns="25400" rIns="25400" anchor="t">
+            <a:spAutoFit/>
+          </a:bodyPr>
+          <a:lstStyle/>
+          <a:p>
+            <a:pPr algn="l"/>
+            <a:r>
+              <a:rPr sz="1100" b="0" i="0">
+                <a:solidFill>
+                  <a:srgbClr val="1F2937"/>
+                </a:solidFill>
+                <a:latin typeface="Inter"/>
+              </a:rPr>
+              <a:t>Decades of combined experience in business growth, marketing, and AI.</a:t>
+            </a:r>
+          </a:p>
+        </p:txBody>
+      </p:sp>
+      <p:sp>
+        <p:nvSpPr>
+          <p:cNvPr id="14" name="Rounded Rectangle 13"/>
           <p:cNvSpPr/>
           <p:nvPr/>
         </p:nvSpPr>
         <p:spPr>
           <a:xfrm>
-            <a:off x="4526280" y="2651760"/>
-            <a:ext cx="3383280" cy="73152"/>
-          </a:xfrm>
-          <a:prstGeom prst="rect">
-            <a:avLst/>
-          </a:prstGeom>
-          <a:solidFill>
-            <a:srgbClr val="0284C7"/>
-          </a:solidFill>
-          <a:ln>
-            <a:noFill/>
-          </a:ln>
-          <a:effectLst/>
-        </p:spPr>
-        <p:style>
-          <a:lnRef idx="1">
-            <a:schemeClr val="accent1"/>
-          </a:lnRef>
-          <a:fillRef idx="3">
-            <a:schemeClr val="accent1"/>
-          </a:fillRef>
-          <a:effectRef idx="2">
-            <a:schemeClr val="accent1"/>
-          </a:effectRef>
-          <a:fontRef idx="minor">
-            <a:schemeClr val="lt1"/>
-          </a:fontRef>
-        </p:style>
-        <p:txBody>
-          <a:bodyPr rtlCol="0" anchor="ctr"/>
-          <a:lstStyle/>
-          <a:p>
-            <a:pPr algn="ctr"/>
-          </a:p>
-        </p:txBody>
-      </p:sp>
-      <p:sp>
-        <p:nvSpPr>
-          <p:cNvPr id="13" name="TextBox 12"/>
-          <p:cNvSpPr txBox="1"/>
-          <p:nvPr/>
-        </p:nvSpPr>
-        <p:spPr>
-          <a:xfrm>
-            <a:off x="4800600" y="3017520"/>
-            <a:ext cx="2926080" cy="1280160"/>
-          </a:xfrm>
-          <a:prstGeom prst="rect">
-            <a:avLst/>
-          </a:prstGeom>
-          <a:noFill/>
-        </p:spPr>
-        <p:txBody>
-          <a:bodyPr wrap="square" tIns="25400" bIns="25400" lIns="25400" rIns="25400" anchor="t">
-            <a:spAutoFit/>
-          </a:bodyPr>
-          <a:lstStyle/>
-          <a:p>
-            <a:pPr algn="l"/>
-            <a:r>
-              <a:rPr sz="5600" b="1">
-                <a:solidFill>
-                  <a:srgbClr val="0369A1"/>
-                </a:solidFill>
-                <a:latin typeface="Space Grotesk"/>
-              </a:rPr>
-              <a:t>44.2%</a:t>
-            </a:r>
-          </a:p>
-        </p:txBody>
-      </p:sp>
-      <p:sp>
-        <p:nvSpPr>
-          <p:cNvPr id="14" name="TextBox 13"/>
-          <p:cNvSpPr txBox="1"/>
-          <p:nvPr/>
-        </p:nvSpPr>
-        <p:spPr>
-          <a:xfrm>
-            <a:off x="4800600" y="4389120"/>
-            <a:ext cx="2926080" cy="914400"/>
-          </a:xfrm>
-          <a:prstGeom prst="rect">
-            <a:avLst/>
-          </a:prstGeom>
-          <a:noFill/>
-        </p:spPr>
-        <p:txBody>
-          <a:bodyPr wrap="square" tIns="25400" bIns="25400" lIns="25400" rIns="25400" anchor="t">
-            <a:spAutoFit/>
-          </a:bodyPr>
-          <a:lstStyle/>
-          <a:p>
-            <a:pPr algn="l"/>
-            <a:r>
-              <a:rPr sz="1600" b="1">
-                <a:solidFill>
-                  <a:srgbClr val="0C1A2E"/>
-                </a:solidFill>
-                <a:latin typeface="Inter"/>
-              </a:rPr>
-              <a:t>Of AI citations land in the first 30% of body content</a:t>
-            </a:r>
-          </a:p>
-        </p:txBody>
-      </p:sp>
-      <p:sp>
-        <p:nvSpPr>
-          <p:cNvPr id="15" name="TextBox 14"/>
-          <p:cNvSpPr txBox="1"/>
-          <p:nvPr/>
-        </p:nvSpPr>
-        <p:spPr>
-          <a:xfrm>
-            <a:off x="4800600" y="5394960"/>
-            <a:ext cx="2926080" cy="365760"/>
-          </a:xfrm>
-          <a:prstGeom prst="rect">
-            <a:avLst/>
-          </a:prstGeom>
-          <a:noFill/>
-        </p:spPr>
-        <p:txBody>
-          <a:bodyPr wrap="square" tIns="25400" bIns="25400" lIns="25400" rIns="25400" anchor="t">
-            <a:spAutoFit/>
-          </a:bodyPr>
-          <a:lstStyle/>
-          <a:p>
-            <a:pPr algn="l"/>
-            <a:r>
-              <a:rPr sz="1100" b="0">
-                <a:solidFill>
-                  <a:srgbClr val="64748B"/>
-                </a:solidFill>
-                <a:latin typeface="Inter"/>
-              </a:rPr>
-              <a:t>Kevin Indig, 1.2M ChatGPT answers</a:t>
-            </a:r>
-          </a:p>
-        </p:txBody>
-      </p:sp>
-      <p:sp>
-        <p:nvSpPr>
-          <p:cNvPr id="16" name="Rectangle 15"/>
-          <p:cNvSpPr/>
-          <p:nvPr/>
-        </p:nvSpPr>
-        <p:spPr>
-          <a:xfrm>
-            <a:off x="8138160" y="2651760"/>
-            <a:ext cx="3383280" cy="3291840"/>
-          </a:xfrm>
-          <a:prstGeom prst="rect">
-            <a:avLst/>
+            <a:off x="9052560" y="2103120"/>
+            <a:ext cx="2468880" cy="1874519"/>
+          </a:xfrm>
+          <a:prstGeom prst="roundRect">
+            <a:avLst>
+              <a:gd name="adj" fmla="val 4000"/>
+            </a:avLst>
           </a:prstGeom>
           <a:solidFill>
             <a:srgbClr val="F0F9FF"/>
@@ -6051,20 +10945,92 @@
       </p:sp>
       <p:sp>
         <p:nvSpPr>
-          <p:cNvPr id="17" name="Rectangle 16"/>
+          <p:cNvPr id="15" name="TextBox 14"/>
+          <p:cNvSpPr txBox="1"/>
+          <p:nvPr/>
+        </p:nvSpPr>
+        <p:spPr>
+          <a:xfrm>
+            <a:off x="9281160" y="2331720"/>
+            <a:ext cx="2103120" cy="365760"/>
+          </a:xfrm>
+          <a:prstGeom prst="rect">
+            <a:avLst/>
+          </a:prstGeom>
+          <a:noFill/>
+        </p:spPr>
+        <p:txBody>
+          <a:bodyPr wrap="square" tIns="25400" bIns="25400" lIns="25400" rIns="25400" anchor="t">
+            <a:spAutoFit/>
+          </a:bodyPr>
+          <a:lstStyle/>
+          <a:p>
+            <a:pPr algn="l"/>
+            <a:r>
+              <a:rPr sz="1400" b="1" i="0">
+                <a:solidFill>
+                  <a:srgbClr val="0284C7"/>
+                </a:solidFill>
+                <a:latin typeface="Space Grotesk"/>
+              </a:rPr>
+              <a:t>Personalization</a:t>
+            </a:r>
+          </a:p>
+        </p:txBody>
+      </p:sp>
+      <p:sp>
+        <p:nvSpPr>
+          <p:cNvPr id="16" name="TextBox 15"/>
+          <p:cNvSpPr txBox="1"/>
+          <p:nvPr/>
+        </p:nvSpPr>
+        <p:spPr>
+          <a:xfrm>
+            <a:off x="9281160" y="2788920"/>
+            <a:ext cx="2103120" cy="1097280"/>
+          </a:xfrm>
+          <a:prstGeom prst="rect">
+            <a:avLst/>
+          </a:prstGeom>
+          <a:noFill/>
+        </p:spPr>
+        <p:txBody>
+          <a:bodyPr wrap="square" tIns="25400" bIns="25400" lIns="25400" rIns="25400" anchor="t">
+            <a:spAutoFit/>
+          </a:bodyPr>
+          <a:lstStyle/>
+          <a:p>
+            <a:pPr algn="l"/>
+            <a:r>
+              <a:rPr sz="1100" b="0" i="0">
+                <a:solidFill>
+                  <a:srgbClr val="1F2937"/>
+                </a:solidFill>
+                <a:latin typeface="Inter"/>
+              </a:rPr>
+              <a:t>We create custom strategies tailored to your specific business goals.</a:t>
+            </a:r>
+          </a:p>
+        </p:txBody>
+      </p:sp>
+      <p:sp>
+        <p:nvSpPr>
+          <p:cNvPr id="17" name="Rounded Rectangle 16"/>
           <p:cNvSpPr/>
           <p:nvPr/>
         </p:nvSpPr>
         <p:spPr>
           <a:xfrm>
-            <a:off x="8138160" y="2651760"/>
-            <a:ext cx="3383280" cy="73152"/>
-          </a:xfrm>
-          <a:prstGeom prst="rect">
-            <a:avLst/>
+            <a:off x="6400800" y="4114799"/>
+            <a:ext cx="2468880" cy="1874519"/>
+          </a:xfrm>
+          <a:prstGeom prst="roundRect">
+            <a:avLst>
+              <a:gd name="adj" fmla="val 4000"/>
+            </a:avLst>
           </a:prstGeom>
           <a:solidFill>
-            <a:srgbClr val="0284C7"/>
+            <a:srgbClr val="F0F9FF"/>
           </a:solidFill>
           <a:ln>
             <a:noFill/>
@@ -6101,8 +11067,8 @@
         </p:nvSpPr>
         <p:spPr>
           <a:xfrm>
-            <a:off x="8412480" y="3017520"/>
-            <a:ext cx="2926080" cy="1280160"/>
+            <a:off x="6629400" y="4343399"/>
+            <a:ext cx="2103120" cy="365760"/>
           </a:xfrm>
           <a:prstGeom prst="rect">
             <a:avLst/>
@@ -6117,13 +11083,13 @@
           <a:p>
             <a:pPr algn="l"/>
             <a:r>
-              <a:rPr sz="5600" b="1">
-                <a:solidFill>
-                  <a:srgbClr val="0369A1"/>
+              <a:rPr sz="1400" b="1" i="0">
+                <a:solidFill>
+                  <a:srgbClr val="0284C7"/>
                 </a:solidFill>
                 <a:latin typeface="Space Grotesk"/>
               </a:rPr>
-              <a:t>3.49%</a:t>
+              <a:t>AI Technology</a:t>
             </a:r>
           </a:p>
         </p:txBody>
@@ -6136,8 +11102,8 @@
         </p:nvSpPr>
         <p:spPr>
           <a:xfrm>
-            <a:off x="8412480" y="4389120"/>
-            <a:ext cx="2926080" cy="914400"/>
+            <a:off x="6629400" y="4800599"/>
+            <a:ext cx="2103120" cy="1097280"/>
           </a:xfrm>
           <a:prstGeom prst="rect">
             <a:avLst/>
@@ -6152,27 +11118,73 @@
           <a:p>
             <a:pPr algn="l"/>
             <a:r>
-              <a:rPr sz="1600" b="1">
-                <a:solidFill>
-                  <a:srgbClr val="0C1A2E"/>
+              <a:rPr sz="1100" b="0" i="0">
+                <a:solidFill>
+                  <a:srgbClr val="1F2937"/>
                 </a:solidFill>
                 <a:latin typeface="Inter"/>
               </a:rPr>
-              <a:t>Conversion rate from AI-search referrals (22% higher than organic)</a:t>
-            </a:r>
-          </a:p>
-        </p:txBody>
-      </p:sp>
-      <p:sp>
-        <p:nvSpPr>
-          <p:cNvPr id="20" name="TextBox 19"/>
-          <p:cNvSpPr txBox="1"/>
-          <p:nvPr/>
-        </p:nvSpPr>
-        <p:spPr>
-          <a:xfrm>
-            <a:off x="8412480" y="5394960"/>
-            <a:ext cx="2926080" cy="365760"/>
+              <a:t>Leverage advanced AI and data analytics to make informed decisions.</a:t>
+            </a:r>
+          </a:p>
+        </p:txBody>
+      </p:sp>
+      <p:sp>
+        <p:nvSpPr>
+          <p:cNvPr id="20" name="Rounded Rectangle 19"/>
+          <p:cNvSpPr/>
+          <p:nvPr/>
+        </p:nvSpPr>
+        <p:spPr>
+          <a:xfrm>
+            <a:off x="9052560" y="4114799"/>
+            <a:ext cx="2468880" cy="1874519"/>
+          </a:xfrm>
+          <a:prstGeom prst="roundRect">
+            <a:avLst>
+              <a:gd name="adj" fmla="val 4000"/>
+            </a:avLst>
+          </a:prstGeom>
+          <a:solidFill>
+            <a:srgbClr val="F0F9FF"/>
+          </a:solidFill>
+          <a:ln>
+            <a:noFill/>
+          </a:ln>
+          <a:effectLst/>
+        </p:spPr>
+        <p:style>
+          <a:lnRef idx="1">
+            <a:schemeClr val="accent1"/>
+          </a:lnRef>
+          <a:fillRef idx="3">
+            <a:schemeClr val="accent1"/>
+          </a:fillRef>
+          <a:effectRef idx="2">
+            <a:schemeClr val="accent1"/>
+          </a:effectRef>
+          <a:fontRef idx="minor">
+            <a:schemeClr val="lt1"/>
+          </a:fontRef>
+        </p:style>
+        <p:txBody>
+          <a:bodyPr rtlCol="0" anchor="ctr"/>
+          <a:lstStyle/>
+          <a:p>
+            <a:pPr algn="ctr"/>
+          </a:p>
+        </p:txBody>
+      </p:sp>
+      <p:sp>
+        <p:nvSpPr>
+          <p:cNvPr id="21" name="TextBox 20"/>
+          <p:cNvSpPr txBox="1"/>
+          <p:nvPr/>
+        </p:nvSpPr>
+        <p:spPr>
+          <a:xfrm>
+            <a:off x="9281160" y="4343399"/>
+            <a:ext cx="2103120" cy="365760"/>
           </a:xfrm>
           <a:prstGeom prst="rect">
             <a:avLst/>
@@ -6187,20 +11199,55 @@
           <a:p>
             <a:pPr algn="l"/>
             <a:r>
-              <a:rPr sz="1100" b="0">
-                <a:solidFill>
-                  <a:srgbClr val="64748B"/>
+              <a:rPr sz="1400" b="1" i="0">
+                <a:solidFill>
+                  <a:srgbClr val="0284C7"/>
+                </a:solidFill>
+                <a:latin typeface="Space Grotesk"/>
+              </a:rPr>
+              <a:t>Proven Results</a:t>
+            </a:r>
+          </a:p>
+        </p:txBody>
+      </p:sp>
+      <p:sp>
+        <p:nvSpPr>
+          <p:cNvPr id="22" name="TextBox 21"/>
+          <p:cNvSpPr txBox="1"/>
+          <p:nvPr/>
+        </p:nvSpPr>
+        <p:spPr>
+          <a:xfrm>
+            <a:off x="9281160" y="4800599"/>
+            <a:ext cx="2103120" cy="1097280"/>
+          </a:xfrm>
+          <a:prstGeom prst="rect">
+            <a:avLst/>
+          </a:prstGeom>
+          <a:noFill/>
+        </p:spPr>
+        <p:txBody>
+          <a:bodyPr wrap="square" tIns="25400" bIns="25400" lIns="25400" rIns="25400" anchor="t">
+            <a:spAutoFit/>
+          </a:bodyPr>
+          <a:lstStyle/>
+          <a:p>
+            <a:pPr algn="l"/>
+            <a:r>
+              <a:rPr sz="1100" b="0" i="0">
+                <a:solidFill>
+                  <a:srgbClr val="1F2937"/>
                 </a:solidFill>
                 <a:latin typeface="Inter"/>
               </a:rPr>
-              <a:t>Martal 2026 benchmark</a:t>
-            </a:r>
-          </a:p>
-        </p:txBody>
-      </p:sp>
-      <p:sp>
-        <p:nvSpPr>
-          <p:cNvPr id="21" name="Rectangle 20"/>
+              <a:t>We focus on delivering measurable outcomes with clear KPIs.</a:t>
+            </a:r>
+          </a:p>
+        </p:txBody>
+      </p:sp>
+      <p:sp>
+        <p:nvSpPr>
+          <p:cNvPr id="23" name="Rectangle 22"/>
           <p:cNvSpPr/>
           <p:nvPr/>
         </p:nvSpPr>
@@ -6244,7 +11291,7 @@
       </p:sp>
       <p:sp>
         <p:nvSpPr>
-          <p:cNvPr id="22" name="TextBox 21"/>
+          <p:cNvPr id="24" name="TextBox 23"/>
           <p:cNvSpPr txBox="1"/>
           <p:nvPr/>
         </p:nvSpPr>
@@ -6266,7 +11313,7 @@
           <a:p>
             <a:pPr algn="l"/>
             <a:r>
-              <a:rPr sz="900" b="1">
+              <a:rPr sz="900" b="1" i="0">
                 <a:solidFill>
                   <a:srgbClr val="0284C7"/>
                 </a:solidFill>
@@ -6279,7 +11326,7 @@
       </p:sp>
       <p:sp>
         <p:nvSpPr>
-          <p:cNvPr id="23" name="TextBox 22"/>
+          <p:cNvPr id="25" name="TextBox 24"/>
           <p:cNvSpPr txBox="1"/>
           <p:nvPr/>
         </p:nvSpPr>
@@ -6301,13 +11348,13 @@
           <a:p>
             <a:pPr algn="r"/>
             <a:r>
-              <a:rPr sz="900" b="0">
+              <a:rPr sz="900" b="0" i="0">
                 <a:solidFill>
                   <a:srgbClr val="64748B"/>
                 </a:solidFill>
                 <a:latin typeface="Inter"/>
               </a:rPr>
-              <a:t>7 / 8</a:t>
+              <a:t>7 / 12</a:t>
             </a:r>
           </a:p>
         </p:txBody>
@@ -6374,16 +11421,261 @@
           </a:p>
         </p:txBody>
       </p:sp>
-      <p:sp>
-        <p:nvSpPr>
-          <p:cNvPr id="3" name="Rectangle 2"/>
+      <p:cxnSp>
+        <p:nvCxnSpPr>
+          <p:cNvPr id="3" name="Connector 2"/>
+          <p:cNvCxnSpPr/>
+          <p:nvPr/>
+        </p:nvCxnSpPr>
+        <p:spPr>
+          <a:xfrm>
+            <a:off x="365760" y="365760"/>
+            <a:ext cx="1097280" cy="1828800"/>
+          </a:xfrm>
+          <a:prstGeom prst="line">
+            <a:avLst/>
+          </a:prstGeom>
+          <a:ln w="7620">
+            <a:solidFill>
+              <a:srgbClr val="38BDF8"/>
+            </a:solidFill>
+          </a:ln>
+        </p:spPr>
+        <p:style>
+          <a:lnRef idx="2">
+            <a:schemeClr val="accent1"/>
+          </a:lnRef>
+          <a:fillRef idx="0">
+            <a:schemeClr val="accent1"/>
+          </a:fillRef>
+          <a:effectRef idx="1">
+            <a:schemeClr val="accent1"/>
+          </a:effectRef>
+          <a:fontRef idx="minor">
+            <a:schemeClr val="tx1"/>
+          </a:fontRef>
+        </p:style>
+      </p:cxnSp>
+      <p:cxnSp>
+        <p:nvCxnSpPr>
+          <p:cNvPr id="4" name="Connector 3"/>
+          <p:cNvCxnSpPr/>
+          <p:nvPr/>
+        </p:nvCxnSpPr>
+        <p:spPr>
+          <a:xfrm>
+            <a:off x="914400" y="365760"/>
+            <a:ext cx="1097279" cy="1828800"/>
+          </a:xfrm>
+          <a:prstGeom prst="line">
+            <a:avLst/>
+          </a:prstGeom>
+          <a:ln w="7620">
+            <a:solidFill>
+              <a:srgbClr val="38BDF8"/>
+            </a:solidFill>
+          </a:ln>
+        </p:spPr>
+        <p:style>
+          <a:lnRef idx="2">
+            <a:schemeClr val="accent1"/>
+          </a:lnRef>
+          <a:fillRef idx="0">
+            <a:schemeClr val="accent1"/>
+          </a:fillRef>
+          <a:effectRef idx="1">
+            <a:schemeClr val="accent1"/>
+          </a:effectRef>
+          <a:fontRef idx="minor">
+            <a:schemeClr val="tx1"/>
+          </a:fontRef>
+        </p:style>
+      </p:cxnSp>
+      <p:cxnSp>
+        <p:nvCxnSpPr>
+          <p:cNvPr id="5" name="Connector 4"/>
+          <p:cNvCxnSpPr/>
+          <p:nvPr/>
+        </p:nvCxnSpPr>
+        <p:spPr>
+          <a:xfrm>
+            <a:off x="1463040" y="365760"/>
+            <a:ext cx="1097280" cy="1828800"/>
+          </a:xfrm>
+          <a:prstGeom prst="line">
+            <a:avLst/>
+          </a:prstGeom>
+          <a:ln w="7620">
+            <a:solidFill>
+              <a:srgbClr val="38BDF8"/>
+            </a:solidFill>
+          </a:ln>
+        </p:spPr>
+        <p:style>
+          <a:lnRef idx="2">
+            <a:schemeClr val="accent1"/>
+          </a:lnRef>
+          <a:fillRef idx="0">
+            <a:schemeClr val="accent1"/>
+          </a:fillRef>
+          <a:effectRef idx="1">
+            <a:schemeClr val="accent1"/>
+          </a:effectRef>
+          <a:fontRef idx="minor">
+            <a:schemeClr val="tx1"/>
+          </a:fontRef>
+        </p:style>
+      </p:cxnSp>
+      <p:cxnSp>
+        <p:nvCxnSpPr>
+          <p:cNvPr id="6" name="Connector 5"/>
+          <p:cNvCxnSpPr/>
+          <p:nvPr/>
+        </p:nvCxnSpPr>
+        <p:spPr>
+          <a:xfrm>
+            <a:off x="2011679" y="365760"/>
+            <a:ext cx="1097281" cy="1828800"/>
+          </a:xfrm>
+          <a:prstGeom prst="line">
+            <a:avLst/>
+          </a:prstGeom>
+          <a:ln w="7620">
+            <a:solidFill>
+              <a:srgbClr val="38BDF8"/>
+            </a:solidFill>
+          </a:ln>
+        </p:spPr>
+        <p:style>
+          <a:lnRef idx="2">
+            <a:schemeClr val="accent1"/>
+          </a:lnRef>
+          <a:fillRef idx="0">
+            <a:schemeClr val="accent1"/>
+          </a:fillRef>
+          <a:effectRef idx="1">
+            <a:schemeClr val="accent1"/>
+          </a:effectRef>
+          <a:fontRef idx="minor">
+            <a:schemeClr val="tx1"/>
+          </a:fontRef>
+        </p:style>
+      </p:cxnSp>
+      <p:cxnSp>
+        <p:nvCxnSpPr>
+          <p:cNvPr id="7" name="Connector 6"/>
+          <p:cNvCxnSpPr/>
+          <p:nvPr/>
+        </p:nvCxnSpPr>
+        <p:spPr>
+          <a:xfrm>
+            <a:off x="2560320" y="365760"/>
+            <a:ext cx="1097279" cy="1828800"/>
+          </a:xfrm>
+          <a:prstGeom prst="line">
+            <a:avLst/>
+          </a:prstGeom>
+          <a:ln w="7620">
+            <a:solidFill>
+              <a:srgbClr val="38BDF8"/>
+            </a:solidFill>
+          </a:ln>
+        </p:spPr>
+        <p:style>
+          <a:lnRef idx="2">
+            <a:schemeClr val="accent1"/>
+          </a:lnRef>
+          <a:fillRef idx="0">
+            <a:schemeClr val="accent1"/>
+          </a:fillRef>
+          <a:effectRef idx="1">
+            <a:schemeClr val="accent1"/>
+          </a:effectRef>
+          <a:fontRef idx="minor">
+            <a:schemeClr val="tx1"/>
+          </a:fontRef>
+        </p:style>
+      </p:cxnSp>
+      <p:sp>
+        <p:nvSpPr>
+          <p:cNvPr id="8" name="TextBox 7"/>
+          <p:cNvSpPr txBox="1"/>
+          <p:nvPr/>
+        </p:nvSpPr>
+        <p:spPr>
+          <a:xfrm>
+            <a:off x="914400" y="914400"/>
+            <a:ext cx="10058400" cy="457200"/>
+          </a:xfrm>
+          <a:prstGeom prst="rect">
+            <a:avLst/>
+          </a:prstGeom>
+          <a:noFill/>
+        </p:spPr>
+        <p:txBody>
+          <a:bodyPr wrap="square" tIns="25400" bIns="25400" lIns="25400" rIns="25400" anchor="t">
+            <a:spAutoFit/>
+          </a:bodyPr>
+          <a:lstStyle/>
+          <a:p>
+            <a:pPr algn="l"/>
+            <a:r>
+              <a:rPr sz="1400" b="1" i="0">
+                <a:solidFill>
+                  <a:srgbClr val="38BDF8"/>
+                </a:solidFill>
+                <a:latin typeface="Space Grotesk"/>
+              </a:rPr>
+              <a:t>THE NUMBER THAT MATTERS</a:t>
+            </a:r>
+          </a:p>
+        </p:txBody>
+      </p:sp>
+      <p:sp>
+        <p:nvSpPr>
+          <p:cNvPr id="9" name="TextBox 8"/>
+          <p:cNvSpPr txBox="1"/>
+          <p:nvPr/>
+        </p:nvSpPr>
+        <p:spPr>
+          <a:xfrm>
+            <a:off x="914400" y="1645920"/>
+            <a:ext cx="10058400" cy="2560320"/>
+          </a:xfrm>
+          <a:prstGeom prst="rect">
+            <a:avLst/>
+          </a:prstGeom>
+          <a:noFill/>
+        </p:spPr>
+        <p:txBody>
+          <a:bodyPr wrap="square" tIns="25400" bIns="25400" lIns="25400" rIns="25400" anchor="t">
+            <a:spAutoFit/>
+          </a:bodyPr>
+          <a:lstStyle/>
+          <a:p>
+            <a:pPr algn="l"/>
+            <a:r>
+              <a:rPr sz="17000" b="1" i="0">
+                <a:solidFill>
+                  <a:srgbClr val="FFFFFF"/>
+                </a:solidFill>
+                <a:latin typeface="Space Grotesk"/>
+              </a:rPr>
+              <a:t>527%</a:t>
+            </a:r>
+          </a:p>
+        </p:txBody>
+      </p:sp>
+      <p:sp>
+        <p:nvSpPr>
+          <p:cNvPr id="10" name="Rectangle 9"/>
           <p:cNvSpPr/>
           <p:nvPr/>
         </p:nvSpPr>
         <p:spPr>
           <a:xfrm>
-            <a:off x="0" y="6748272"/>
-            <a:ext cx="12191695" cy="109728"/>
+            <a:off x="914400" y="4297680"/>
+            <a:ext cx="548640" cy="50800"/>
           </a:xfrm>
           <a:prstGeom prst="rect">
             <a:avLst/>
@@ -6420,13 +11712,48 @@
       </p:sp>
       <p:sp>
         <p:nvSpPr>
-          <p:cNvPr id="4" name="TextBox 3"/>
-          <p:cNvSpPr txBox="1"/>
-          <p:nvPr/>
-        </p:nvSpPr>
-        <p:spPr>
-          <a:xfrm>
-            <a:off x="914400" y="1828800"/>
+          <p:cNvPr id="11" name="TextBox 10"/>
+          <p:cNvSpPr txBox="1"/>
+          <p:nvPr/>
+        </p:nvSpPr>
+        <p:spPr>
+          <a:xfrm>
+            <a:off x="914400" y="4434840"/>
+            <a:ext cx="10058400" cy="640080"/>
+          </a:xfrm>
+          <a:prstGeom prst="rect">
+            <a:avLst/>
+          </a:prstGeom>
+          <a:noFill/>
+        </p:spPr>
+        <p:txBody>
+          <a:bodyPr wrap="square" tIns="25400" bIns="25400" lIns="25400" rIns="25400" anchor="t">
+            <a:spAutoFit/>
+          </a:bodyPr>
+          <a:lstStyle/>
+          <a:p>
+            <a:pPr algn="l"/>
+            <a:r>
+              <a:rPr sz="2600" b="0" i="0">
+                <a:solidFill>
+                  <a:srgbClr val="FFFFFF"/>
+                </a:solidFill>
+                <a:latin typeface="Space Grotesk"/>
+              </a:rPr>
+              <a:t>Year-over-year growth in AI-referred sessions</a:t>
+            </a:r>
+          </a:p>
+        </p:txBody>
+      </p:sp>
+      <p:sp>
+        <p:nvSpPr>
+          <p:cNvPr id="12" name="TextBox 11"/>
+          <p:cNvSpPr txBox="1"/>
+          <p:nvPr/>
+        </p:nvSpPr>
+        <p:spPr>
+          <a:xfrm>
+            <a:off x="914400" y="5212080"/>
             <a:ext cx="10058400" cy="457200"/>
           </a:xfrm>
           <a:prstGeom prst="rect">
@@ -6442,105 +11769,33 @@
           <a:p>
             <a:pPr algn="l"/>
             <a:r>
-              <a:rPr sz="1400" b="1">
-                <a:solidFill>
-                  <a:srgbClr val="0284C7"/>
-                </a:solidFill>
-                <a:latin typeface="Space Grotesk"/>
-              </a:rPr>
-              <a:t>NEXT STEP</a:t>
-            </a:r>
-          </a:p>
-        </p:txBody>
-      </p:sp>
-      <p:sp>
-        <p:nvSpPr>
-          <p:cNvPr id="5" name="TextBox 4"/>
-          <p:cNvSpPr txBox="1"/>
-          <p:nvPr/>
-        </p:nvSpPr>
-        <p:spPr>
-          <a:xfrm>
-            <a:off x="914400" y="2286000"/>
-            <a:ext cx="10058400" cy="1828800"/>
-          </a:xfrm>
-          <a:prstGeom prst="rect">
-            <a:avLst/>
-          </a:prstGeom>
-          <a:noFill/>
-        </p:spPr>
-        <p:txBody>
-          <a:bodyPr wrap="square" tIns="25400" bIns="25400" lIns="25400" rIns="25400" anchor="t">
-            <a:spAutoFit/>
-          </a:bodyPr>
-          <a:lstStyle/>
-          <a:p>
-            <a:pPr algn="l"/>
-            <a:r>
-              <a:rPr sz="4400" b="1">
-                <a:solidFill>
-                  <a:srgbClr val="FFFFFF"/>
-                </a:solidFill>
-                <a:latin typeface="Space Grotesk"/>
-              </a:rPr>
-              <a:t>Let's plug the leaks in your funnel.</a:t>
-            </a:r>
-          </a:p>
-        </p:txBody>
-      </p:sp>
-      <p:sp>
-        <p:nvSpPr>
-          <p:cNvPr id="6" name="TextBox 5"/>
-          <p:cNvSpPr txBox="1"/>
-          <p:nvPr/>
-        </p:nvSpPr>
-        <p:spPr>
-          <a:xfrm>
-            <a:off x="914400" y="4114800"/>
-            <a:ext cx="10058400" cy="548640"/>
-          </a:xfrm>
-          <a:prstGeom prst="rect">
-            <a:avLst/>
-          </a:prstGeom>
-          <a:noFill/>
-        </p:spPr>
-        <p:txBody>
-          <a:bodyPr wrap="square" tIns="25400" bIns="25400" lIns="25400" rIns="25400" anchor="t">
-            <a:spAutoFit/>
-          </a:bodyPr>
-          <a:lstStyle/>
-          <a:p>
-            <a:pPr algn="l"/>
-            <a:r>
-              <a:rPr sz="2000" b="0">
-                <a:solidFill>
-                  <a:srgbClr val="E2E8F0"/>
+              <a:rPr sz="1400" b="0" i="0">
+                <a:solidFill>
+                  <a:srgbClr val="64748B"/>
                 </a:solidFill>
                 <a:latin typeface="Inter"/>
               </a:rPr>
-              <a:t>Book a free UNIFY audit, 30 minutes, no slide deck on our side.</a:t>
-            </a:r>
-          </a:p>
-        </p:txBody>
-      </p:sp>
-      <p:sp>
-        <p:nvSpPr>
-          <p:cNvPr id="7" name="Rounded Rectangle 6"/>
+              <a:t>Source: Frase, January 2026</a:t>
+            </a:r>
+          </a:p>
+        </p:txBody>
+      </p:sp>
+      <p:sp>
+        <p:nvSpPr>
+          <p:cNvPr id="13" name="Rectangle 12"/>
           <p:cNvSpPr/>
           <p:nvPr/>
         </p:nvSpPr>
         <p:spPr>
           <a:xfrm>
-            <a:off x="914400" y="5120640"/>
-            <a:ext cx="2926080" cy="640080"/>
-          </a:xfrm>
-          <a:prstGeom prst="roundRect">
-            <a:avLst>
-              <a:gd name="adj" fmla="val 50000"/>
-            </a:avLst>
+            <a:off x="0" y="6720840"/>
+            <a:ext cx="12191695" cy="137160"/>
+          </a:xfrm>
+          <a:prstGeom prst="rect">
+            <a:avLst/>
           </a:prstGeom>
           <a:solidFill>
-            <a:srgbClr val="0284C7"/>
+            <a:srgbClr val="E2E8F0"/>
           </a:solidFill>
           <a:ln>
             <a:noFill/>
@@ -6571,35 +11826,548 @@
       </p:sp>
       <p:sp>
         <p:nvSpPr>
-          <p:cNvPr id="8" name="TextBox 7"/>
-          <p:cNvSpPr txBox="1"/>
-          <p:nvPr/>
-        </p:nvSpPr>
-        <p:spPr>
-          <a:xfrm>
-            <a:off x="914400" y="5120640"/>
-            <a:ext cx="2926080" cy="640080"/>
-          </a:xfrm>
-          <a:prstGeom prst="rect">
-            <a:avLst/>
-          </a:prstGeom>
-          <a:noFill/>
-        </p:spPr>
-        <p:txBody>
-          <a:bodyPr wrap="square" tIns="25400" bIns="25400" lIns="25400" rIns="25400" anchor="ctr">
-            <a:spAutoFit/>
-          </a:bodyPr>
+          <p:cNvPr id="14" name="TextBox 13"/>
+          <p:cNvSpPr txBox="1"/>
+          <p:nvPr/>
+        </p:nvSpPr>
+        <p:spPr>
+          <a:xfrm>
+            <a:off x="457200" y="6565392"/>
+            <a:ext cx="3657600" cy="228600"/>
+          </a:xfrm>
+          <a:prstGeom prst="rect">
+            <a:avLst/>
+          </a:prstGeom>
+          <a:noFill/>
+        </p:spPr>
+        <p:txBody>
+          <a:bodyPr wrap="square" tIns="25400" bIns="25400" lIns="25400" rIns="25400" anchor="t">
+            <a:spAutoFit/>
+          </a:bodyPr>
+          <a:lstStyle/>
+          <a:p>
+            <a:pPr algn="l"/>
+            <a:r>
+              <a:rPr sz="900" b="1" i="0">
+                <a:solidFill>
+                  <a:srgbClr val="0284C7"/>
+                </a:solidFill>
+                <a:latin typeface="Space Grotesk"/>
+              </a:rPr>
+              <a:t>Booming Venture</a:t>
+            </a:r>
+          </a:p>
+        </p:txBody>
+      </p:sp>
+      <p:sp>
+        <p:nvSpPr>
+          <p:cNvPr id="15" name="TextBox 14"/>
+          <p:cNvSpPr txBox="1"/>
+          <p:nvPr/>
+        </p:nvSpPr>
+        <p:spPr>
+          <a:xfrm>
+            <a:off x="10058400" y="6565392"/>
+            <a:ext cx="1828800" cy="228600"/>
+          </a:xfrm>
+          <a:prstGeom prst="rect">
+            <a:avLst/>
+          </a:prstGeom>
+          <a:noFill/>
+        </p:spPr>
+        <p:txBody>
+          <a:bodyPr wrap="square" tIns="25400" bIns="25400" lIns="25400" rIns="25400" anchor="t">
+            <a:spAutoFit/>
+          </a:bodyPr>
+          <a:lstStyle/>
+          <a:p>
+            <a:pPr algn="r"/>
+            <a:r>
+              <a:rPr sz="900" b="0" i="0">
+                <a:solidFill>
+                  <a:srgbClr val="64748B"/>
+                </a:solidFill>
+                <a:latin typeface="Inter"/>
+              </a:rPr>
+              <a:t>8 / 12</a:t>
+            </a:r>
+          </a:p>
+        </p:txBody>
+      </p:sp>
+    </p:spTree>
+  </p:cSld>
+  <p:clrMapOvr>
+    <a:masterClrMapping/>
+  </p:clrMapOvr>
+</p:sld>
+</file>
+
+<file path=ppt/slides/slide9.xml><?xml version="1.0" encoding="utf-8"?>
+<p:sld xmlns:a="http://schemas.openxmlformats.org/drawingml/2006/main" xmlns:p="http://schemas.openxmlformats.org/presentationml/2006/main" xmlns:r="http://schemas.openxmlformats.org/officeDocument/2006/relationships">
+  <p:cSld>
+    <p:spTree>
+      <p:nvGrpSpPr>
+        <p:cNvPr id="1" name=""/>
+        <p:cNvGrpSpPr/>
+        <p:nvPr/>
+      </p:nvGrpSpPr>
+      <p:grpSpPr/>
+      <p:sp>
+        <p:nvSpPr>
+          <p:cNvPr id="2" name="Rectangle 1"/>
+          <p:cNvSpPr/>
+          <p:nvPr/>
+        </p:nvSpPr>
+        <p:spPr>
+          <a:xfrm>
+            <a:off x="0" y="0"/>
+            <a:ext cx="12191695" cy="6858000"/>
+          </a:xfrm>
+          <a:prstGeom prst="rect">
+            <a:avLst/>
+          </a:prstGeom>
+          <a:solidFill>
+            <a:srgbClr val="F0F9FF"/>
+          </a:solidFill>
+          <a:ln>
+            <a:noFill/>
+          </a:ln>
+          <a:effectLst/>
+        </p:spPr>
+        <p:style>
+          <a:lnRef idx="1">
+            <a:schemeClr val="accent1"/>
+          </a:lnRef>
+          <a:fillRef idx="3">
+            <a:schemeClr val="accent1"/>
+          </a:fillRef>
+          <a:effectRef idx="2">
+            <a:schemeClr val="accent1"/>
+          </a:effectRef>
+          <a:fontRef idx="minor">
+            <a:schemeClr val="lt1"/>
+          </a:fontRef>
+        </p:style>
+        <p:txBody>
+          <a:bodyPr rtlCol="0" anchor="ctr"/>
           <a:lstStyle/>
           <a:p>
             <a:pPr algn="ctr"/>
-            <a:r>
-              <a:rPr sz="1600" b="1">
-                <a:solidFill>
-                  <a:srgbClr val="FFFFFF"/>
+          </a:p>
+        </p:txBody>
+      </p:sp>
+      <p:sp>
+        <p:nvSpPr>
+          <p:cNvPr id="3" name="TextBox 2"/>
+          <p:cNvSpPr txBox="1"/>
+          <p:nvPr/>
+        </p:nvSpPr>
+        <p:spPr>
+          <a:xfrm>
+            <a:off x="914400" y="640080"/>
+            <a:ext cx="10058400" cy="640080"/>
+          </a:xfrm>
+          <a:prstGeom prst="rect">
+            <a:avLst/>
+          </a:prstGeom>
+          <a:noFill/>
+        </p:spPr>
+        <p:txBody>
+          <a:bodyPr wrap="square" tIns="25400" bIns="25400" lIns="25400" rIns="25400" anchor="t">
+            <a:spAutoFit/>
+          </a:bodyPr>
+          <a:lstStyle/>
+          <a:p>
+            <a:pPr algn="ctr"/>
+            <a:r>
+              <a:rPr sz="2800" b="1" i="0">
+                <a:solidFill>
+                  <a:srgbClr val="0C1A2E"/>
                 </a:solidFill>
                 <a:latin typeface="Space Grotesk"/>
               </a:rPr>
-              <a:t>boomingventure.com</a:t>
+              <a:t>Client Success Stories</a:t>
+            </a:r>
+          </a:p>
+        </p:txBody>
+      </p:sp>
+      <p:sp>
+        <p:nvSpPr>
+          <p:cNvPr id="4" name="TextBox 3"/>
+          <p:cNvSpPr txBox="1"/>
+          <p:nvPr/>
+        </p:nvSpPr>
+        <p:spPr>
+          <a:xfrm>
+            <a:off x="914400" y="1280160"/>
+            <a:ext cx="10058400" cy="457200"/>
+          </a:xfrm>
+          <a:prstGeom prst="rect">
+            <a:avLst/>
+          </a:prstGeom>
+          <a:noFill/>
+        </p:spPr>
+        <p:txBody>
+          <a:bodyPr wrap="square" tIns="25400" bIns="25400" lIns="25400" rIns="25400" anchor="t">
+            <a:spAutoFit/>
+          </a:bodyPr>
+          <a:lstStyle/>
+          <a:p>
+            <a:pPr algn="ctr"/>
+            <a:r>
+              <a:rPr sz="1300" b="0" i="0">
+                <a:solidFill>
+                  <a:srgbClr val="64748B"/>
+                </a:solidFill>
+                <a:latin typeface="Inter"/>
+              </a:rPr>
+              <a:t>Hear from businesses we've helped scale through innovative strategies</a:t>
+            </a:r>
+          </a:p>
+        </p:txBody>
+      </p:sp>
+      <p:sp>
+        <p:nvSpPr>
+          <p:cNvPr id="5" name="Rounded Rectangle 4"/>
+          <p:cNvSpPr/>
+          <p:nvPr/>
+        </p:nvSpPr>
+        <p:spPr>
+          <a:xfrm>
+            <a:off x="1188720" y="2194560"/>
+            <a:ext cx="9784080" cy="3840480"/>
+          </a:xfrm>
+          <a:prstGeom prst="roundRect">
+            <a:avLst>
+              <a:gd name="adj" fmla="val 3000"/>
+            </a:avLst>
+          </a:prstGeom>
+          <a:solidFill>
+            <a:srgbClr val="FFFFFF"/>
+          </a:solidFill>
+          <a:ln w="9525">
+            <a:solidFill>
+              <a:srgbClr val="E2E8F0"/>
+            </a:solidFill>
+          </a:ln>
+          <a:effectLst/>
+        </p:spPr>
+        <p:style>
+          <a:lnRef idx="1">
+            <a:schemeClr val="accent1"/>
+          </a:lnRef>
+          <a:fillRef idx="3">
+            <a:schemeClr val="accent1"/>
+          </a:fillRef>
+          <a:effectRef idx="2">
+            <a:schemeClr val="accent1"/>
+          </a:effectRef>
+          <a:fontRef idx="minor">
+            <a:schemeClr val="lt1"/>
+          </a:fontRef>
+        </p:style>
+        <p:txBody>
+          <a:bodyPr rtlCol="0" anchor="ctr"/>
+          <a:lstStyle/>
+          <a:p>
+            <a:pPr algn="ctr"/>
+          </a:p>
+        </p:txBody>
+      </p:sp>
+      <p:sp>
+        <p:nvSpPr>
+          <p:cNvPr id="6" name="TextBox 5"/>
+          <p:cNvSpPr txBox="1"/>
+          <p:nvPr/>
+        </p:nvSpPr>
+        <p:spPr>
+          <a:xfrm>
+            <a:off x="1828800" y="2377440"/>
+            <a:ext cx="1828800" cy="1828800"/>
+          </a:xfrm>
+          <a:prstGeom prst="rect">
+            <a:avLst/>
+          </a:prstGeom>
+          <a:noFill/>
+        </p:spPr>
+        <p:txBody>
+          <a:bodyPr wrap="square" tIns="25400" bIns="25400" lIns="25400" rIns="25400" anchor="t">
+            <a:spAutoFit/>
+          </a:bodyPr>
+          <a:lstStyle/>
+          <a:p>
+            <a:pPr algn="l"/>
+            <a:r>
+              <a:rPr sz="14000" b="1" i="0">
+                <a:solidFill>
+                  <a:srgbClr val="7DD3FC"/>
+                </a:solidFill>
+                <a:latin typeface="Space Grotesk"/>
+              </a:rPr>
+              <a:t>“</a:t>
+            </a:r>
+          </a:p>
+        </p:txBody>
+      </p:sp>
+      <p:sp>
+        <p:nvSpPr>
+          <p:cNvPr id="7" name="TextBox 6"/>
+          <p:cNvSpPr txBox="1"/>
+          <p:nvPr/>
+        </p:nvSpPr>
+        <p:spPr>
+          <a:xfrm>
+            <a:off x="3474720" y="2926080"/>
+            <a:ext cx="6583680" cy="1828800"/>
+          </a:xfrm>
+          <a:prstGeom prst="rect">
+            <a:avLst/>
+          </a:prstGeom>
+          <a:noFill/>
+        </p:spPr>
+        <p:txBody>
+          <a:bodyPr wrap="square" tIns="25400" bIns="25400" lIns="25400" rIns="25400" anchor="t">
+            <a:spAutoFit/>
+          </a:bodyPr>
+          <a:lstStyle/>
+          <a:p>
+            <a:pPr algn="l"/>
+            <a:r>
+              <a:rPr sz="2000" b="1" i="1">
+                <a:solidFill>
+                  <a:srgbClr val="0C1A2E"/>
+                </a:solidFill>
+                <a:latin typeface="Space Grotesk"/>
+              </a:rPr>
+              <a:t>Booming Venture transformed our marketing strategy completely. Their AI-driven approach increased our conversion rates by 42% in just three months.</a:t>
+            </a:r>
+          </a:p>
+        </p:txBody>
+      </p:sp>
+      <p:sp>
+        <p:nvSpPr>
+          <p:cNvPr id="8" name="Rectangle 7"/>
+          <p:cNvSpPr/>
+          <p:nvPr/>
+        </p:nvSpPr>
+        <p:spPr>
+          <a:xfrm>
+            <a:off x="3474720" y="4983480"/>
+            <a:ext cx="457200" cy="38100"/>
+          </a:xfrm>
+          <a:prstGeom prst="rect">
+            <a:avLst/>
+          </a:prstGeom>
+          <a:solidFill>
+            <a:srgbClr val="14B8A6"/>
+          </a:solidFill>
+          <a:ln>
+            <a:noFill/>
+          </a:ln>
+          <a:effectLst/>
+        </p:spPr>
+        <p:style>
+          <a:lnRef idx="1">
+            <a:schemeClr val="accent1"/>
+          </a:lnRef>
+          <a:fillRef idx="3">
+            <a:schemeClr val="accent1"/>
+          </a:fillRef>
+          <a:effectRef idx="2">
+            <a:schemeClr val="accent1"/>
+          </a:effectRef>
+          <a:fontRef idx="minor">
+            <a:schemeClr val="lt1"/>
+          </a:fontRef>
+        </p:style>
+        <p:txBody>
+          <a:bodyPr rtlCol="0" anchor="ctr"/>
+          <a:lstStyle/>
+          <a:p>
+            <a:pPr algn="ctr"/>
+          </a:p>
+        </p:txBody>
+      </p:sp>
+      <p:sp>
+        <p:nvSpPr>
+          <p:cNvPr id="9" name="TextBox 8"/>
+          <p:cNvSpPr txBox="1"/>
+          <p:nvPr/>
+        </p:nvSpPr>
+        <p:spPr>
+          <a:xfrm>
+            <a:off x="3474720" y="5120640"/>
+            <a:ext cx="6583680" cy="365760"/>
+          </a:xfrm>
+          <a:prstGeom prst="rect">
+            <a:avLst/>
+          </a:prstGeom>
+          <a:noFill/>
+        </p:spPr>
+        <p:txBody>
+          <a:bodyPr wrap="square" tIns="25400" bIns="25400" lIns="25400" rIns="25400" anchor="t">
+            <a:spAutoFit/>
+          </a:bodyPr>
+          <a:lstStyle/>
+          <a:p>
+            <a:pPr algn="l"/>
+            <a:r>
+              <a:rPr sz="1400" b="1" i="0">
+                <a:solidFill>
+                  <a:srgbClr val="1F2937"/>
+                </a:solidFill>
+                <a:latin typeface="Inter"/>
+              </a:rPr>
+              <a:t>Sarah Johnson  ,  CEO</a:t>
+            </a:r>
+          </a:p>
+        </p:txBody>
+      </p:sp>
+      <p:sp>
+        <p:nvSpPr>
+          <p:cNvPr id="10" name="TextBox 9"/>
+          <p:cNvSpPr txBox="1"/>
+          <p:nvPr/>
+        </p:nvSpPr>
+        <p:spPr>
+          <a:xfrm>
+            <a:off x="3474720" y="5440680"/>
+            <a:ext cx="6583680" cy="365760"/>
+          </a:xfrm>
+          <a:prstGeom prst="rect">
+            <a:avLst/>
+          </a:prstGeom>
+          <a:noFill/>
+        </p:spPr>
+        <p:txBody>
+          <a:bodyPr wrap="square" tIns="25400" bIns="25400" lIns="25400" rIns="25400" anchor="t">
+            <a:spAutoFit/>
+          </a:bodyPr>
+          <a:lstStyle/>
+          <a:p>
+            <a:pPr algn="l"/>
+            <a:r>
+              <a:rPr sz="1100" b="0" i="0">
+                <a:solidFill>
+                  <a:srgbClr val="64748B"/>
+                </a:solidFill>
+                <a:latin typeface="Inter"/>
+              </a:rPr>
+              <a:t>Strategic Partnership</a:t>
+            </a:r>
+          </a:p>
+        </p:txBody>
+      </p:sp>
+      <p:sp>
+        <p:nvSpPr>
+          <p:cNvPr id="11" name="Rectangle 10"/>
+          <p:cNvSpPr/>
+          <p:nvPr/>
+        </p:nvSpPr>
+        <p:spPr>
+          <a:xfrm>
+            <a:off x="0" y="6720840"/>
+            <a:ext cx="12191695" cy="137160"/>
+          </a:xfrm>
+          <a:prstGeom prst="rect">
+            <a:avLst/>
+          </a:prstGeom>
+          <a:solidFill>
+            <a:srgbClr val="E2E8F0"/>
+          </a:solidFill>
+          <a:ln>
+            <a:noFill/>
+          </a:ln>
+          <a:effectLst/>
+        </p:spPr>
+        <p:style>
+          <a:lnRef idx="1">
+            <a:schemeClr val="accent1"/>
+          </a:lnRef>
+          <a:fillRef idx="3">
+            <a:schemeClr val="accent1"/>
+          </a:fillRef>
+          <a:effectRef idx="2">
+            <a:schemeClr val="accent1"/>
+          </a:effectRef>
+          <a:fontRef idx="minor">
+            <a:schemeClr val="lt1"/>
+          </a:fontRef>
+        </p:style>
+        <p:txBody>
+          <a:bodyPr rtlCol="0" anchor="ctr"/>
+          <a:lstStyle/>
+          <a:p>
+            <a:pPr algn="ctr"/>
+          </a:p>
+        </p:txBody>
+      </p:sp>
+      <p:sp>
+        <p:nvSpPr>
+          <p:cNvPr id="12" name="TextBox 11"/>
+          <p:cNvSpPr txBox="1"/>
+          <p:nvPr/>
+        </p:nvSpPr>
+        <p:spPr>
+          <a:xfrm>
+            <a:off x="457200" y="6565392"/>
+            <a:ext cx="3657600" cy="228600"/>
+          </a:xfrm>
+          <a:prstGeom prst="rect">
+            <a:avLst/>
+          </a:prstGeom>
+          <a:noFill/>
+        </p:spPr>
+        <p:txBody>
+          <a:bodyPr wrap="square" tIns="25400" bIns="25400" lIns="25400" rIns="25400" anchor="t">
+            <a:spAutoFit/>
+          </a:bodyPr>
+          <a:lstStyle/>
+          <a:p>
+            <a:pPr algn="l"/>
+            <a:r>
+              <a:rPr sz="900" b="1" i="0">
+                <a:solidFill>
+                  <a:srgbClr val="0284C7"/>
+                </a:solidFill>
+                <a:latin typeface="Space Grotesk"/>
+              </a:rPr>
+              <a:t>Booming Venture</a:t>
+            </a:r>
+          </a:p>
+        </p:txBody>
+      </p:sp>
+      <p:sp>
+        <p:nvSpPr>
+          <p:cNvPr id="13" name="TextBox 12"/>
+          <p:cNvSpPr txBox="1"/>
+          <p:nvPr/>
+        </p:nvSpPr>
+        <p:spPr>
+          <a:xfrm>
+            <a:off x="10058400" y="6565392"/>
+            <a:ext cx="1828800" cy="228600"/>
+          </a:xfrm>
+          <a:prstGeom prst="rect">
+            <a:avLst/>
+          </a:prstGeom>
+          <a:noFill/>
+        </p:spPr>
+        <p:txBody>
+          <a:bodyPr wrap="square" tIns="25400" bIns="25400" lIns="25400" rIns="25400" anchor="t">
+            <a:spAutoFit/>
+          </a:bodyPr>
+          <a:lstStyle/>
+          <a:p>
+            <a:pPr algn="r"/>
+            <a:r>
+              <a:rPr sz="900" b="0" i="0">
+                <a:solidFill>
+                  <a:srgbClr val="64748B"/>
+                </a:solidFill>
+                <a:latin typeface="Inter"/>
+              </a:rPr>
+              <a:t>9 / 12</a:t>
             </a:r>
           </a:p>
         </p:txBody>

--- a/wp-content/themes/booming-venture/assets/booming-venture-template.pptx
+++ b/wp-content/themes/booming-venture/assets/booming-venture-template.pptx
@@ -29,7 +29,7 @@
         <a:solidFill>
           <a:schemeClr val="tx1"/>
         </a:solidFill>
-        <a:latin typeface="+mn-lt"/>
+        <a:latin typeface="+mn-lt" panose="020F0502020204030204"/>
         <a:ea typeface="+mn-ea"/>
         <a:cs typeface="+mn-cs"/>
       </a:defRPr>
@@ -39,7 +39,7 @@
         <a:solidFill>
           <a:schemeClr val="tx1"/>
         </a:solidFill>
-        <a:latin typeface="+mn-lt"/>
+        <a:latin typeface="+mn-lt" panose="020F0502020204030204"/>
         <a:ea typeface="+mn-ea"/>
         <a:cs typeface="+mn-cs"/>
       </a:defRPr>
@@ -49,7 +49,7 @@
         <a:solidFill>
           <a:schemeClr val="tx1"/>
         </a:solidFill>
-        <a:latin typeface="+mn-lt"/>
+        <a:latin typeface="+mn-lt" panose="020F0502020204030204"/>
         <a:ea typeface="+mn-ea"/>
         <a:cs typeface="+mn-cs"/>
       </a:defRPr>
@@ -59,7 +59,7 @@
         <a:solidFill>
           <a:schemeClr val="tx1"/>
         </a:solidFill>
-        <a:latin typeface="+mn-lt"/>
+        <a:latin typeface="+mn-lt" panose="020F0502020204030204"/>
         <a:ea typeface="+mn-ea"/>
         <a:cs typeface="+mn-cs"/>
       </a:defRPr>
@@ -69,7 +69,7 @@
         <a:solidFill>
           <a:schemeClr val="tx1"/>
         </a:solidFill>
-        <a:latin typeface="+mn-lt"/>
+        <a:latin typeface="+mn-lt" panose="020F0502020204030204"/>
         <a:ea typeface="+mn-ea"/>
         <a:cs typeface="+mn-cs"/>
       </a:defRPr>
@@ -79,7 +79,7 @@
         <a:solidFill>
           <a:schemeClr val="tx1"/>
         </a:solidFill>
-        <a:latin typeface="+mn-lt"/>
+        <a:latin typeface="+mn-lt" panose="020F0502020204030204"/>
         <a:ea typeface="+mn-ea"/>
         <a:cs typeface="+mn-cs"/>
       </a:defRPr>
@@ -89,7 +89,7 @@
         <a:solidFill>
           <a:schemeClr val="tx1"/>
         </a:solidFill>
-        <a:latin typeface="+mn-lt"/>
+        <a:latin typeface="+mn-lt" panose="020F0502020204030204"/>
         <a:ea typeface="+mn-ea"/>
         <a:cs typeface="+mn-cs"/>
       </a:defRPr>
@@ -99,7 +99,7 @@
         <a:solidFill>
           <a:schemeClr val="tx1"/>
         </a:solidFill>
-        <a:latin typeface="+mn-lt"/>
+        <a:latin typeface="+mn-lt" panose="020F0502020204030204"/>
         <a:ea typeface="+mn-ea"/>
         <a:cs typeface="+mn-cs"/>
       </a:defRPr>
@@ -109,7 +109,7 @@
         <a:solidFill>
           <a:schemeClr val="tx1"/>
         </a:solidFill>
-        <a:latin typeface="+mn-lt"/>
+        <a:latin typeface="+mn-lt" panose="020F0502020204030204"/>
         <a:ea typeface="+mn-ea"/>
         <a:cs typeface="+mn-cs"/>
       </a:defRPr>
@@ -3790,7 +3790,7 @@
                 </a:solidFill>
                 <a:latin typeface="Inter"/>
               </a:rPr>
-              <a:t>Each card is a self-contained passage. Quotable, citable, scannable.</a:t>
+              <a:t>Each card is a self-contained passage.</a:t>
             </a:r>
           </a:p>
         </p:txBody>
@@ -3985,7 +3985,7 @@
                 </a:solidFill>
                 <a:latin typeface="Inter"/>
               </a:rPr>
-              <a:t>Princeton GEO study, 10,000 queries</a:t>
+              <a:t>Princeton GEO study</a:t>
             </a:r>
           </a:p>
         </p:txBody>
@@ -4180,7 +4180,7 @@
                 </a:solidFill>
                 <a:latin typeface="Inter"/>
               </a:rPr>
-              <a:t>Kevin Indig, 1.2M ChatGPT answers</a:t>
+              <a:t>Kevin Indig, 1.2M answers</a:t>
             </a:r>
           </a:p>
         </p:txBody>
@@ -4340,7 +4340,7 @@
                 </a:solidFill>
                 <a:latin typeface="Inter"/>
               </a:rPr>
-              <a:t>Conversion rate from AI-search referrals (22% higher than organic)</a:t>
+              <a:t>Conversion from AI-search referrals (22% higher than organic)</a:t>
             </a:r>
           </a:p>
         </p:txBody>
@@ -4375,7 +4375,7 @@
                 </a:solidFill>
                 <a:latin typeface="Inter"/>
               </a:rPr>
-              <a:t>Martal 2026 benchmark</a:t>
+              <a:t>Martal 2026</a:t>
             </a:r>
           </a:p>
         </p:txBody>
@@ -4621,7 +4621,7 @@
                 </a:solidFill>
                 <a:latin typeface="Inter"/>
               </a:rPr>
-              <a:t>Ready to accelerate your business growth? Contact us today for a free consultation.</a:t>
+              <a:t>Contact us today for a free consultation.</a:t>
             </a:r>
           </a:p>
         </p:txBody>
@@ -6235,7 +6235,7 @@
                 </a:solidFill>
                 <a:latin typeface="Inter"/>
               </a:rPr>
-              <a:t>Replace with your own metrics. The layout mirrors the homepage hero stats card.</a:t>
+              <a:t>Replace with your own metrics. Layout mirrors the homepage hero stats card.</a:t>
             </a:r>
           </a:p>
         </p:txBody>
@@ -8023,7 +8023,7 @@
                 </a:solidFill>
                 <a:latin typeface="Inter"/>
               </a:rPr>
-              <a:t>Comprehensive solutions designed to help your business thrive in today's competitive landscape.</a:t>
+              <a:t>Comprehensive solutions designed to help your business thrive.</a:t>
             </a:r>
           </a:p>
         </p:txBody>
@@ -9071,7 +9071,7 @@
                 </a:solidFill>
                 <a:latin typeface="Inter"/>
               </a:rPr>
-              <a:t>Comprehensive programs that scale your business efficiently and sustainably.</a:t>
+              <a:t>Programs that scale your business efficiently and sustainably.</a:t>
             </a:r>
           </a:p>
         </p:txBody>
@@ -10776,7 +10776,7 @@
                 </a:solidFill>
                 <a:latin typeface="Inter"/>
               </a:rPr>
-              <a:t>We combine strategic thinking with cutting-edge technology to help businesses achieve exceptional growth.</a:t>
+              <a:t>Strategic thinking + cutting-edge technology.</a:t>
             </a:r>
           </a:p>
         </p:txBody>
@@ -12021,7 +12021,7 @@
                 </a:solidFill>
                 <a:latin typeface="Inter"/>
               </a:rPr>
-              <a:t>Hear from businesses we've helped scale through innovative strategies</a:t>
+              <a:t>Hear from businesses we've helped scale.</a:t>
             </a:r>
           </a:p>
         </p:txBody>
@@ -12381,321 +12381,110 @@
 </file>
 
 <file path=ppt/theme/theme1.xml><?xml version="1.0" encoding="utf-8"?>
-<a:theme xmlns:a="http://schemas.openxmlformats.org/drawingml/2006/main" name="Office Theme">
+<a:theme xmlns:a="http://schemas.openxmlformats.org/drawingml/2006/main" name="Booming Venture">
   <a:themeElements>
-    <a:clrScheme name="Office">
+    <a:clrScheme name="Booming Venture">
       <a:dk1>
-        <a:sysClr val="windowText" lastClr="000000"/>
+        <a:srgbClr val="0C1A2E"/>
       </a:dk1>
       <a:lt1>
-        <a:sysClr val="window" lastClr="FFFFFF"/>
+        <a:srgbClr val="FFFFFF"/>
       </a:lt1>
       <a:dk2>
-        <a:srgbClr val="1F497D"/>
+        <a:srgbClr val="1F2937"/>
       </a:dk2>
       <a:lt2>
-        <a:srgbClr val="EEECE1"/>
+        <a:srgbClr val="F8FAFC"/>
       </a:lt2>
       <a:accent1>
-        <a:srgbClr val="4F81BD"/>
+        <a:srgbClr val="0284C7"/>
       </a:accent1>
       <a:accent2>
-        <a:srgbClr val="C0504D"/>
+        <a:srgbClr val="14B8A6"/>
       </a:accent2>
       <a:accent3>
-        <a:srgbClr val="9BBB59"/>
+        <a:srgbClr val="38BDF8"/>
       </a:accent3>
       <a:accent4>
-        <a:srgbClr val="8064A2"/>
+        <a:srgbClr val="5EEAD4"/>
       </a:accent4>
       <a:accent5>
-        <a:srgbClr val="4BACC6"/>
+        <a:srgbClr val="7DD3FC"/>
       </a:accent5>
       <a:accent6>
-        <a:srgbClr val="F79646"/>
+        <a:srgbClr val="64748B"/>
       </a:accent6>
       <a:hlink>
-        <a:srgbClr val="0000FF"/>
+        <a:srgbClr val="0284C7"/>
       </a:hlink>
       <a:folHlink>
-        <a:srgbClr val="800080"/>
+        <a:srgbClr val="0369A1"/>
       </a:folHlink>
     </a:clrScheme>
-    <a:fontScheme name="Office">
+    <a:fontScheme name="Booming Venture">
       <a:majorFont>
-        <a:latin typeface="Calibri"/>
+        <a:latin typeface="Space Grotesk"/>
         <a:ea typeface=""/>
         <a:cs typeface=""/>
-        <a:font script="Jpan" typeface="ＭＳ Ｐゴシック"/>
-        <a:font script="Hang" typeface="맑은 고딕"/>
-        <a:font script="Hans" typeface="宋体"/>
-        <a:font script="Hant" typeface="新細明體"/>
-        <a:font script="Arab" typeface="Times New Roman"/>
-        <a:font script="Hebr" typeface="Times New Roman"/>
-        <a:font script="Thai" typeface="Angsana New"/>
-        <a:font script="Ethi" typeface="Nyala"/>
-        <a:font script="Beng" typeface="Vrinda"/>
-        <a:font script="Gujr" typeface="Shruti"/>
-        <a:font script="Khmr" typeface="MoolBoran"/>
-        <a:font script="Knda" typeface="Tunga"/>
-        <a:font script="Guru" typeface="Raavi"/>
-        <a:font script="Cans" typeface="Euphemia"/>
-        <a:font script="Cher" typeface="Plantagenet Cherokee"/>
-        <a:font script="Yiii" typeface="Microsoft Yi Baiti"/>
-        <a:font script="Tibt" typeface="Microsoft Himalaya"/>
-        <a:font script="Thaa" typeface="MV Boli"/>
-        <a:font script="Deva" typeface="Mangal"/>
-        <a:font script="Telu" typeface="Gautami"/>
-        <a:font script="Taml" typeface="Latha"/>
-        <a:font script="Syrc" typeface="Estrangelo Edessa"/>
-        <a:font script="Orya" typeface="Kalinga"/>
-        <a:font script="Mlym" typeface="Kartika"/>
-        <a:font script="Laoo" typeface="DokChampa"/>
-        <a:font script="Sinh" typeface="Iskoola Pota"/>
-        <a:font script="Mong" typeface="Mongolian Baiti"/>
-        <a:font script="Viet" typeface="Times New Roman"/>
-        <a:font script="Uigh" typeface="Microsoft Uighur"/>
-        <a:font script="Geor" typeface="Sylfaen"/>
       </a:majorFont>
       <a:minorFont>
-        <a:latin typeface="Calibri"/>
+        <a:latin typeface="Inter"/>
         <a:ea typeface=""/>
         <a:cs typeface=""/>
-        <a:font script="Jpan" typeface="ＭＳ Ｐゴシック"/>
-        <a:font script="Hang" typeface="맑은 고딕"/>
-        <a:font script="Hans" typeface="宋体"/>
-        <a:font script="Hant" typeface="新細明體"/>
-        <a:font script="Arab" typeface="Arial"/>
-        <a:font script="Hebr" typeface="Arial"/>
-        <a:font script="Thai" typeface="Cordia New"/>
-        <a:font script="Ethi" typeface="Nyala"/>
-        <a:font script="Beng" typeface="Vrinda"/>
-        <a:font script="Gujr" typeface="Shruti"/>
-        <a:font script="Khmr" typeface="DaunPenh"/>
-        <a:font script="Knda" typeface="Tunga"/>
-        <a:font script="Guru" typeface="Raavi"/>
-        <a:font script="Cans" typeface="Euphemia"/>
-        <a:font script="Cher" typeface="Plantagenet Cherokee"/>
-        <a:font script="Yiii" typeface="Microsoft Yi Baiti"/>
-        <a:font script="Tibt" typeface="Microsoft Himalaya"/>
-        <a:font script="Thaa" typeface="MV Boli"/>
-        <a:font script="Deva" typeface="Mangal"/>
-        <a:font script="Telu" typeface="Gautami"/>
-        <a:font script="Taml" typeface="Latha"/>
-        <a:font script="Syrc" typeface="Estrangelo Edessa"/>
-        <a:font script="Orya" typeface="Kalinga"/>
-        <a:font script="Mlym" typeface="Kartika"/>
-        <a:font script="Laoo" typeface="DokChampa"/>
-        <a:font script="Sinh" typeface="Iskoola Pota"/>
-        <a:font script="Mong" typeface="Mongolian Baiti"/>
-        <a:font script="Viet" typeface="Arial"/>
-        <a:font script="Uigh" typeface="Microsoft Uighur"/>
-        <a:font script="Geor" typeface="Sylfaen"/>
       </a:minorFont>
     </a:fontScheme>
-    <a:fmtScheme name="Office">
+    <a:fmtScheme name="Booming Venture">
       <a:fillStyleLst>
         <a:solidFill>
           <a:schemeClr val="phClr"/>
         </a:solidFill>
-        <a:gradFill rotWithShape="1">
-          <a:gsLst>
-            <a:gs pos="0">
-              <a:schemeClr val="phClr">
-                <a:tint val="50000"/>
-                <a:satMod val="300000"/>
-              </a:schemeClr>
-            </a:gs>
-            <a:gs pos="35000">
-              <a:schemeClr val="phClr">
-                <a:tint val="37000"/>
-                <a:satMod val="300000"/>
-              </a:schemeClr>
-            </a:gs>
-            <a:gs pos="100000">
-              <a:schemeClr val="phClr">
-                <a:tint val="15000"/>
-                <a:satMod val="350000"/>
-              </a:schemeClr>
-            </a:gs>
-          </a:gsLst>
-          <a:lin ang="16200000" scaled="1"/>
-        </a:gradFill>
-        <a:gradFill rotWithShape="1">
-          <a:gsLst>
-            <a:gs pos="0">
-              <a:schemeClr val="phClr">
-                <a:tint val="100000"/>
-                <a:shade val="100000"/>
-                <a:satMod val="130000"/>
-              </a:schemeClr>
-            </a:gs>
-            <a:gs pos="100000">
-              <a:schemeClr val="phClr">
-                <a:tint val="50000"/>
-                <a:shade val="100000"/>
-                <a:satMod val="350000"/>
-              </a:schemeClr>
-            </a:gs>
-          </a:gsLst>
-          <a:lin ang="16200000" scaled="0"/>
-        </a:gradFill>
+        <a:solidFill>
+          <a:schemeClr val="phClr"/>
+        </a:solidFill>
+        <a:solidFill>
+          <a:schemeClr val="phClr"/>
+        </a:solidFill>
       </a:fillStyleLst>
       <a:lnStyleLst>
-        <a:ln w="9525" cap="flat" cmpd="sng" algn="ctr">
-          <a:solidFill>
-            <a:schemeClr val="phClr">
-              <a:shade val="95000"/>
-              <a:satMod val="105000"/>
-            </a:schemeClr>
-          </a:solidFill>
-          <a:prstDash val="solid"/>
-        </a:ln>
-        <a:ln w="25400" cap="flat" cmpd="sng" algn="ctr">
+        <a:ln w="9525">
           <a:solidFill>
             <a:schemeClr val="phClr"/>
           </a:solidFill>
-          <a:prstDash val="solid"/>
         </a:ln>
-        <a:ln w="38100" cap="flat" cmpd="sng" algn="ctr">
+        <a:ln w="19050">
           <a:solidFill>
             <a:schemeClr val="phClr"/>
           </a:solidFill>
-          <a:prstDash val="solid"/>
+        </a:ln>
+        <a:ln w="38100">
+          <a:solidFill>
+            <a:schemeClr val="phClr"/>
+          </a:solidFill>
         </a:ln>
       </a:lnStyleLst>
       <a:effectStyleLst>
         <a:effectStyle>
-          <a:effectLst>
-            <a:outerShdw blurRad="40000" dist="20000" dir="5400000" rotWithShape="0">
-              <a:srgbClr val="000000">
-                <a:alpha val="38000"/>
-              </a:srgbClr>
-            </a:outerShdw>
-          </a:effectLst>
+          <a:effectLst/>
         </a:effectStyle>
         <a:effectStyle>
-          <a:effectLst>
-            <a:outerShdw blurRad="40000" dist="23000" dir="5400000" rotWithShape="0">
-              <a:srgbClr val="000000">
-                <a:alpha val="35000"/>
-              </a:srgbClr>
-            </a:outerShdw>
-          </a:effectLst>
+          <a:effectLst/>
         </a:effectStyle>
         <a:effectStyle>
-          <a:effectLst>
-            <a:outerShdw blurRad="40000" dist="23000" dir="5400000" rotWithShape="0">
-              <a:srgbClr val="000000">
-                <a:alpha val="35000"/>
-              </a:srgbClr>
-            </a:outerShdw>
-          </a:effectLst>
-          <a:scene3d>
-            <a:camera prst="orthographicFront">
-              <a:rot lat="0" lon="0" rev="0"/>
-            </a:camera>
-            <a:lightRig rig="threePt" dir="t">
-              <a:rot lat="0" lon="0" rev="1200000"/>
-            </a:lightRig>
-          </a:scene3d>
-          <a:sp3d>
-            <a:bevelT w="63500" h="25400"/>
-          </a:sp3d>
+          <a:effectLst/>
         </a:effectStyle>
       </a:effectStyleLst>
       <a:bgFillStyleLst>
         <a:solidFill>
           <a:schemeClr val="phClr"/>
         </a:solidFill>
-        <a:gradFill rotWithShape="1">
-          <a:gsLst>
-            <a:gs pos="0">
-              <a:schemeClr val="phClr">
-                <a:tint val="40000"/>
-                <a:satMod val="350000"/>
-              </a:schemeClr>
-            </a:gs>
-            <a:gs pos="40000">
-              <a:schemeClr val="phClr">
-                <a:tint val="45000"/>
-                <a:shade val="99000"/>
-                <a:satMod val="350000"/>
-              </a:schemeClr>
-            </a:gs>
-            <a:gs pos="100000">
-              <a:schemeClr val="phClr">
-                <a:shade val="20000"/>
-                <a:satMod val="255000"/>
-              </a:schemeClr>
-            </a:gs>
-          </a:gsLst>
-          <a:path path="circle">
-            <a:fillToRect l="50000" t="-80000" r="50000" b="180000"/>
-          </a:path>
-        </a:gradFill>
-        <a:gradFill rotWithShape="1">
-          <a:gsLst>
-            <a:gs pos="0">
-              <a:schemeClr val="phClr">
-                <a:tint val="80000"/>
-                <a:satMod val="300000"/>
-              </a:schemeClr>
-            </a:gs>
-            <a:gs pos="100000">
-              <a:schemeClr val="phClr">
-                <a:shade val="30000"/>
-                <a:satMod val="200000"/>
-              </a:schemeClr>
-            </a:gs>
-          </a:gsLst>
-          <a:path path="circle">
-            <a:fillToRect l="50000" t="50000" r="50000" b="50000"/>
-          </a:path>
-        </a:gradFill>
+        <a:solidFill>
+          <a:schemeClr val="phClr"/>
+        </a:solidFill>
+        <a:solidFill>
+          <a:schemeClr val="phClr"/>
+        </a:solidFill>
       </a:bgFillStyleLst>
     </a:fmtScheme>
   </a:themeElements>
-  <a:objectDefaults>
-    <a:spDef>
-      <a:spPr/>
-      <a:bodyPr/>
-      <a:lstStyle/>
-      <a:style>
-        <a:lnRef idx="1">
-          <a:schemeClr val="accent1"/>
-        </a:lnRef>
-        <a:fillRef idx="3">
-          <a:schemeClr val="accent1"/>
-        </a:fillRef>
-        <a:effectRef idx="2">
-          <a:schemeClr val="accent1"/>
-        </a:effectRef>
-        <a:fontRef idx="minor">
-          <a:schemeClr val="lt1"/>
-        </a:fontRef>
-      </a:style>
-    </a:spDef>
-    <a:lnDef>
-      <a:spPr/>
-      <a:bodyPr/>
-      <a:lstStyle/>
-      <a:style>
-        <a:lnRef idx="2">
-          <a:schemeClr val="accent1"/>
-        </a:lnRef>
-        <a:fillRef idx="0">
-          <a:schemeClr val="accent1"/>
-        </a:fillRef>
-        <a:effectRef idx="1">
-          <a:schemeClr val="accent1"/>
-        </a:effectRef>
-        <a:fontRef idx="minor">
-          <a:schemeClr val="tx1"/>
-        </a:fontRef>
-      </a:style>
-    </a:lnDef>
-  </a:objectDefaults>
-  <a:extraClrSchemeLst/>
 </a:theme>
 </file>